--- a/docs/demos/presentacion/ExamLab-Presentacion-Comercial-v3.pptx
+++ b/docs/demos/presentacion/ExamLab-Presentacion-Comercial-v3.pptx
@@ -15,6 +15,7 @@
     <p:sldId id="263" r:id="rId14"/>
     <p:sldId id="264" r:id="rId15"/>
     <p:sldId id="265" r:id="rId16"/>
+    <p:sldId id="266" r:id="rId17"/>
   </p:sldIdLst>
   <p:sldSz cx="12191695" cy="6858000" type="screen4x3"/>
   <p:notesSz cx="6858000" cy="9144000"/>
@@ -3338,6 +3339,995 @@
       <p:grpSpPr/>
       <p:sp>
         <p:nvSpPr>
+          <p:cNvPr id="2" name="TextBox 1"/>
+          <p:cNvSpPr txBox="1"/>
+          <p:nvPr/>
+        </p:nvSpPr>
+        <p:spPr>
+          <a:xfrm>
+            <a:off x="457200" y="365760"/>
+            <a:ext cx="10972800" cy="365760"/>
+          </a:xfrm>
+          <a:prstGeom prst="rect">
+            <a:avLst/>
+          </a:prstGeom>
+          <a:noFill/>
+        </p:spPr>
+        <p:txBody>
+          <a:bodyPr wrap="square" anchor="t" lIns="0" rIns="0" tIns="0" bIns="0">
+            <a:spAutoFit/>
+          </a:bodyPr>
+          <a:lstStyle/>
+          <a:p>
+            <a:pPr algn="l"/>
+            <a:r>
+              <a:rPr sz="1100" b="1" i="0">
+                <a:solidFill>
+                  <a:srgbClr val="147A8C"/>
+                </a:solidFill>
+                <a:latin typeface="Calibri"/>
+              </a:rPr>
+              <a:t>CUÁNTO AHORRAS</a:t>
+            </a:r>
+          </a:p>
+        </p:txBody>
+      </p:sp>
+      <p:sp>
+        <p:nvSpPr>
+          <p:cNvPr id="3" name="TextBox 2"/>
+          <p:cNvSpPr txBox="1"/>
+          <p:nvPr/>
+        </p:nvSpPr>
+        <p:spPr>
+          <a:xfrm>
+            <a:off x="457200" y="777240"/>
+            <a:ext cx="10972800" cy="640080"/>
+          </a:xfrm>
+          <a:prstGeom prst="rect">
+            <a:avLst/>
+          </a:prstGeom>
+          <a:noFill/>
+        </p:spPr>
+        <p:txBody>
+          <a:bodyPr wrap="square" anchor="t" lIns="0" rIns="0" tIns="0" bIns="0">
+            <a:spAutoFit/>
+          </a:bodyPr>
+          <a:lstStyle/>
+          <a:p>
+            <a:pPr algn="l"/>
+            <a:r>
+              <a:rPr sz="2800" b="1" i="0">
+                <a:solidFill>
+                  <a:srgbClr val="0F3E4C"/>
+                </a:solidFill>
+                <a:latin typeface="Calibri"/>
+              </a:rPr>
+              <a:t>El costo real de NO tener ExamLab</a:t>
+            </a:r>
+          </a:p>
+        </p:txBody>
+      </p:sp>
+      <p:sp>
+        <p:nvSpPr>
+          <p:cNvPr id="4" name="Rounded Rectangle 3"/>
+          <p:cNvSpPr/>
+          <p:nvPr/>
+        </p:nvSpPr>
+        <p:spPr>
+          <a:xfrm>
+            <a:off x="457200" y="1920240"/>
+            <a:ext cx="2743200" cy="1554480"/>
+          </a:xfrm>
+          <a:prstGeom prst="roundRect">
+            <a:avLst>
+              <a:gd name="adj" fmla="val 5000"/>
+            </a:avLst>
+          </a:prstGeom>
+          <a:solidFill>
+            <a:srgbClr val="F4F8FA"/>
+          </a:solidFill>
+          <a:ln>
+            <a:noFill/>
+          </a:ln>
+          <a:effectLst/>
+        </p:spPr>
+        <p:style>
+          <a:lnRef idx="1">
+            <a:schemeClr val="accent1"/>
+          </a:lnRef>
+          <a:fillRef idx="3">
+            <a:schemeClr val="accent1"/>
+          </a:fillRef>
+          <a:effectRef idx="2">
+            <a:schemeClr val="accent1"/>
+          </a:effectRef>
+          <a:fontRef idx="minor">
+            <a:schemeClr val="lt1"/>
+          </a:fontRef>
+        </p:style>
+        <p:txBody>
+          <a:bodyPr rtlCol="0" anchor="ctr"/>
+          <a:lstStyle/>
+          <a:p>
+            <a:pPr algn="ctr"/>
+          </a:p>
+        </p:txBody>
+      </p:sp>
+      <p:sp>
+        <p:nvSpPr>
+          <p:cNvPr id="5" name="TextBox 4"/>
+          <p:cNvSpPr txBox="1"/>
+          <p:nvPr/>
+        </p:nvSpPr>
+        <p:spPr>
+          <a:xfrm>
+            <a:off x="457200" y="2057400"/>
+            <a:ext cx="2743200" cy="548640"/>
+          </a:xfrm>
+          <a:prstGeom prst="rect">
+            <a:avLst/>
+          </a:prstGeom>
+          <a:noFill/>
+        </p:spPr>
+        <p:txBody>
+          <a:bodyPr wrap="square" anchor="t" lIns="0" rIns="0" tIns="0" bIns="0">
+            <a:spAutoFit/>
+          </a:bodyPr>
+          <a:lstStyle/>
+          <a:p>
+            <a:pPr algn="ctr"/>
+            <a:r>
+              <a:rPr sz="3200" b="1" i="0">
+                <a:solidFill>
+                  <a:srgbClr val="1E5BAF"/>
+                </a:solidFill>
+                <a:latin typeface="Calibri"/>
+              </a:rPr>
+              <a:t>$60k+</a:t>
+            </a:r>
+          </a:p>
+        </p:txBody>
+      </p:sp>
+      <p:sp>
+        <p:nvSpPr>
+          <p:cNvPr id="6" name="TextBox 5"/>
+          <p:cNvSpPr txBox="1"/>
+          <p:nvPr/>
+        </p:nvSpPr>
+        <p:spPr>
+          <a:xfrm>
+            <a:off x="457200" y="2743200"/>
+            <a:ext cx="2743200" cy="640080"/>
+          </a:xfrm>
+          <a:prstGeom prst="rect">
+            <a:avLst/>
+          </a:prstGeom>
+          <a:noFill/>
+        </p:spPr>
+        <p:txBody>
+          <a:bodyPr wrap="square" anchor="t" lIns="0" rIns="0" tIns="0" bIns="0">
+            <a:spAutoFit/>
+          </a:bodyPr>
+          <a:lstStyle/>
+          <a:p>
+            <a:pPr algn="ctr"/>
+            <a:r>
+              <a:rPr sz="1100" b="0" i="0">
+                <a:solidFill>
+                  <a:srgbClr val="1F2A33"/>
+                </a:solidFill>
+                <a:latin typeface="Calibri"/>
+              </a:rPr>
+              <a:t>Canvas negociado / año
+para 5.000 alumnos</a:t>
+            </a:r>
+          </a:p>
+        </p:txBody>
+      </p:sp>
+      <p:sp>
+        <p:nvSpPr>
+          <p:cNvPr id="7" name="Rounded Rectangle 6"/>
+          <p:cNvSpPr/>
+          <p:nvPr/>
+        </p:nvSpPr>
+        <p:spPr>
+          <a:xfrm>
+            <a:off x="3291840" y="1920240"/>
+            <a:ext cx="2743200" cy="1554480"/>
+          </a:xfrm>
+          <a:prstGeom prst="roundRect">
+            <a:avLst>
+              <a:gd name="adj" fmla="val 5000"/>
+            </a:avLst>
+          </a:prstGeom>
+          <a:solidFill>
+            <a:srgbClr val="F4F8FA"/>
+          </a:solidFill>
+          <a:ln>
+            <a:noFill/>
+          </a:ln>
+          <a:effectLst/>
+        </p:spPr>
+        <p:style>
+          <a:lnRef idx="1">
+            <a:schemeClr val="accent1"/>
+          </a:lnRef>
+          <a:fillRef idx="3">
+            <a:schemeClr val="accent1"/>
+          </a:fillRef>
+          <a:effectRef idx="2">
+            <a:schemeClr val="accent1"/>
+          </a:effectRef>
+          <a:fontRef idx="minor">
+            <a:schemeClr val="lt1"/>
+          </a:fontRef>
+        </p:style>
+        <p:txBody>
+          <a:bodyPr rtlCol="0" anchor="ctr"/>
+          <a:lstStyle/>
+          <a:p>
+            <a:pPr algn="ctr"/>
+          </a:p>
+        </p:txBody>
+      </p:sp>
+      <p:sp>
+        <p:nvSpPr>
+          <p:cNvPr id="8" name="TextBox 7"/>
+          <p:cNvSpPr txBox="1"/>
+          <p:nvPr/>
+        </p:nvSpPr>
+        <p:spPr>
+          <a:xfrm>
+            <a:off x="3291840" y="2057400"/>
+            <a:ext cx="2743200" cy="548640"/>
+          </a:xfrm>
+          <a:prstGeom prst="rect">
+            <a:avLst/>
+          </a:prstGeom>
+          <a:noFill/>
+        </p:spPr>
+        <p:txBody>
+          <a:bodyPr wrap="square" anchor="t" lIns="0" rIns="0" tIns="0" bIns="0">
+            <a:spAutoFit/>
+          </a:bodyPr>
+          <a:lstStyle/>
+          <a:p>
+            <a:pPr algn="ctr"/>
+            <a:r>
+              <a:rPr sz="3200" b="1" i="0">
+                <a:solidFill>
+                  <a:srgbClr val="1E5BAF"/>
+                </a:solidFill>
+                <a:latin typeface="Calibri"/>
+              </a:rPr>
+              <a:t>8-12h</a:t>
+            </a:r>
+          </a:p>
+        </p:txBody>
+      </p:sp>
+      <p:sp>
+        <p:nvSpPr>
+          <p:cNvPr id="9" name="TextBox 8"/>
+          <p:cNvSpPr txBox="1"/>
+          <p:nvPr/>
+        </p:nvSpPr>
+        <p:spPr>
+          <a:xfrm>
+            <a:off x="3291840" y="2743200"/>
+            <a:ext cx="2743200" cy="640080"/>
+          </a:xfrm>
+          <a:prstGeom prst="rect">
+            <a:avLst/>
+          </a:prstGeom>
+          <a:noFill/>
+        </p:spPr>
+        <p:txBody>
+          <a:bodyPr wrap="square" anchor="t" lIns="0" rIns="0" tIns="0" bIns="0">
+            <a:spAutoFit/>
+          </a:bodyPr>
+          <a:lstStyle/>
+          <a:p>
+            <a:pPr algn="ctr"/>
+            <a:r>
+              <a:rPr sz="1100" b="0" i="0">
+                <a:solidFill>
+                  <a:srgbClr val="1F2A33"/>
+                </a:solidFill>
+                <a:latin typeface="Calibri"/>
+              </a:rPr>
+              <a:t>Que un docente ahorra
+por semana con IA</a:t>
+            </a:r>
+          </a:p>
+        </p:txBody>
+      </p:sp>
+      <p:sp>
+        <p:nvSpPr>
+          <p:cNvPr id="10" name="Rounded Rectangle 9"/>
+          <p:cNvSpPr/>
+          <p:nvPr/>
+        </p:nvSpPr>
+        <p:spPr>
+          <a:xfrm>
+            <a:off x="6126480" y="1920240"/>
+            <a:ext cx="2743200" cy="1554480"/>
+          </a:xfrm>
+          <a:prstGeom prst="roundRect">
+            <a:avLst>
+              <a:gd name="adj" fmla="val 5000"/>
+            </a:avLst>
+          </a:prstGeom>
+          <a:solidFill>
+            <a:srgbClr val="F4F8FA"/>
+          </a:solidFill>
+          <a:ln>
+            <a:noFill/>
+          </a:ln>
+          <a:effectLst/>
+        </p:spPr>
+        <p:style>
+          <a:lnRef idx="1">
+            <a:schemeClr val="accent1"/>
+          </a:lnRef>
+          <a:fillRef idx="3">
+            <a:schemeClr val="accent1"/>
+          </a:fillRef>
+          <a:effectRef idx="2">
+            <a:schemeClr val="accent1"/>
+          </a:effectRef>
+          <a:fontRef idx="minor">
+            <a:schemeClr val="lt1"/>
+          </a:fontRef>
+        </p:style>
+        <p:txBody>
+          <a:bodyPr rtlCol="0" anchor="ctr"/>
+          <a:lstStyle/>
+          <a:p>
+            <a:pPr algn="ctr"/>
+          </a:p>
+        </p:txBody>
+      </p:sp>
+      <p:sp>
+        <p:nvSpPr>
+          <p:cNvPr id="11" name="TextBox 10"/>
+          <p:cNvSpPr txBox="1"/>
+          <p:nvPr/>
+        </p:nvSpPr>
+        <p:spPr>
+          <a:xfrm>
+            <a:off x="6126480" y="2057400"/>
+            <a:ext cx="2743200" cy="548640"/>
+          </a:xfrm>
+          <a:prstGeom prst="rect">
+            <a:avLst/>
+          </a:prstGeom>
+          <a:noFill/>
+        </p:spPr>
+        <p:txBody>
+          <a:bodyPr wrap="square" anchor="t" lIns="0" rIns="0" tIns="0" bIns="0">
+            <a:spAutoFit/>
+          </a:bodyPr>
+          <a:lstStyle/>
+          <a:p>
+            <a:pPr algn="ctr"/>
+            <a:r>
+              <a:rPr sz="3200" b="1" i="0">
+                <a:solidFill>
+                  <a:srgbClr val="1E5BAF"/>
+                </a:solidFill>
+                <a:latin typeface="Calibri"/>
+              </a:rPr>
+              <a:t>$0</a:t>
+            </a:r>
+          </a:p>
+        </p:txBody>
+      </p:sp>
+      <p:sp>
+        <p:nvSpPr>
+          <p:cNvPr id="12" name="TextBox 11"/>
+          <p:cNvSpPr txBox="1"/>
+          <p:nvPr/>
+        </p:nvSpPr>
+        <p:spPr>
+          <a:xfrm>
+            <a:off x="6126480" y="2743200"/>
+            <a:ext cx="2743200" cy="640080"/>
+          </a:xfrm>
+          <a:prstGeom prst="rect">
+            <a:avLst/>
+          </a:prstGeom>
+          <a:noFill/>
+        </p:spPr>
+        <p:txBody>
+          <a:bodyPr wrap="square" anchor="t" lIns="0" rIns="0" tIns="0" bIns="0">
+            <a:spAutoFit/>
+          </a:bodyPr>
+          <a:lstStyle/>
+          <a:p>
+            <a:pPr algn="ctr"/>
+            <a:r>
+              <a:rPr sz="1100" b="0" i="0">
+                <a:solidFill>
+                  <a:srgbClr val="1F2A33"/>
+                </a:solidFill>
+                <a:latin typeface="Calibri"/>
+              </a:rPr>
+              <a:t>Costo de IA en el plan
+con BYO API key</a:t>
+            </a:r>
+          </a:p>
+        </p:txBody>
+      </p:sp>
+      <p:sp>
+        <p:nvSpPr>
+          <p:cNvPr id="13" name="Rounded Rectangle 12"/>
+          <p:cNvSpPr/>
+          <p:nvPr/>
+        </p:nvSpPr>
+        <p:spPr>
+          <a:xfrm>
+            <a:off x="8961120" y="1920240"/>
+            <a:ext cx="2743200" cy="1554480"/>
+          </a:xfrm>
+          <a:prstGeom prst="roundRect">
+            <a:avLst>
+              <a:gd name="adj" fmla="val 5000"/>
+            </a:avLst>
+          </a:prstGeom>
+          <a:solidFill>
+            <a:srgbClr val="F4F8FA"/>
+          </a:solidFill>
+          <a:ln>
+            <a:noFill/>
+          </a:ln>
+          <a:effectLst/>
+        </p:spPr>
+        <p:style>
+          <a:lnRef idx="1">
+            <a:schemeClr val="accent1"/>
+          </a:lnRef>
+          <a:fillRef idx="3">
+            <a:schemeClr val="accent1"/>
+          </a:fillRef>
+          <a:effectRef idx="2">
+            <a:schemeClr val="accent1"/>
+          </a:effectRef>
+          <a:fontRef idx="minor">
+            <a:schemeClr val="lt1"/>
+          </a:fontRef>
+        </p:style>
+        <p:txBody>
+          <a:bodyPr rtlCol="0" anchor="ctr"/>
+          <a:lstStyle/>
+          <a:p>
+            <a:pPr algn="ctr"/>
+          </a:p>
+        </p:txBody>
+      </p:sp>
+      <p:sp>
+        <p:nvSpPr>
+          <p:cNvPr id="14" name="TextBox 13"/>
+          <p:cNvSpPr txBox="1"/>
+          <p:nvPr/>
+        </p:nvSpPr>
+        <p:spPr>
+          <a:xfrm>
+            <a:off x="8961120" y="2057400"/>
+            <a:ext cx="2743200" cy="548640"/>
+          </a:xfrm>
+          <a:prstGeom prst="rect">
+            <a:avLst/>
+          </a:prstGeom>
+          <a:noFill/>
+        </p:spPr>
+        <p:txBody>
+          <a:bodyPr wrap="square" anchor="t" lIns="0" rIns="0" tIns="0" bIns="0">
+            <a:spAutoFit/>
+          </a:bodyPr>
+          <a:lstStyle/>
+          <a:p>
+            <a:pPr algn="ctr"/>
+            <a:r>
+              <a:rPr sz="3200" b="1" i="0">
+                <a:solidFill>
+                  <a:srgbClr val="1E5BAF"/>
+                </a:solidFill>
+                <a:latin typeface="Calibri"/>
+              </a:rPr>
+              <a:t>1 día</a:t>
+            </a:r>
+          </a:p>
+        </p:txBody>
+      </p:sp>
+      <p:sp>
+        <p:nvSpPr>
+          <p:cNvPr id="15" name="TextBox 14"/>
+          <p:cNvSpPr txBox="1"/>
+          <p:nvPr/>
+        </p:nvSpPr>
+        <p:spPr>
+          <a:xfrm>
+            <a:off x="8961120" y="2743200"/>
+            <a:ext cx="2743200" cy="640080"/>
+          </a:xfrm>
+          <a:prstGeom prst="rect">
+            <a:avLst/>
+          </a:prstGeom>
+          <a:noFill/>
+        </p:spPr>
+        <p:txBody>
+          <a:bodyPr wrap="square" anchor="t" lIns="0" rIns="0" tIns="0" bIns="0">
+            <a:spAutoFit/>
+          </a:bodyPr>
+          <a:lstStyle/>
+          <a:p>
+            <a:pPr algn="ctr"/>
+            <a:r>
+              <a:rPr sz="1100" b="0" i="0">
+                <a:solidFill>
+                  <a:srgbClr val="1F2A33"/>
+                </a:solidFill>
+                <a:latin typeface="Calibri"/>
+              </a:rPr>
+              <a:t>Setup completo con
+asistencia guiada</a:t>
+            </a:r>
+          </a:p>
+        </p:txBody>
+      </p:sp>
+      <p:sp>
+        <p:nvSpPr>
+          <p:cNvPr id="16" name="Rounded Rectangle 15"/>
+          <p:cNvSpPr/>
+          <p:nvPr/>
+        </p:nvSpPr>
+        <p:spPr>
+          <a:xfrm>
+            <a:off x="457200" y="3931920"/>
+            <a:ext cx="11247120" cy="2103120"/>
+          </a:xfrm>
+          <a:prstGeom prst="roundRect">
+            <a:avLst>
+              <a:gd name="adj" fmla="val 5000"/>
+            </a:avLst>
+          </a:prstGeom>
+          <a:solidFill>
+            <a:srgbClr val="F9FAFB"/>
+          </a:solidFill>
+          <a:ln w="19050">
+            <a:solidFill>
+              <a:srgbClr val="2EB8C7"/>
+            </a:solidFill>
+          </a:ln>
+          <a:effectLst/>
+        </p:spPr>
+        <p:style>
+          <a:lnRef idx="1">
+            <a:schemeClr val="accent1"/>
+          </a:lnRef>
+          <a:fillRef idx="3">
+            <a:schemeClr val="accent1"/>
+          </a:fillRef>
+          <a:effectRef idx="2">
+            <a:schemeClr val="accent1"/>
+          </a:effectRef>
+          <a:fontRef idx="minor">
+            <a:schemeClr val="lt1"/>
+          </a:fontRef>
+        </p:style>
+        <p:txBody>
+          <a:bodyPr rtlCol="0" anchor="ctr"/>
+          <a:lstStyle/>
+          <a:p>
+            <a:pPr algn="ctr"/>
+          </a:p>
+        </p:txBody>
+      </p:sp>
+      <p:sp>
+        <p:nvSpPr>
+          <p:cNvPr id="17" name="TextBox 16"/>
+          <p:cNvSpPr txBox="1"/>
+          <p:nvPr/>
+        </p:nvSpPr>
+        <p:spPr>
+          <a:xfrm>
+            <a:off x="731520" y="4114800"/>
+            <a:ext cx="10789920" cy="365760"/>
+          </a:xfrm>
+          <a:prstGeom prst="rect">
+            <a:avLst/>
+          </a:prstGeom>
+          <a:noFill/>
+        </p:spPr>
+        <p:txBody>
+          <a:bodyPr wrap="square" anchor="t" lIns="0" rIns="0" tIns="0" bIns="0">
+            <a:spAutoFit/>
+          </a:bodyPr>
+          <a:lstStyle/>
+          <a:p>
+            <a:pPr algn="l"/>
+            <a:r>
+              <a:rPr sz="1500" b="1" i="0">
+                <a:solidFill>
+                  <a:srgbClr val="0F3E4C"/>
+                </a:solidFill>
+                <a:latin typeface="Calibri"/>
+              </a:rPr>
+              <a:t>Ejemplo: Universidad regional con 3.000 matrículas activas</a:t>
+            </a:r>
+          </a:p>
+        </p:txBody>
+      </p:sp>
+      <p:sp>
+        <p:nvSpPr>
+          <p:cNvPr id="18" name="TextBox 17"/>
+          <p:cNvSpPr txBox="1"/>
+          <p:nvPr/>
+        </p:nvSpPr>
+        <p:spPr>
+          <a:xfrm>
+            <a:off x="822960" y="4617720"/>
+            <a:ext cx="5486400" cy="274320"/>
+          </a:xfrm>
+          <a:prstGeom prst="rect">
+            <a:avLst/>
+          </a:prstGeom>
+          <a:noFill/>
+        </p:spPr>
+        <p:txBody>
+          <a:bodyPr wrap="square" anchor="t" lIns="0" rIns="0" tIns="0" bIns="0">
+            <a:spAutoFit/>
+          </a:bodyPr>
+          <a:lstStyle/>
+          <a:p>
+            <a:pPr algn="l"/>
+            <a:r>
+              <a:rPr sz="1200" b="0" i="0">
+                <a:solidFill>
+                  <a:srgbClr val="1F2A33"/>
+                </a:solidFill>
+                <a:latin typeface="Calibri"/>
+              </a:rPr>
+              <a:t>Plan Mediana Auto (12 meses):</a:t>
+            </a:r>
+          </a:p>
+        </p:txBody>
+      </p:sp>
+      <p:sp>
+        <p:nvSpPr>
+          <p:cNvPr id="19" name="TextBox 18"/>
+          <p:cNvSpPr txBox="1"/>
+          <p:nvPr/>
+        </p:nvSpPr>
+        <p:spPr>
+          <a:xfrm>
+            <a:off x="6400800" y="4617720"/>
+            <a:ext cx="5029200" cy="274320"/>
+          </a:xfrm>
+          <a:prstGeom prst="rect">
+            <a:avLst/>
+          </a:prstGeom>
+          <a:noFill/>
+        </p:spPr>
+        <p:txBody>
+          <a:bodyPr wrap="square" anchor="t" lIns="0" rIns="0" tIns="0" bIns="0">
+            <a:spAutoFit/>
+          </a:bodyPr>
+          <a:lstStyle/>
+          <a:p>
+            <a:pPr algn="l"/>
+            <a:r>
+              <a:rPr sz="1200" b="1" i="0">
+                <a:solidFill>
+                  <a:srgbClr val="0F3E4C"/>
+                </a:solidFill>
+                <a:latin typeface="Calibri"/>
+              </a:rPr>
+              <a:t>$349 × 12 = $4.188/año</a:t>
+            </a:r>
+          </a:p>
+        </p:txBody>
+      </p:sp>
+      <p:sp>
+        <p:nvSpPr>
+          <p:cNvPr id="20" name="TextBox 19"/>
+          <p:cNvSpPr txBox="1"/>
+          <p:nvPr/>
+        </p:nvSpPr>
+        <p:spPr>
+          <a:xfrm>
+            <a:off x="822960" y="4937760"/>
+            <a:ext cx="5486400" cy="274320"/>
+          </a:xfrm>
+          <a:prstGeom prst="rect">
+            <a:avLst/>
+          </a:prstGeom>
+          <a:noFill/>
+        </p:spPr>
+        <p:txBody>
+          <a:bodyPr wrap="square" anchor="t" lIns="0" rIns="0" tIns="0" bIns="0">
+            <a:spAutoFit/>
+          </a:bodyPr>
+          <a:lstStyle/>
+          <a:p>
+            <a:pPr algn="l"/>
+            <a:r>
+              <a:rPr sz="1200" b="0" i="0">
+                <a:solidFill>
+                  <a:srgbClr val="1F2A33"/>
+                </a:solidFill>
+                <a:latin typeface="Calibri"/>
+              </a:rPr>
+              <a:t>Comparable Canvas negociado:</a:t>
+            </a:r>
+          </a:p>
+        </p:txBody>
+      </p:sp>
+      <p:sp>
+        <p:nvSpPr>
+          <p:cNvPr id="21" name="TextBox 20"/>
+          <p:cNvSpPr txBox="1"/>
+          <p:nvPr/>
+        </p:nvSpPr>
+        <p:spPr>
+          <a:xfrm>
+            <a:off x="6400800" y="4937760"/>
+            <a:ext cx="5029200" cy="274320"/>
+          </a:xfrm>
+          <a:prstGeom prst="rect">
+            <a:avLst/>
+          </a:prstGeom>
+          <a:noFill/>
+        </p:spPr>
+        <p:txBody>
+          <a:bodyPr wrap="square" anchor="t" lIns="0" rIns="0" tIns="0" bIns="0">
+            <a:spAutoFit/>
+          </a:bodyPr>
+          <a:lstStyle/>
+          <a:p>
+            <a:pPr algn="l"/>
+            <a:r>
+              <a:rPr sz="1200" b="1" i="0">
+                <a:solidFill>
+                  <a:srgbClr val="0F3E4C"/>
+                </a:solidFill>
+                <a:latin typeface="Calibri"/>
+              </a:rPr>
+              <a:t>$24.000-$30.000/año</a:t>
+            </a:r>
+          </a:p>
+        </p:txBody>
+      </p:sp>
+      <p:sp>
+        <p:nvSpPr>
+          <p:cNvPr id="22" name="TextBox 21"/>
+          <p:cNvSpPr txBox="1"/>
+          <p:nvPr/>
+        </p:nvSpPr>
+        <p:spPr>
+          <a:xfrm>
+            <a:off x="822960" y="5257800"/>
+            <a:ext cx="5486400" cy="274320"/>
+          </a:xfrm>
+          <a:prstGeom prst="rect">
+            <a:avLst/>
+          </a:prstGeom>
+          <a:noFill/>
+        </p:spPr>
+        <p:txBody>
+          <a:bodyPr wrap="square" anchor="t" lIns="0" rIns="0" tIns="0" bIns="0">
+            <a:spAutoFit/>
+          </a:bodyPr>
+          <a:lstStyle/>
+          <a:p>
+            <a:pPr algn="l"/>
+            <a:r>
+              <a:rPr sz="1200" b="0" i="0">
+                <a:solidFill>
+                  <a:srgbClr val="1F2A33"/>
+                </a:solidFill>
+                <a:latin typeface="Calibri"/>
+              </a:rPr>
+              <a:t>Ahorro anual con ExamLab:</a:t>
+            </a:r>
+          </a:p>
+        </p:txBody>
+      </p:sp>
+      <p:sp>
+        <p:nvSpPr>
+          <p:cNvPr id="23" name="TextBox 22"/>
+          <p:cNvSpPr txBox="1"/>
+          <p:nvPr/>
+        </p:nvSpPr>
+        <p:spPr>
+          <a:xfrm>
+            <a:off x="6400800" y="5257800"/>
+            <a:ext cx="5029200" cy="274320"/>
+          </a:xfrm>
+          <a:prstGeom prst="rect">
+            <a:avLst/>
+          </a:prstGeom>
+          <a:noFill/>
+        </p:spPr>
+        <p:txBody>
+          <a:bodyPr wrap="square" anchor="t" lIns="0" rIns="0" tIns="0" bIns="0">
+            <a:spAutoFit/>
+          </a:bodyPr>
+          <a:lstStyle/>
+          <a:p>
+            <a:pPr algn="l"/>
+            <a:r>
+              <a:rPr sz="1200" b="1" i="0">
+                <a:solidFill>
+                  <a:srgbClr val="0F3E4C"/>
+                </a:solidFill>
+                <a:latin typeface="Calibri"/>
+              </a:rPr>
+              <a:t>~$20.000-$25.000 USD</a:t>
+            </a:r>
+          </a:p>
+        </p:txBody>
+      </p:sp>
+      <p:sp>
+        <p:nvSpPr>
+          <p:cNvPr id="24" name="TextBox 23"/>
+          <p:cNvSpPr txBox="1"/>
+          <p:nvPr/>
+        </p:nvSpPr>
+        <p:spPr>
+          <a:xfrm>
+            <a:off x="822960" y="5577840"/>
+            <a:ext cx="5486400" cy="274320"/>
+          </a:xfrm>
+          <a:prstGeom prst="rect">
+            <a:avLst/>
+          </a:prstGeom>
+          <a:noFill/>
+        </p:spPr>
+        <p:txBody>
+          <a:bodyPr wrap="square" anchor="t" lIns="0" rIns="0" tIns="0" bIns="0">
+            <a:spAutoFit/>
+          </a:bodyPr>
+          <a:lstStyle/>
+          <a:p>
+            <a:pPr algn="l"/>
+            <a:r>
+              <a:rPr sz="1200" b="0" i="0">
+                <a:solidFill>
+                  <a:srgbClr val="1F2A33"/>
+                </a:solidFill>
+                <a:latin typeface="Calibri"/>
+              </a:rPr>
+              <a:t>Setup + migración:</a:t>
+            </a:r>
+          </a:p>
+        </p:txBody>
+      </p:sp>
+      <p:sp>
+        <p:nvSpPr>
+          <p:cNvPr id="25" name="TextBox 24"/>
+          <p:cNvSpPr txBox="1"/>
+          <p:nvPr/>
+        </p:nvSpPr>
+        <p:spPr>
+          <a:xfrm>
+            <a:off x="6400800" y="5577840"/>
+            <a:ext cx="5029200" cy="274320"/>
+          </a:xfrm>
+          <a:prstGeom prst="rect">
+            <a:avLst/>
+          </a:prstGeom>
+          <a:noFill/>
+        </p:spPr>
+        <p:txBody>
+          <a:bodyPr wrap="square" anchor="t" lIns="0" rIns="0" tIns="0" bIns="0">
+            <a:spAutoFit/>
+          </a:bodyPr>
+          <a:lstStyle/>
+          <a:p>
+            <a:pPr algn="l"/>
+            <a:r>
+              <a:rPr sz="1200" b="1" i="0">
+                <a:solidFill>
+                  <a:srgbClr val="0F3E4C"/>
+                </a:solidFill>
+                <a:latin typeface="Calibri"/>
+              </a:rPr>
+              <a:t>Incluidos (Admin) vs 3-6 meses Canvas</a:t>
+            </a:r>
+          </a:p>
+        </p:txBody>
+      </p:sp>
+      <p:sp>
+        <p:nvSpPr>
+          <p:cNvPr id="26" name="TextBox 25"/>
+          <p:cNvSpPr txBox="1"/>
+          <p:nvPr/>
+        </p:nvSpPr>
+        <p:spPr>
+          <a:xfrm>
+            <a:off x="457200" y="6492240"/>
+            <a:ext cx="5486400" cy="274320"/>
+          </a:xfrm>
+          <a:prstGeom prst="rect">
+            <a:avLst/>
+          </a:prstGeom>
+          <a:noFill/>
+        </p:spPr>
+        <p:txBody>
+          <a:bodyPr wrap="square" anchor="t" lIns="0" rIns="0" tIns="0" bIns="0">
+            <a:spAutoFit/>
+          </a:bodyPr>
+          <a:lstStyle/>
+          <a:p>
+            <a:pPr algn="l"/>
+            <a:r>
+              <a:rPr sz="900" b="0" i="0">
+                <a:solidFill>
+                  <a:srgbClr val="647480"/>
+                </a:solidFill>
+                <a:latin typeface="Calibri"/>
+              </a:rPr>
+              <a:t>ExamLab · Plataforma educativa con IA</a:t>
+            </a:r>
+          </a:p>
+        </p:txBody>
+      </p:sp>
+      <p:sp>
+        <p:nvSpPr>
+          <p:cNvPr id="27" name="TextBox 26"/>
+          <p:cNvSpPr txBox="1"/>
+          <p:nvPr/>
+        </p:nvSpPr>
+        <p:spPr>
+          <a:xfrm>
+            <a:off x="11430000" y="6492240"/>
+            <a:ext cx="457200" cy="274320"/>
+          </a:xfrm>
+          <a:prstGeom prst="rect">
+            <a:avLst/>
+          </a:prstGeom>
+          <a:noFill/>
+        </p:spPr>
+        <p:txBody>
+          <a:bodyPr wrap="square" anchor="t" lIns="0" rIns="0" tIns="0" bIns="0">
+            <a:spAutoFit/>
+          </a:bodyPr>
+          <a:lstStyle/>
+          <a:p>
+            <a:pPr algn="r"/>
+            <a:r>
+              <a:rPr sz="900" b="0" i="0">
+                <a:solidFill>
+                  <a:srgbClr val="647480"/>
+                </a:solidFill>
+                <a:latin typeface="Calibri"/>
+              </a:rPr>
+              <a:t>7</a:t>
+            </a:r>
+          </a:p>
+        </p:txBody>
+      </p:sp>
+    </p:spTree>
+  </p:cSld>
+  <p:clrMapOvr>
+    <a:masterClrMapping/>
+  </p:clrMapOvr>
+</p:sld>
+</file>
+
+<file path=ppt/slides/slide11.xml><?xml version="1.0" encoding="utf-8"?>
+<p:sld xmlns:a="http://schemas.openxmlformats.org/drawingml/2006/main" xmlns:p="http://schemas.openxmlformats.org/presentationml/2006/main" xmlns:r="http://schemas.openxmlformats.org/officeDocument/2006/relationships">
+  <p:cSld>
+    <p:spTree>
+      <p:nvGrpSpPr>
+        <p:cNvPr id="1" name=""/>
+        <p:cNvGrpSpPr/>
+        <p:nvPr/>
+      </p:nvGrpSpPr>
+      <p:grpSpPr/>
+      <p:sp>
+        <p:nvSpPr>
           <p:cNvPr id="2" name="Rounded Rectangle 1"/>
           <p:cNvSpPr/>
           <p:nvPr/>
@@ -10874,7 +11864,7 @@
                 </a:solidFill>
                 <a:latin typeface="Calibri"/>
               </a:rPr>
-              <a:t>COMPARATIVA</a:t>
+              <a:t>IA, SIN LETRA CHICA</a:t>
             </a:r>
           </a:p>
         </p:txBody>
@@ -10909,7 +11899,7 @@
                 </a:solidFill>
                 <a:latin typeface="Calibri"/>
               </a:rPr>
-              <a:t>Más barato que Moodle Cloud. Mucho más barato que Canvas.</a:t>
+              <a:t>El costo de IA es bajo, transparente y bajo tu control</a:t>
             </a:r>
           </a:p>
         </p:txBody>
@@ -10923,7 +11913,7 @@
         <p:spPr>
           <a:xfrm>
             <a:off x="457200" y="1554480"/>
-            <a:ext cx="11247120" cy="365760"/>
+            <a:ext cx="11247120" cy="502920"/>
           </a:xfrm>
           <a:prstGeom prst="rect">
             <a:avLst/>
@@ -10944,7 +11934,7 @@
                 </a:solidFill>
                 <a:latin typeface="Calibri"/>
               </a:rPr>
-              <a:t>Precio USD/matrícula/mes para una institución con 3.000 matrículas.</a:t>
+              <a:t>Con el modelo BYO, tu suscripción ExamLab no incluye ningún recargo por IA: conectas tu propia clave de Gemini/OpenAI y pagas solo el uso real, directo al proveedor.</a:t>
             </a:r>
           </a:p>
         </p:txBody>
@@ -10957,8 +11947,8 @@
         </p:nvSpPr>
         <p:spPr>
           <a:xfrm>
-            <a:off x="457200" y="2194560"/>
-            <a:ext cx="11247120" cy="502920"/>
+            <a:off x="457200" y="2240280"/>
+            <a:ext cx="3749039" cy="2834640"/>
           </a:xfrm>
           <a:prstGeom prst="roundRect">
             <a:avLst>
@@ -10966,10 +11956,12 @@
             </a:avLst>
           </a:prstGeom>
           <a:solidFill>
-            <a:srgbClr val="0F3E4C"/>
+            <a:srgbClr val="F0F9FB"/>
           </a:solidFill>
-          <a:ln>
-            <a:noFill/>
+          <a:ln w="25400">
+            <a:solidFill>
+              <a:srgbClr val="147A8C"/>
+            </a:solidFill>
           </a:ln>
           <a:effectLst/>
         </p:spPr>
@@ -11003,8 +11995,43 @@
         </p:nvSpPr>
         <p:spPr>
           <a:xfrm>
-            <a:off x="640080" y="2194560"/>
-            <a:ext cx="4114800" cy="502920"/>
+            <a:off x="640080" y="2560320"/>
+            <a:ext cx="3383280" cy="457200"/>
+          </a:xfrm>
+          <a:prstGeom prst="rect">
+            <a:avLst/>
+          </a:prstGeom>
+          <a:noFill/>
+        </p:spPr>
+        <p:txBody>
+          <a:bodyPr wrap="square" anchor="t" lIns="0" rIns="0" tIns="0" bIns="0">
+            <a:spAutoFit/>
+          </a:bodyPr>
+          <a:lstStyle/>
+          <a:p>
+            <a:pPr algn="ctr"/>
+            <a:r>
+              <a:rPr sz="1400" b="1" i="0">
+                <a:solidFill>
+                  <a:srgbClr val="0F3E4C"/>
+                </a:solidFill>
+                <a:latin typeface="Calibri"/>
+              </a:rPr>
+              <a:t>Recargo de IA en tu plan</a:t>
+            </a:r>
+          </a:p>
+        </p:txBody>
+      </p:sp>
+      <p:sp>
+        <p:nvSpPr>
+          <p:cNvPr id="7" name="TextBox 6"/>
+          <p:cNvSpPr txBox="1"/>
+          <p:nvPr/>
+        </p:nvSpPr>
+        <p:spPr>
+          <a:xfrm>
+            <a:off x="640080" y="3108960"/>
+            <a:ext cx="3383280" cy="1097280"/>
           </a:xfrm>
           <a:prstGeom prst="rect">
             <a:avLst/>
@@ -11017,50 +12044,15 @@
           </a:bodyPr>
           <a:lstStyle/>
           <a:p>
-            <a:pPr algn="l"/>
-            <a:r>
-              <a:rPr sz="1200" b="1" i="0">
-                <a:solidFill>
-                  <a:srgbClr val="FFFFFF"/>
-                </a:solidFill>
-                <a:latin typeface="Calibri"/>
-              </a:rPr>
-              <a:t>Producto</a:t>
-            </a:r>
-          </a:p>
-        </p:txBody>
-      </p:sp>
-      <p:sp>
-        <p:nvSpPr>
-          <p:cNvPr id="7" name="TextBox 6"/>
-          <p:cNvSpPr txBox="1"/>
-          <p:nvPr/>
-        </p:nvSpPr>
-        <p:spPr>
-          <a:xfrm>
-            <a:off x="4754880" y="2194560"/>
-            <a:ext cx="2560320" cy="502920"/>
-          </a:xfrm>
-          <a:prstGeom prst="rect">
-            <a:avLst/>
-          </a:prstGeom>
-          <a:noFill/>
-        </p:spPr>
-        <p:txBody>
-          <a:bodyPr wrap="square" anchor="ctr" lIns="0" rIns="0" tIns="0" bIns="0">
-            <a:spAutoFit/>
-          </a:bodyPr>
-          <a:lstStyle/>
-          <a:p>
             <a:pPr algn="ctr"/>
             <a:r>
-              <a:rPr sz="1200" b="1" i="0">
-                <a:solidFill>
-                  <a:srgbClr val="FFFFFF"/>
-                </a:solidFill>
-                <a:latin typeface="Calibri"/>
-              </a:rPr>
-              <a:t>USD/mes total</a:t>
+              <a:rPr sz="9000" b="1" i="0">
+                <a:solidFill>
+                  <a:srgbClr val="147A8C"/>
+                </a:solidFill>
+                <a:latin typeface="Calibri"/>
+              </a:rPr>
+              <a:t>$0</a:t>
             </a:r>
           </a:p>
         </p:txBody>
@@ -11073,29 +12065,29 @@
         </p:nvSpPr>
         <p:spPr>
           <a:xfrm>
-            <a:off x="7315200" y="2194560"/>
-            <a:ext cx="2286000" cy="502920"/>
-          </a:xfrm>
-          <a:prstGeom prst="rect">
-            <a:avLst/>
-          </a:prstGeom>
-          <a:noFill/>
-        </p:spPr>
-        <p:txBody>
-          <a:bodyPr wrap="square" anchor="ctr" lIns="0" rIns="0" tIns="0" bIns="0">
+            <a:off x="640080" y="4389120"/>
+            <a:ext cx="3383280" cy="548640"/>
+          </a:xfrm>
+          <a:prstGeom prst="rect">
+            <a:avLst/>
+          </a:prstGeom>
+          <a:noFill/>
+        </p:spPr>
+        <p:txBody>
+          <a:bodyPr wrap="square" anchor="t" lIns="0" rIns="0" tIns="0" bIns="0">
             <a:spAutoFit/>
           </a:bodyPr>
           <a:lstStyle/>
           <a:p>
             <a:pPr algn="ctr"/>
             <a:r>
-              <a:rPr sz="1200" b="1" i="0">
-                <a:solidFill>
-                  <a:srgbClr val="FFFFFF"/>
-                </a:solidFill>
-                <a:latin typeface="Calibri"/>
-              </a:rPr>
-              <a:t>Por matrícula/mes</a:t>
+              <a:rPr sz="1100" b="0" i="0">
+                <a:solidFill>
+                  <a:srgbClr val="1F2A33"/>
+                </a:solidFill>
+                <a:latin typeface="Calibri"/>
+              </a:rPr>
+              <a:t>Pagas la IA directo a Google/OpenAI, según tu consumo real.</a:t>
             </a:r>
           </a:p>
         </p:txBody>
@@ -11108,29 +12100,29 @@
         </p:nvSpPr>
         <p:spPr>
           <a:xfrm>
-            <a:off x="9601200" y="2194560"/>
-            <a:ext cx="2286000" cy="502920"/>
-          </a:xfrm>
-          <a:prstGeom prst="rect">
-            <a:avLst/>
-          </a:prstGeom>
-          <a:noFill/>
-        </p:spPr>
-        <p:txBody>
-          <a:bodyPr wrap="square" anchor="ctr" lIns="0" rIns="0" tIns="0" bIns="0">
-            <a:spAutoFit/>
-          </a:bodyPr>
-          <a:lstStyle/>
-          <a:p>
-            <a:pPr algn="l"/>
-            <a:r>
-              <a:rPr sz="1200" b="1" i="0">
-                <a:solidFill>
-                  <a:srgbClr val="FFFFFF"/>
-                </a:solidFill>
-                <a:latin typeface="Calibri"/>
-              </a:rPr>
-              <a:t>Notas</a:t>
+            <a:off x="4526280" y="2194560"/>
+            <a:ext cx="7178040" cy="365760"/>
+          </a:xfrm>
+          <a:prstGeom prst="rect">
+            <a:avLst/>
+          </a:prstGeom>
+          <a:noFill/>
+        </p:spPr>
+        <p:txBody>
+          <a:bodyPr wrap="square" anchor="t" lIns="0" rIns="0" tIns="0" bIns="0">
+            <a:spAutoFit/>
+          </a:bodyPr>
+          <a:lstStyle/>
+          <a:p>
+            <a:pPr algn="l"/>
+            <a:r>
+              <a:rPr sz="1300" b="1" i="0">
+                <a:solidFill>
+                  <a:srgbClr val="0F3E4C"/>
+                </a:solidFill>
+                <a:latin typeface="Calibri"/>
+              </a:rPr>
+              <a:t>Estimado de costo de IA al mes (modo BYO)</a:t>
             </a:r>
           </a:p>
         </p:txBody>
@@ -11143,8 +12135,8 @@
         </p:nvSpPr>
         <p:spPr>
           <a:xfrm>
-            <a:off x="457200" y="2697480"/>
-            <a:ext cx="11247120" cy="502920"/>
+            <a:off x="4526280" y="2651760"/>
+            <a:ext cx="7178040" cy="457200"/>
           </a:xfrm>
           <a:prstGeom prst="roundRect">
             <a:avLst>
@@ -11152,7 +12144,7 @@
             </a:avLst>
           </a:prstGeom>
           <a:solidFill>
-            <a:srgbClr val="FFFFFF"/>
+            <a:srgbClr val="147A8C"/>
           </a:solidFill>
           <a:ln>
             <a:noFill/>
@@ -11189,8 +12181,8 @@
         </p:nvSpPr>
         <p:spPr>
           <a:xfrm>
-            <a:off x="640080" y="2697480"/>
-            <a:ext cx="4114800" cy="502920"/>
+            <a:off x="4663440" y="2651760"/>
+            <a:ext cx="3017520" cy="457200"/>
           </a:xfrm>
           <a:prstGeom prst="rect">
             <a:avLst/>
@@ -11205,132 +12197,97 @@
           <a:p>
             <a:pPr algn="l"/>
             <a:r>
+              <a:rPr sz="1200" b="1" i="0">
+                <a:solidFill>
+                  <a:srgbClr val="FFFFFF"/>
+                </a:solidFill>
+                <a:latin typeface="Calibri"/>
+              </a:rPr>
+              <a:t>Matrículas activas</a:t>
+            </a:r>
+          </a:p>
+        </p:txBody>
+      </p:sp>
+      <p:sp>
+        <p:nvSpPr>
+          <p:cNvPr id="12" name="TextBox 11"/>
+          <p:cNvSpPr txBox="1"/>
+          <p:nvPr/>
+        </p:nvSpPr>
+        <p:spPr>
+          <a:xfrm>
+            <a:off x="7726680" y="2651760"/>
+            <a:ext cx="1920240" cy="457200"/>
+          </a:xfrm>
+          <a:prstGeom prst="rect">
+            <a:avLst/>
+          </a:prstGeom>
+          <a:noFill/>
+        </p:spPr>
+        <p:txBody>
+          <a:bodyPr wrap="square" anchor="ctr" lIns="0" rIns="0" tIns="0" bIns="0">
+            <a:spAutoFit/>
+          </a:bodyPr>
+          <a:lstStyle/>
+          <a:p>
+            <a:pPr algn="l"/>
+            <a:r>
+              <a:rPr sz="1200" b="1" i="0">
+                <a:solidFill>
+                  <a:srgbClr val="FFFFFF"/>
+                </a:solidFill>
+                <a:latin typeface="Calibri"/>
+              </a:rPr>
+              <a:t>Uso típico</a:t>
+            </a:r>
+          </a:p>
+        </p:txBody>
+      </p:sp>
+      <p:sp>
+        <p:nvSpPr>
+          <p:cNvPr id="13" name="TextBox 12"/>
+          <p:cNvSpPr txBox="1"/>
+          <p:nvPr/>
+        </p:nvSpPr>
+        <p:spPr>
+          <a:xfrm>
+            <a:off x="9738360" y="2651760"/>
+            <a:ext cx="1828800" cy="457200"/>
+          </a:xfrm>
+          <a:prstGeom prst="rect">
+            <a:avLst/>
+          </a:prstGeom>
+          <a:noFill/>
+        </p:spPr>
+        <p:txBody>
+          <a:bodyPr wrap="square" anchor="ctr" lIns="0" rIns="0" tIns="0" bIns="0">
+            <a:spAutoFit/>
+          </a:bodyPr>
+          <a:lstStyle/>
+          <a:p>
+            <a:pPr algn="l"/>
+            <a:r>
               <a:rPr sz="1200" b="0" i="0">
                 <a:solidFill>
-                  <a:srgbClr val="1F2A33"/>
-                </a:solidFill>
-                <a:latin typeface="Calibri"/>
-              </a:rPr>
-              <a:t>Chamilo self-hosted</a:t>
-            </a:r>
-          </a:p>
-        </p:txBody>
-      </p:sp>
-      <p:sp>
-        <p:nvSpPr>
-          <p:cNvPr id="12" name="TextBox 11"/>
-          <p:cNvSpPr txBox="1"/>
-          <p:nvPr/>
-        </p:nvSpPr>
-        <p:spPr>
-          <a:xfrm>
-            <a:off x="4754880" y="2697480"/>
-            <a:ext cx="2560320" cy="502920"/>
-          </a:xfrm>
-          <a:prstGeom prst="rect">
-            <a:avLst/>
-          </a:prstGeom>
-          <a:noFill/>
-        </p:spPr>
-        <p:txBody>
-          <a:bodyPr wrap="square" anchor="ctr" lIns="0" rIns="0" tIns="0" bIns="0">
-            <a:spAutoFit/>
-          </a:bodyPr>
-          <a:lstStyle/>
-          <a:p>
-            <a:pPr algn="ctr"/>
-            <a:r>
-              <a:rPr sz="1200" b="0" i="0">
-                <a:solidFill>
-                  <a:srgbClr val="1F2A33"/>
-                </a:solidFill>
-                <a:latin typeface="Calibri"/>
-              </a:rPr>
-              <a:t>~$350 (valorizado)</a:t>
-            </a:r>
-          </a:p>
-        </p:txBody>
-      </p:sp>
-      <p:sp>
-        <p:nvSpPr>
-          <p:cNvPr id="13" name="TextBox 12"/>
-          <p:cNvSpPr txBox="1"/>
-          <p:nvPr/>
-        </p:nvSpPr>
-        <p:spPr>
-          <a:xfrm>
-            <a:off x="7315200" y="2697480"/>
-            <a:ext cx="2286000" cy="502920"/>
-          </a:xfrm>
-          <a:prstGeom prst="rect">
-            <a:avLst/>
-          </a:prstGeom>
-          <a:noFill/>
-        </p:spPr>
-        <p:txBody>
-          <a:bodyPr wrap="square" anchor="ctr" lIns="0" rIns="0" tIns="0" bIns="0">
-            <a:spAutoFit/>
-          </a:bodyPr>
-          <a:lstStyle/>
-          <a:p>
-            <a:pPr algn="ctr"/>
-            <a:r>
-              <a:rPr sz="1200" b="0" i="0">
-                <a:solidFill>
-                  <a:srgbClr val="1F2A33"/>
-                </a:solidFill>
-                <a:latin typeface="Calibri"/>
-              </a:rPr>
-              <a:t>$0.12</a:t>
-            </a:r>
-          </a:p>
-        </p:txBody>
-      </p:sp>
-      <p:sp>
-        <p:nvSpPr>
-          <p:cNvPr id="14" name="TextBox 13"/>
-          <p:cNvSpPr txBox="1"/>
-          <p:nvPr/>
-        </p:nvSpPr>
-        <p:spPr>
-          <a:xfrm>
-            <a:off x="9601200" y="2697480"/>
-            <a:ext cx="2286000" cy="502920"/>
-          </a:xfrm>
-          <a:prstGeom prst="rect">
-            <a:avLst/>
-          </a:prstGeom>
-          <a:noFill/>
-        </p:spPr>
-        <p:txBody>
-          <a:bodyPr wrap="square" anchor="ctr" lIns="0" rIns="0" tIns="0" bIns="0">
-            <a:spAutoFit/>
-          </a:bodyPr>
-          <a:lstStyle/>
-          <a:p>
-            <a:pPr algn="l"/>
-            <a:r>
-              <a:rPr sz="1200" b="0" i="0">
-                <a:solidFill>
-                  <a:srgbClr val="1F2A33"/>
-                </a:solidFill>
-                <a:latin typeface="Calibri"/>
-              </a:rPr>
-              <a:t>Gratis + admin server + VPS</a:t>
-            </a:r>
-          </a:p>
-        </p:txBody>
-      </p:sp>
-      <p:sp>
-        <p:nvSpPr>
-          <p:cNvPr id="15" name="Rounded Rectangle 14"/>
+                  <a:srgbClr val="FFFFFF"/>
+                </a:solidFill>
+                <a:latin typeface="Calibri"/>
+              </a:rPr>
+              <a:t>Uso intensivo</a:t>
+            </a:r>
+          </a:p>
+        </p:txBody>
+      </p:sp>
+      <p:sp>
+        <p:nvSpPr>
+          <p:cNvPr id="14" name="Rounded Rectangle 13"/>
           <p:cNvSpPr/>
           <p:nvPr/>
         </p:nvSpPr>
         <p:spPr>
           <a:xfrm>
-            <a:off x="457200" y="3200400"/>
-            <a:ext cx="11247120" cy="502920"/>
+            <a:off x="4526280" y="3163824"/>
+            <a:ext cx="7178040" cy="457200"/>
           </a:xfrm>
           <a:prstGeom prst="roundRect">
             <a:avLst>
@@ -11338,7 +12295,7 @@
             </a:avLst>
           </a:prstGeom>
           <a:solidFill>
-            <a:srgbClr val="E8F6F9"/>
+            <a:srgbClr val="F4F8FA"/>
           </a:solidFill>
           <a:ln>
             <a:noFill/>
@@ -11369,14 +12326,49 @@
       </p:sp>
       <p:sp>
         <p:nvSpPr>
+          <p:cNvPr id="15" name="TextBox 14"/>
+          <p:cNvSpPr txBox="1"/>
+          <p:nvPr/>
+        </p:nvSpPr>
+        <p:spPr>
+          <a:xfrm>
+            <a:off x="4663440" y="3163824"/>
+            <a:ext cx="3017520" cy="457200"/>
+          </a:xfrm>
+          <a:prstGeom prst="rect">
+            <a:avLst/>
+          </a:prstGeom>
+          <a:noFill/>
+        </p:spPr>
+        <p:txBody>
+          <a:bodyPr wrap="square" anchor="ctr" lIns="0" rIns="0" tIns="0" bIns="0">
+            <a:spAutoFit/>
+          </a:bodyPr>
+          <a:lstStyle/>
+          <a:p>
+            <a:pPr algn="l"/>
+            <a:r>
+              <a:rPr sz="1200" b="0" i="0">
+                <a:solidFill>
+                  <a:srgbClr val="1F2A33"/>
+                </a:solidFill>
+                <a:latin typeface="Calibri"/>
+              </a:rPr>
+              <a:t>200</a:t>
+            </a:r>
+          </a:p>
+        </p:txBody>
+      </p:sp>
+      <p:sp>
+        <p:nvSpPr>
           <p:cNvPr id="16" name="TextBox 15"/>
           <p:cNvSpPr txBox="1"/>
           <p:nvPr/>
         </p:nvSpPr>
         <p:spPr>
           <a:xfrm>
-            <a:off x="640080" y="3200400"/>
-            <a:ext cx="4114800" cy="502920"/>
+            <a:off x="7726680" y="3163824"/>
+            <a:ext cx="1920240" cy="457200"/>
           </a:xfrm>
           <a:prstGeom prst="rect">
             <a:avLst/>
@@ -11397,7 +12389,7 @@
                 </a:solidFill>
                 <a:latin typeface="Calibri"/>
               </a:rPr>
-              <a:t>ExamLab Mediana</a:t>
+              <a:t>~$12</a:t>
             </a:r>
           </a:p>
         </p:txBody>
@@ -11410,8 +12402,8 @@
         </p:nvSpPr>
         <p:spPr>
           <a:xfrm>
-            <a:off x="4754880" y="3200400"/>
-            <a:ext cx="2560320" cy="502920"/>
+            <a:off x="9738360" y="3163824"/>
+            <a:ext cx="1828800" cy="457200"/>
           </a:xfrm>
           <a:prstGeom prst="rect">
             <a:avLst/>
@@ -11424,99 +12416,29 @@
           </a:bodyPr>
           <a:lstStyle/>
           <a:p>
-            <a:pPr algn="ctr"/>
-            <a:r>
-              <a:rPr sz="1200" b="1" i="0">
-                <a:solidFill>
-                  <a:srgbClr val="0F3E4C"/>
-                </a:solidFill>
-                <a:latin typeface="Calibri"/>
-              </a:rPr>
-              <a:t>$349</a:t>
-            </a:r>
-          </a:p>
-        </p:txBody>
-      </p:sp>
-      <p:sp>
-        <p:nvSpPr>
-          <p:cNvPr id="18" name="TextBox 17"/>
-          <p:cNvSpPr txBox="1"/>
-          <p:nvPr/>
-        </p:nvSpPr>
-        <p:spPr>
-          <a:xfrm>
-            <a:off x="7315200" y="3200400"/>
-            <a:ext cx="2286000" cy="502920"/>
-          </a:xfrm>
-          <a:prstGeom prst="rect">
-            <a:avLst/>
-          </a:prstGeom>
-          <a:noFill/>
-        </p:spPr>
-        <p:txBody>
-          <a:bodyPr wrap="square" anchor="ctr" lIns="0" rIns="0" tIns="0" bIns="0">
-            <a:spAutoFit/>
-          </a:bodyPr>
-          <a:lstStyle/>
-          <a:p>
-            <a:pPr algn="ctr"/>
-            <a:r>
-              <a:rPr sz="1200" b="1" i="0">
-                <a:solidFill>
-                  <a:srgbClr val="0F3E4C"/>
-                </a:solidFill>
-                <a:latin typeface="Calibri"/>
-              </a:rPr>
-              <a:t>$0.12</a:t>
-            </a:r>
-          </a:p>
-        </p:txBody>
-      </p:sp>
-      <p:sp>
-        <p:nvSpPr>
-          <p:cNvPr id="19" name="TextBox 18"/>
-          <p:cNvSpPr txBox="1"/>
-          <p:nvPr/>
-        </p:nvSpPr>
-        <p:spPr>
-          <a:xfrm>
-            <a:off x="9601200" y="3200400"/>
-            <a:ext cx="2286000" cy="502920"/>
-          </a:xfrm>
-          <a:prstGeom prst="rect">
-            <a:avLst/>
-          </a:prstGeom>
-          <a:noFill/>
-        </p:spPr>
-        <p:txBody>
-          <a:bodyPr wrap="square" anchor="ctr" lIns="0" rIns="0" tIns="0" bIns="0">
-            <a:spAutoFit/>
-          </a:bodyPr>
-          <a:lstStyle/>
-          <a:p>
-            <a:pPr algn="l"/>
-            <a:r>
-              <a:rPr sz="1200" b="1" i="0">
-                <a:solidFill>
-                  <a:srgbClr val="0F3E4C"/>
-                </a:solidFill>
-                <a:latin typeface="Calibri"/>
-              </a:rPr>
-              <a:t>IA + Kahoot + antifraude incluidos</a:t>
-            </a:r>
-          </a:p>
-        </p:txBody>
-      </p:sp>
-      <p:sp>
-        <p:nvSpPr>
-          <p:cNvPr id="20" name="Rounded Rectangle 19"/>
+            <a:pPr algn="l"/>
+            <a:r>
+              <a:rPr sz="1200" b="0" i="0">
+                <a:solidFill>
+                  <a:srgbClr val="647480"/>
+                </a:solidFill>
+                <a:latin typeface="Calibri"/>
+              </a:rPr>
+              <a:t>~$40</a:t>
+            </a:r>
+          </a:p>
+        </p:txBody>
+      </p:sp>
+      <p:sp>
+        <p:nvSpPr>
+          <p:cNvPr id="18" name="Rounded Rectangle 17"/>
           <p:cNvSpPr/>
           <p:nvPr/>
         </p:nvSpPr>
         <p:spPr>
           <a:xfrm>
-            <a:off x="457200" y="3703320"/>
-            <a:ext cx="11247120" cy="502920"/>
+            <a:off x="4526280" y="3675888"/>
+            <a:ext cx="7178040" cy="457200"/>
           </a:xfrm>
           <a:prstGeom prst="roundRect">
             <a:avLst>
@@ -11524,7 +12446,7 @@
             </a:avLst>
           </a:prstGeom>
           <a:solidFill>
-            <a:srgbClr val="FFFFFF"/>
+            <a:srgbClr val="F4F8FA"/>
           </a:solidFill>
           <a:ln>
             <a:noFill/>
@@ -11555,14 +12477,84 @@
       </p:sp>
       <p:sp>
         <p:nvSpPr>
+          <p:cNvPr id="19" name="TextBox 18"/>
+          <p:cNvSpPr txBox="1"/>
+          <p:nvPr/>
+        </p:nvSpPr>
+        <p:spPr>
+          <a:xfrm>
+            <a:off x="4663440" y="3675888"/>
+            <a:ext cx="3017520" cy="457200"/>
+          </a:xfrm>
+          <a:prstGeom prst="rect">
+            <a:avLst/>
+          </a:prstGeom>
+          <a:noFill/>
+        </p:spPr>
+        <p:txBody>
+          <a:bodyPr wrap="square" anchor="ctr" lIns="0" rIns="0" tIns="0" bIns="0">
+            <a:spAutoFit/>
+          </a:bodyPr>
+          <a:lstStyle/>
+          <a:p>
+            <a:pPr algn="l"/>
+            <a:r>
+              <a:rPr sz="1200" b="0" i="0">
+                <a:solidFill>
+                  <a:srgbClr val="1F2A33"/>
+                </a:solidFill>
+                <a:latin typeface="Calibri"/>
+              </a:rPr>
+              <a:t>1.000</a:t>
+            </a:r>
+          </a:p>
+        </p:txBody>
+      </p:sp>
+      <p:sp>
+        <p:nvSpPr>
+          <p:cNvPr id="20" name="TextBox 19"/>
+          <p:cNvSpPr txBox="1"/>
+          <p:nvPr/>
+        </p:nvSpPr>
+        <p:spPr>
+          <a:xfrm>
+            <a:off x="7726680" y="3675888"/>
+            <a:ext cx="1920240" cy="457200"/>
+          </a:xfrm>
+          <a:prstGeom prst="rect">
+            <a:avLst/>
+          </a:prstGeom>
+          <a:noFill/>
+        </p:spPr>
+        <p:txBody>
+          <a:bodyPr wrap="square" anchor="ctr" lIns="0" rIns="0" tIns="0" bIns="0">
+            <a:spAutoFit/>
+          </a:bodyPr>
+          <a:lstStyle/>
+          <a:p>
+            <a:pPr algn="l"/>
+            <a:r>
+              <a:rPr sz="1200" b="1" i="0">
+                <a:solidFill>
+                  <a:srgbClr val="0F3E4C"/>
+                </a:solidFill>
+                <a:latin typeface="Calibri"/>
+              </a:rPr>
+              <a:t>~$60</a:t>
+            </a:r>
+          </a:p>
+        </p:txBody>
+      </p:sp>
+      <p:sp>
+        <p:nvSpPr>
           <p:cNvPr id="21" name="TextBox 20"/>
           <p:cNvSpPr txBox="1"/>
           <p:nvPr/>
         </p:nvSpPr>
         <p:spPr>
           <a:xfrm>
-            <a:off x="640080" y="3703320"/>
-            <a:ext cx="4114800" cy="502920"/>
+            <a:off x="9738360" y="3675888"/>
+            <a:ext cx="1828800" cy="457200"/>
           </a:xfrm>
           <a:prstGeom prst="rect">
             <a:avLst/>
@@ -11579,130 +12571,25 @@
             <a:r>
               <a:rPr sz="1200" b="0" i="0">
                 <a:solidFill>
-                  <a:srgbClr val="1F2A33"/>
-                </a:solidFill>
-                <a:latin typeface="Calibri"/>
-              </a:rPr>
-              <a:t>Moodle Cloud Standard (750)</a:t>
-            </a:r>
-          </a:p>
-        </p:txBody>
-      </p:sp>
-      <p:sp>
-        <p:nvSpPr>
-          <p:cNvPr id="22" name="TextBox 21"/>
-          <p:cNvSpPr txBox="1"/>
-          <p:nvPr/>
-        </p:nvSpPr>
-        <p:spPr>
-          <a:xfrm>
-            <a:off x="4754880" y="3703320"/>
-            <a:ext cx="2560320" cy="502920"/>
-          </a:xfrm>
-          <a:prstGeom prst="rect">
-            <a:avLst/>
-          </a:prstGeom>
-          <a:noFill/>
-        </p:spPr>
-        <p:txBody>
-          <a:bodyPr wrap="square" anchor="ctr" lIns="0" rIns="0" tIns="0" bIns="0">
-            <a:spAutoFit/>
-          </a:bodyPr>
-          <a:lstStyle/>
-          <a:p>
-            <a:pPr algn="ctr"/>
-            <a:r>
-              <a:rPr sz="1200" b="0" i="0">
-                <a:solidFill>
-                  <a:srgbClr val="1F2A33"/>
-                </a:solidFill>
-                <a:latin typeface="Calibri"/>
-              </a:rPr>
-              <a:t>$173</a:t>
-            </a:r>
-          </a:p>
-        </p:txBody>
-      </p:sp>
-      <p:sp>
-        <p:nvSpPr>
-          <p:cNvPr id="23" name="TextBox 22"/>
-          <p:cNvSpPr txBox="1"/>
-          <p:nvPr/>
-        </p:nvSpPr>
-        <p:spPr>
-          <a:xfrm>
-            <a:off x="7315200" y="3703320"/>
-            <a:ext cx="2286000" cy="502920"/>
-          </a:xfrm>
-          <a:prstGeom prst="rect">
-            <a:avLst/>
-          </a:prstGeom>
-          <a:noFill/>
-        </p:spPr>
-        <p:txBody>
-          <a:bodyPr wrap="square" anchor="ctr" lIns="0" rIns="0" tIns="0" bIns="0">
-            <a:spAutoFit/>
-          </a:bodyPr>
-          <a:lstStyle/>
-          <a:p>
-            <a:pPr algn="ctr"/>
-            <a:r>
-              <a:rPr sz="1200" b="0" i="0">
-                <a:solidFill>
-                  <a:srgbClr val="1F2A33"/>
-                </a:solidFill>
-                <a:latin typeface="Calibri"/>
-              </a:rPr>
-              <a:t>$0.23</a:t>
-            </a:r>
-          </a:p>
-        </p:txBody>
-      </p:sp>
-      <p:sp>
-        <p:nvSpPr>
-          <p:cNvPr id="24" name="TextBox 23"/>
-          <p:cNvSpPr txBox="1"/>
-          <p:nvPr/>
-        </p:nvSpPr>
-        <p:spPr>
-          <a:xfrm>
-            <a:off x="9601200" y="3703320"/>
-            <a:ext cx="2286000" cy="502920"/>
-          </a:xfrm>
-          <a:prstGeom prst="rect">
-            <a:avLst/>
-          </a:prstGeom>
-          <a:noFill/>
-        </p:spPr>
-        <p:txBody>
-          <a:bodyPr wrap="square" anchor="ctr" lIns="0" rIns="0" tIns="0" bIns="0">
-            <a:spAutoFit/>
-          </a:bodyPr>
-          <a:lstStyle/>
-          <a:p>
-            <a:pPr algn="l"/>
-            <a:r>
-              <a:rPr sz="1200" b="0" i="0">
-                <a:solidFill>
-                  <a:srgbClr val="1F2A33"/>
-                </a:solidFill>
-                <a:latin typeface="Calibri"/>
-              </a:rPr>
-              <a:t>Sin IA nativa, plugin extra</a:t>
-            </a:r>
-          </a:p>
-        </p:txBody>
-      </p:sp>
-      <p:sp>
-        <p:nvSpPr>
-          <p:cNvPr id="25" name="Rounded Rectangle 24"/>
+                  <a:srgbClr val="647480"/>
+                </a:solidFill>
+                <a:latin typeface="Calibri"/>
+              </a:rPr>
+              <a:t>~$200</a:t>
+            </a:r>
+          </a:p>
+        </p:txBody>
+      </p:sp>
+      <p:sp>
+        <p:nvSpPr>
+          <p:cNvPr id="22" name="Rounded Rectangle 21"/>
           <p:cNvSpPr/>
           <p:nvPr/>
         </p:nvSpPr>
         <p:spPr>
           <a:xfrm>
-            <a:off x="457200" y="4206240"/>
-            <a:ext cx="11247120" cy="502920"/>
+            <a:off x="4526280" y="4187952"/>
+            <a:ext cx="7178040" cy="457200"/>
           </a:xfrm>
           <a:prstGeom prst="roundRect">
             <a:avLst>
@@ -11741,14 +12628,14 @@
       </p:sp>
       <p:sp>
         <p:nvSpPr>
-          <p:cNvPr id="26" name="TextBox 25"/>
-          <p:cNvSpPr txBox="1"/>
-          <p:nvPr/>
-        </p:nvSpPr>
-        <p:spPr>
-          <a:xfrm>
-            <a:off x="640080" y="4206240"/>
-            <a:ext cx="4114800" cy="502920"/>
+          <p:cNvPr id="23" name="TextBox 22"/>
+          <p:cNvSpPr txBox="1"/>
+          <p:nvPr/>
+        </p:nvSpPr>
+        <p:spPr>
+          <a:xfrm>
+            <a:off x="4663440" y="4187952"/>
+            <a:ext cx="3017520" cy="457200"/>
           </a:xfrm>
           <a:prstGeom prst="rect">
             <a:avLst/>
@@ -11769,21 +12656,21 @@
                 </a:solidFill>
                 <a:latin typeface="Calibri"/>
               </a:rPr>
-              <a:t>Canvas Small (negociado)</a:t>
-            </a:r>
-          </a:p>
-        </p:txBody>
-      </p:sp>
-      <p:sp>
-        <p:nvSpPr>
-          <p:cNvPr id="27" name="TextBox 26"/>
-          <p:cNvSpPr txBox="1"/>
-          <p:nvPr/>
-        </p:nvSpPr>
-        <p:spPr>
-          <a:xfrm>
-            <a:off x="4754880" y="4206240"/>
-            <a:ext cx="2560320" cy="502920"/>
+              <a:t>3.000</a:t>
+            </a:r>
+          </a:p>
+        </p:txBody>
+      </p:sp>
+      <p:sp>
+        <p:nvSpPr>
+          <p:cNvPr id="24" name="TextBox 23"/>
+          <p:cNvSpPr txBox="1"/>
+          <p:nvPr/>
+        </p:nvSpPr>
+        <p:spPr>
+          <a:xfrm>
+            <a:off x="7726680" y="4187952"/>
+            <a:ext cx="1920240" cy="457200"/>
           </a:xfrm>
           <a:prstGeom prst="rect">
             <a:avLst/>
@@ -11796,99 +12683,64 @@
           </a:bodyPr>
           <a:lstStyle/>
           <a:p>
-            <a:pPr algn="ctr"/>
+            <a:pPr algn="l"/>
+            <a:r>
+              <a:rPr sz="1200" b="1" i="0">
+                <a:solidFill>
+                  <a:srgbClr val="0F3E4C"/>
+                </a:solidFill>
+                <a:latin typeface="Calibri"/>
+              </a:rPr>
+              <a:t>~$180</a:t>
+            </a:r>
+          </a:p>
+        </p:txBody>
+      </p:sp>
+      <p:sp>
+        <p:nvSpPr>
+          <p:cNvPr id="25" name="TextBox 24"/>
+          <p:cNvSpPr txBox="1"/>
+          <p:nvPr/>
+        </p:nvSpPr>
+        <p:spPr>
+          <a:xfrm>
+            <a:off x="9738360" y="4187952"/>
+            <a:ext cx="1828800" cy="457200"/>
+          </a:xfrm>
+          <a:prstGeom prst="rect">
+            <a:avLst/>
+          </a:prstGeom>
+          <a:noFill/>
+        </p:spPr>
+        <p:txBody>
+          <a:bodyPr wrap="square" anchor="ctr" lIns="0" rIns="0" tIns="0" bIns="0">
+            <a:spAutoFit/>
+          </a:bodyPr>
+          <a:lstStyle/>
+          <a:p>
+            <a:pPr algn="l"/>
             <a:r>
               <a:rPr sz="1200" b="0" i="0">
                 <a:solidFill>
-                  <a:srgbClr val="1F2A33"/>
-                </a:solidFill>
-                <a:latin typeface="Calibri"/>
-              </a:rPr>
-              <a:t>$2.500</a:t>
-            </a:r>
-          </a:p>
-        </p:txBody>
-      </p:sp>
-      <p:sp>
-        <p:nvSpPr>
-          <p:cNvPr id="28" name="TextBox 27"/>
-          <p:cNvSpPr txBox="1"/>
-          <p:nvPr/>
-        </p:nvSpPr>
-        <p:spPr>
-          <a:xfrm>
-            <a:off x="7315200" y="4206240"/>
-            <a:ext cx="2286000" cy="502920"/>
-          </a:xfrm>
-          <a:prstGeom prst="rect">
-            <a:avLst/>
-          </a:prstGeom>
-          <a:noFill/>
-        </p:spPr>
-        <p:txBody>
-          <a:bodyPr wrap="square" anchor="ctr" lIns="0" rIns="0" tIns="0" bIns="0">
-            <a:spAutoFit/>
-          </a:bodyPr>
-          <a:lstStyle/>
-          <a:p>
-            <a:pPr algn="ctr"/>
-            <a:r>
-              <a:rPr sz="1200" b="0" i="0">
-                <a:solidFill>
-                  <a:srgbClr val="1F2A33"/>
-                </a:solidFill>
-                <a:latin typeface="Calibri"/>
-              </a:rPr>
-              <a:t>$0.83</a:t>
-            </a:r>
-          </a:p>
-        </p:txBody>
-      </p:sp>
-      <p:sp>
-        <p:nvSpPr>
-          <p:cNvPr id="29" name="TextBox 28"/>
-          <p:cNvSpPr txBox="1"/>
-          <p:nvPr/>
-        </p:nvSpPr>
-        <p:spPr>
-          <a:xfrm>
-            <a:off x="9601200" y="4206240"/>
-            <a:ext cx="2286000" cy="502920"/>
-          </a:xfrm>
-          <a:prstGeom prst="rect">
-            <a:avLst/>
-          </a:prstGeom>
-          <a:noFill/>
-        </p:spPr>
-        <p:txBody>
-          <a:bodyPr wrap="square" anchor="ctr" lIns="0" rIns="0" tIns="0" bIns="0">
-            <a:spAutoFit/>
-          </a:bodyPr>
-          <a:lstStyle/>
-          <a:p>
-            <a:pPr algn="l"/>
-            <a:r>
-              <a:rPr sz="1200" b="0" i="0">
-                <a:solidFill>
-                  <a:srgbClr val="1F2A33"/>
-                </a:solidFill>
-                <a:latin typeface="Calibri"/>
-              </a:rPr>
-              <a:t>Contract 3 años típico</a:t>
-            </a:r>
-          </a:p>
-        </p:txBody>
-      </p:sp>
-      <p:sp>
-        <p:nvSpPr>
-          <p:cNvPr id="30" name="Rounded Rectangle 29"/>
+                  <a:srgbClr val="647480"/>
+                </a:solidFill>
+                <a:latin typeface="Calibri"/>
+              </a:rPr>
+              <a:t>~$600</a:t>
+            </a:r>
+          </a:p>
+        </p:txBody>
+      </p:sp>
+      <p:sp>
+        <p:nvSpPr>
+          <p:cNvPr id="26" name="Rounded Rectangle 25"/>
           <p:cNvSpPr/>
           <p:nvPr/>
         </p:nvSpPr>
         <p:spPr>
           <a:xfrm>
-            <a:off x="457200" y="4709159"/>
-            <a:ext cx="11247120" cy="502920"/>
+            <a:off x="4526280" y="4700016"/>
+            <a:ext cx="7178040" cy="457200"/>
           </a:xfrm>
           <a:prstGeom prst="roundRect">
             <a:avLst>
@@ -11896,7 +12748,7 @@
             </a:avLst>
           </a:prstGeom>
           <a:solidFill>
-            <a:srgbClr val="FFFFFF"/>
+            <a:srgbClr val="F4F8FA"/>
           </a:solidFill>
           <a:ln>
             <a:noFill/>
@@ -11927,182 +12779,147 @@
       </p:sp>
       <p:sp>
         <p:nvSpPr>
+          <p:cNvPr id="27" name="TextBox 26"/>
+          <p:cNvSpPr txBox="1"/>
+          <p:nvPr/>
+        </p:nvSpPr>
+        <p:spPr>
+          <a:xfrm>
+            <a:off x="4663440" y="4700016"/>
+            <a:ext cx="3017520" cy="457200"/>
+          </a:xfrm>
+          <a:prstGeom prst="rect">
+            <a:avLst/>
+          </a:prstGeom>
+          <a:noFill/>
+        </p:spPr>
+        <p:txBody>
+          <a:bodyPr wrap="square" anchor="ctr" lIns="0" rIns="0" tIns="0" bIns="0">
+            <a:spAutoFit/>
+          </a:bodyPr>
+          <a:lstStyle/>
+          <a:p>
+            <a:pPr algn="l"/>
+            <a:r>
+              <a:rPr sz="1200" b="0" i="0">
+                <a:solidFill>
+                  <a:srgbClr val="1F2A33"/>
+                </a:solidFill>
+                <a:latin typeface="Calibri"/>
+              </a:rPr>
+              <a:t>10.000</a:t>
+            </a:r>
+          </a:p>
+        </p:txBody>
+      </p:sp>
+      <p:sp>
+        <p:nvSpPr>
+          <p:cNvPr id="28" name="TextBox 27"/>
+          <p:cNvSpPr txBox="1"/>
+          <p:nvPr/>
+        </p:nvSpPr>
+        <p:spPr>
+          <a:xfrm>
+            <a:off x="7726680" y="4700016"/>
+            <a:ext cx="1920240" cy="457200"/>
+          </a:xfrm>
+          <a:prstGeom prst="rect">
+            <a:avLst/>
+          </a:prstGeom>
+          <a:noFill/>
+        </p:spPr>
+        <p:txBody>
+          <a:bodyPr wrap="square" anchor="ctr" lIns="0" rIns="0" tIns="0" bIns="0">
+            <a:spAutoFit/>
+          </a:bodyPr>
+          <a:lstStyle/>
+          <a:p>
+            <a:pPr algn="l"/>
+            <a:r>
+              <a:rPr sz="1200" b="1" i="0">
+                <a:solidFill>
+                  <a:srgbClr val="0F3E4C"/>
+                </a:solidFill>
+                <a:latin typeface="Calibri"/>
+              </a:rPr>
+              <a:t>~$600</a:t>
+            </a:r>
+          </a:p>
+        </p:txBody>
+      </p:sp>
+      <p:sp>
+        <p:nvSpPr>
+          <p:cNvPr id="29" name="TextBox 28"/>
+          <p:cNvSpPr txBox="1"/>
+          <p:nvPr/>
+        </p:nvSpPr>
+        <p:spPr>
+          <a:xfrm>
+            <a:off x="9738360" y="4700016"/>
+            <a:ext cx="1828800" cy="457200"/>
+          </a:xfrm>
+          <a:prstGeom prst="rect">
+            <a:avLst/>
+          </a:prstGeom>
+          <a:noFill/>
+        </p:spPr>
+        <p:txBody>
+          <a:bodyPr wrap="square" anchor="ctr" lIns="0" rIns="0" tIns="0" bIns="0">
+            <a:spAutoFit/>
+          </a:bodyPr>
+          <a:lstStyle/>
+          <a:p>
+            <a:pPr algn="l"/>
+            <a:r>
+              <a:rPr sz="1200" b="0" i="0">
+                <a:solidFill>
+                  <a:srgbClr val="647480"/>
+                </a:solidFill>
+                <a:latin typeface="Calibri"/>
+              </a:rPr>
+              <a:t>~$2.000</a:t>
+            </a:r>
+          </a:p>
+        </p:txBody>
+      </p:sp>
+      <p:sp>
+        <p:nvSpPr>
+          <p:cNvPr id="30" name="TextBox 29"/>
+          <p:cNvSpPr txBox="1"/>
+          <p:nvPr/>
+        </p:nvSpPr>
+        <p:spPr>
+          <a:xfrm>
+            <a:off x="4526280" y="5257800"/>
+            <a:ext cx="7178040" cy="685800"/>
+          </a:xfrm>
+          <a:prstGeom prst="rect">
+            <a:avLst/>
+          </a:prstGeom>
+          <a:noFill/>
+        </p:spPr>
+        <p:txBody>
+          <a:bodyPr wrap="square" anchor="t" lIns="0" rIns="0" tIns="0" bIns="0">
+            <a:spAutoFit/>
+          </a:bodyPr>
+          <a:lstStyle/>
+          <a:p>
+            <a:pPr algn="l"/>
+            <a:r>
+              <a:rPr sz="1000" b="0" i="1">
+                <a:solidFill>
+                  <a:srgbClr val="647480"/>
+                </a:solidFill>
+                <a:latin typeface="Calibri"/>
+              </a:rPr>
+              <a:t>Valores estimados en USD/mes, pagados directamente a tu proveedor de IA (Google/OpenAI) según tu consumo real — no son un cargo de ExamLab. ¿Prefieres no administrar la clave? Con el add-on de IA administrada, ExamLab se encarga de todo por $0.10 por matrícula/mes.</a:t>
+            </a:r>
+          </a:p>
+        </p:txBody>
+      </p:sp>
+      <p:sp>
+        <p:nvSpPr>
           <p:cNvPr id="31" name="TextBox 30"/>
-          <p:cNvSpPr txBox="1"/>
-          <p:nvPr/>
-        </p:nvSpPr>
-        <p:spPr>
-          <a:xfrm>
-            <a:off x="640080" y="4709159"/>
-            <a:ext cx="4114800" cy="502920"/>
-          </a:xfrm>
-          <a:prstGeom prst="rect">
-            <a:avLst/>
-          </a:prstGeom>
-          <a:noFill/>
-        </p:spPr>
-        <p:txBody>
-          <a:bodyPr wrap="square" anchor="ctr" lIns="0" rIns="0" tIns="0" bIns="0">
-            <a:spAutoFit/>
-          </a:bodyPr>
-          <a:lstStyle/>
-          <a:p>
-            <a:pPr algn="l"/>
-            <a:r>
-              <a:rPr sz="1200" b="0" i="0">
-                <a:solidFill>
-                  <a:srgbClr val="1F2A33"/>
-                </a:solidFill>
-                <a:latin typeface="Calibri"/>
-              </a:rPr>
-              <a:t>Blackboard mid-market</a:t>
-            </a:r>
-          </a:p>
-        </p:txBody>
-      </p:sp>
-      <p:sp>
-        <p:nvSpPr>
-          <p:cNvPr id="32" name="TextBox 31"/>
-          <p:cNvSpPr txBox="1"/>
-          <p:nvPr/>
-        </p:nvSpPr>
-        <p:spPr>
-          <a:xfrm>
-            <a:off x="4754880" y="4709159"/>
-            <a:ext cx="2560320" cy="502920"/>
-          </a:xfrm>
-          <a:prstGeom prst="rect">
-            <a:avLst/>
-          </a:prstGeom>
-          <a:noFill/>
-        </p:spPr>
-        <p:txBody>
-          <a:bodyPr wrap="square" anchor="ctr" lIns="0" rIns="0" tIns="0" bIns="0">
-            <a:spAutoFit/>
-          </a:bodyPr>
-          <a:lstStyle/>
-          <a:p>
-            <a:pPr algn="ctr"/>
-            <a:r>
-              <a:rPr sz="1200" b="0" i="0">
-                <a:solidFill>
-                  <a:srgbClr val="1F2A33"/>
-                </a:solidFill>
-                <a:latin typeface="Calibri"/>
-              </a:rPr>
-              <a:t>$5.000+</a:t>
-            </a:r>
-          </a:p>
-        </p:txBody>
-      </p:sp>
-      <p:sp>
-        <p:nvSpPr>
-          <p:cNvPr id="33" name="TextBox 32"/>
-          <p:cNvSpPr txBox="1"/>
-          <p:nvPr/>
-        </p:nvSpPr>
-        <p:spPr>
-          <a:xfrm>
-            <a:off x="7315200" y="4709159"/>
-            <a:ext cx="2286000" cy="502920"/>
-          </a:xfrm>
-          <a:prstGeom prst="rect">
-            <a:avLst/>
-          </a:prstGeom>
-          <a:noFill/>
-        </p:spPr>
-        <p:txBody>
-          <a:bodyPr wrap="square" anchor="ctr" lIns="0" rIns="0" tIns="0" bIns="0">
-            <a:spAutoFit/>
-          </a:bodyPr>
-          <a:lstStyle/>
-          <a:p>
-            <a:pPr algn="ctr"/>
-            <a:r>
-              <a:rPr sz="1200" b="0" i="0">
-                <a:solidFill>
-                  <a:srgbClr val="1F2A33"/>
-                </a:solidFill>
-                <a:latin typeface="Calibri"/>
-              </a:rPr>
-              <a:t>$1.67+</a:t>
-            </a:r>
-          </a:p>
-        </p:txBody>
-      </p:sp>
-      <p:sp>
-        <p:nvSpPr>
-          <p:cNvPr id="34" name="TextBox 33"/>
-          <p:cNvSpPr txBox="1"/>
-          <p:nvPr/>
-        </p:nvSpPr>
-        <p:spPr>
-          <a:xfrm>
-            <a:off x="9601200" y="4709159"/>
-            <a:ext cx="2286000" cy="502920"/>
-          </a:xfrm>
-          <a:prstGeom prst="rect">
-            <a:avLst/>
-          </a:prstGeom>
-          <a:noFill/>
-        </p:spPr>
-        <p:txBody>
-          <a:bodyPr wrap="square" anchor="ctr" lIns="0" rIns="0" tIns="0" bIns="0">
-            <a:spAutoFit/>
-          </a:bodyPr>
-          <a:lstStyle/>
-          <a:p>
-            <a:pPr algn="l"/>
-            <a:r>
-              <a:rPr sz="1200" b="0" i="0">
-                <a:solidFill>
-                  <a:srgbClr val="1F2A33"/>
-                </a:solidFill>
-                <a:latin typeface="Calibri"/>
-              </a:rPr>
-              <a:t>Setup + capacitación aparte</a:t>
-            </a:r>
-          </a:p>
-        </p:txBody>
-      </p:sp>
-      <p:sp>
-        <p:nvSpPr>
-          <p:cNvPr id="35" name="TextBox 34"/>
-          <p:cNvSpPr txBox="1"/>
-          <p:nvPr/>
-        </p:nvSpPr>
-        <p:spPr>
-          <a:xfrm>
-            <a:off x="457200" y="5852160"/>
-            <a:ext cx="11247120" cy="365760"/>
-          </a:xfrm>
-          <a:prstGeom prst="rect">
-            <a:avLst/>
-          </a:prstGeom>
-          <a:noFill/>
-        </p:spPr>
-        <p:txBody>
-          <a:bodyPr wrap="square" anchor="t" lIns="0" rIns="0" tIns="0" bIns="0">
-            <a:spAutoFit/>
-          </a:bodyPr>
-          <a:lstStyle/>
-          <a:p>
-            <a:pPr algn="l"/>
-            <a:r>
-              <a:rPr sz="900" b="0" i="1">
-                <a:solidFill>
-                  <a:srgbClr val="647480"/>
-                </a:solidFill>
-                <a:latin typeface="Calibri"/>
-              </a:rPr>
-              <a:t>Fuentes: moodlecloud.com/standard-plans · vendr.com/marketplace/canvas · benchmarks públicos 2026-07</a:t>
-            </a:r>
-          </a:p>
-        </p:txBody>
-      </p:sp>
-      <p:sp>
-        <p:nvSpPr>
-          <p:cNvPr id="36" name="TextBox 35"/>
           <p:cNvSpPr txBox="1"/>
           <p:nvPr/>
         </p:nvSpPr>
@@ -12137,7 +12954,7 @@
       </p:sp>
       <p:sp>
         <p:nvSpPr>
-          <p:cNvPr id="37" name="TextBox 36"/>
+          <p:cNvPr id="32" name="TextBox 31"/>
           <p:cNvSpPr txBox="1"/>
           <p:nvPr/>
         </p:nvSpPr>
@@ -12165,7 +12982,7 @@
                 </a:solidFill>
                 <a:latin typeface="Calibri"/>
               </a:rPr>
-              <a:t>6</a:t>
+              <a:t>7</a:t>
             </a:r>
           </a:p>
         </p:txBody>
@@ -12218,7 +13035,7 @@
                 </a:solidFill>
                 <a:latin typeface="Calibri"/>
               </a:rPr>
-              <a:t>CUÁNTO AHORRAS</a:t>
+              <a:t>COMPARATIVA</a:t>
             </a:r>
           </a:p>
         </p:txBody>
@@ -12253,21 +13070,56 @@
                 </a:solidFill>
                 <a:latin typeface="Calibri"/>
               </a:rPr>
-              <a:t>El costo real de NO tener ExamLab</a:t>
-            </a:r>
-          </a:p>
-        </p:txBody>
-      </p:sp>
-      <p:sp>
-        <p:nvSpPr>
-          <p:cNvPr id="4" name="Rounded Rectangle 3"/>
+              <a:t>Más barato que Moodle Cloud. Mucho más barato que Canvas.</a:t>
+            </a:r>
+          </a:p>
+        </p:txBody>
+      </p:sp>
+      <p:sp>
+        <p:nvSpPr>
+          <p:cNvPr id="4" name="TextBox 3"/>
+          <p:cNvSpPr txBox="1"/>
+          <p:nvPr/>
+        </p:nvSpPr>
+        <p:spPr>
+          <a:xfrm>
+            <a:off x="457200" y="1554480"/>
+            <a:ext cx="11247120" cy="365760"/>
+          </a:xfrm>
+          <a:prstGeom prst="rect">
+            <a:avLst/>
+          </a:prstGeom>
+          <a:noFill/>
+        </p:spPr>
+        <p:txBody>
+          <a:bodyPr wrap="square" anchor="t" lIns="0" rIns="0" tIns="0" bIns="0">
+            <a:spAutoFit/>
+          </a:bodyPr>
+          <a:lstStyle/>
+          <a:p>
+            <a:pPr algn="l"/>
+            <a:r>
+              <a:rPr sz="1300" b="0" i="0">
+                <a:solidFill>
+                  <a:srgbClr val="647480"/>
+                </a:solidFill>
+                <a:latin typeface="Calibri"/>
+              </a:rPr>
+              <a:t>Precio USD/matrícula/mes para una institución con 3.000 matrículas.</a:t>
+            </a:r>
+          </a:p>
+        </p:txBody>
+      </p:sp>
+      <p:sp>
+        <p:nvSpPr>
+          <p:cNvPr id="5" name="Rounded Rectangle 4"/>
           <p:cNvSpPr/>
           <p:nvPr/>
         </p:nvSpPr>
         <p:spPr>
           <a:xfrm>
-            <a:off x="457200" y="1920240"/>
-            <a:ext cx="2743200" cy="1554480"/>
+            <a:off x="457200" y="2194560"/>
+            <a:ext cx="11247120" cy="502920"/>
           </a:xfrm>
           <a:prstGeom prst="roundRect">
             <a:avLst>
@@ -12275,7 +13127,7 @@
             </a:avLst>
           </a:prstGeom>
           <a:solidFill>
-            <a:srgbClr val="F4F8FA"/>
+            <a:srgbClr val="0F3E4C"/>
           </a:solidFill>
           <a:ln>
             <a:noFill/>
@@ -12306,85 +13158,154 @@
       </p:sp>
       <p:sp>
         <p:nvSpPr>
-          <p:cNvPr id="5" name="TextBox 4"/>
-          <p:cNvSpPr txBox="1"/>
-          <p:nvPr/>
-        </p:nvSpPr>
-        <p:spPr>
-          <a:xfrm>
-            <a:off x="457200" y="2057400"/>
-            <a:ext cx="2743200" cy="548640"/>
-          </a:xfrm>
-          <a:prstGeom prst="rect">
-            <a:avLst/>
-          </a:prstGeom>
-          <a:noFill/>
-        </p:spPr>
-        <p:txBody>
-          <a:bodyPr wrap="square" anchor="t" lIns="0" rIns="0" tIns="0" bIns="0">
+          <p:cNvPr id="6" name="TextBox 5"/>
+          <p:cNvSpPr txBox="1"/>
+          <p:nvPr/>
+        </p:nvSpPr>
+        <p:spPr>
+          <a:xfrm>
+            <a:off x="640080" y="2194560"/>
+            <a:ext cx="4114800" cy="502920"/>
+          </a:xfrm>
+          <a:prstGeom prst="rect">
+            <a:avLst/>
+          </a:prstGeom>
+          <a:noFill/>
+        </p:spPr>
+        <p:txBody>
+          <a:bodyPr wrap="square" anchor="ctr" lIns="0" rIns="0" tIns="0" bIns="0">
+            <a:spAutoFit/>
+          </a:bodyPr>
+          <a:lstStyle/>
+          <a:p>
+            <a:pPr algn="l"/>
+            <a:r>
+              <a:rPr sz="1200" b="1" i="0">
+                <a:solidFill>
+                  <a:srgbClr val="FFFFFF"/>
+                </a:solidFill>
+                <a:latin typeface="Calibri"/>
+              </a:rPr>
+              <a:t>Producto</a:t>
+            </a:r>
+          </a:p>
+        </p:txBody>
+      </p:sp>
+      <p:sp>
+        <p:nvSpPr>
+          <p:cNvPr id="7" name="TextBox 6"/>
+          <p:cNvSpPr txBox="1"/>
+          <p:nvPr/>
+        </p:nvSpPr>
+        <p:spPr>
+          <a:xfrm>
+            <a:off x="4754880" y="2194560"/>
+            <a:ext cx="2560320" cy="502920"/>
+          </a:xfrm>
+          <a:prstGeom prst="rect">
+            <a:avLst/>
+          </a:prstGeom>
+          <a:noFill/>
+        </p:spPr>
+        <p:txBody>
+          <a:bodyPr wrap="square" anchor="ctr" lIns="0" rIns="0" tIns="0" bIns="0">
             <a:spAutoFit/>
           </a:bodyPr>
           <a:lstStyle/>
           <a:p>
             <a:pPr algn="ctr"/>
             <a:r>
-              <a:rPr sz="3200" b="1" i="0">
-                <a:solidFill>
-                  <a:srgbClr val="1E5BAF"/>
-                </a:solidFill>
-                <a:latin typeface="Calibri"/>
-              </a:rPr>
-              <a:t>$60k+</a:t>
-            </a:r>
-          </a:p>
-        </p:txBody>
-      </p:sp>
-      <p:sp>
-        <p:nvSpPr>
-          <p:cNvPr id="6" name="TextBox 5"/>
-          <p:cNvSpPr txBox="1"/>
-          <p:nvPr/>
-        </p:nvSpPr>
-        <p:spPr>
-          <a:xfrm>
-            <a:off x="457200" y="2743200"/>
-            <a:ext cx="2743200" cy="640080"/>
-          </a:xfrm>
-          <a:prstGeom prst="rect">
-            <a:avLst/>
-          </a:prstGeom>
-          <a:noFill/>
-        </p:spPr>
-        <p:txBody>
-          <a:bodyPr wrap="square" anchor="t" lIns="0" rIns="0" tIns="0" bIns="0">
+              <a:rPr sz="1200" b="1" i="0">
+                <a:solidFill>
+                  <a:srgbClr val="FFFFFF"/>
+                </a:solidFill>
+                <a:latin typeface="Calibri"/>
+              </a:rPr>
+              <a:t>USD/mes total</a:t>
+            </a:r>
+          </a:p>
+        </p:txBody>
+      </p:sp>
+      <p:sp>
+        <p:nvSpPr>
+          <p:cNvPr id="8" name="TextBox 7"/>
+          <p:cNvSpPr txBox="1"/>
+          <p:nvPr/>
+        </p:nvSpPr>
+        <p:spPr>
+          <a:xfrm>
+            <a:off x="7315200" y="2194560"/>
+            <a:ext cx="2286000" cy="502920"/>
+          </a:xfrm>
+          <a:prstGeom prst="rect">
+            <a:avLst/>
+          </a:prstGeom>
+          <a:noFill/>
+        </p:spPr>
+        <p:txBody>
+          <a:bodyPr wrap="square" anchor="ctr" lIns="0" rIns="0" tIns="0" bIns="0">
             <a:spAutoFit/>
           </a:bodyPr>
           <a:lstStyle/>
           <a:p>
             <a:pPr algn="ctr"/>
             <a:r>
-              <a:rPr sz="1100" b="0" i="0">
-                <a:solidFill>
-                  <a:srgbClr val="1F2A33"/>
-                </a:solidFill>
-                <a:latin typeface="Calibri"/>
-              </a:rPr>
-              <a:t>Canvas negociado / año
-para 5.000 alumnos</a:t>
-            </a:r>
-          </a:p>
-        </p:txBody>
-      </p:sp>
-      <p:sp>
-        <p:nvSpPr>
-          <p:cNvPr id="7" name="Rounded Rectangle 6"/>
+              <a:rPr sz="1200" b="1" i="0">
+                <a:solidFill>
+                  <a:srgbClr val="FFFFFF"/>
+                </a:solidFill>
+                <a:latin typeface="Calibri"/>
+              </a:rPr>
+              <a:t>Por matrícula/mes</a:t>
+            </a:r>
+          </a:p>
+        </p:txBody>
+      </p:sp>
+      <p:sp>
+        <p:nvSpPr>
+          <p:cNvPr id="9" name="TextBox 8"/>
+          <p:cNvSpPr txBox="1"/>
+          <p:nvPr/>
+        </p:nvSpPr>
+        <p:spPr>
+          <a:xfrm>
+            <a:off x="9601200" y="2194560"/>
+            <a:ext cx="2286000" cy="502920"/>
+          </a:xfrm>
+          <a:prstGeom prst="rect">
+            <a:avLst/>
+          </a:prstGeom>
+          <a:noFill/>
+        </p:spPr>
+        <p:txBody>
+          <a:bodyPr wrap="square" anchor="ctr" lIns="0" rIns="0" tIns="0" bIns="0">
+            <a:spAutoFit/>
+          </a:bodyPr>
+          <a:lstStyle/>
+          <a:p>
+            <a:pPr algn="l"/>
+            <a:r>
+              <a:rPr sz="1200" b="1" i="0">
+                <a:solidFill>
+                  <a:srgbClr val="FFFFFF"/>
+                </a:solidFill>
+                <a:latin typeface="Calibri"/>
+              </a:rPr>
+              <a:t>Notas</a:t>
+            </a:r>
+          </a:p>
+        </p:txBody>
+      </p:sp>
+      <p:sp>
+        <p:nvSpPr>
+          <p:cNvPr id="10" name="Rounded Rectangle 9"/>
           <p:cNvSpPr/>
           <p:nvPr/>
         </p:nvSpPr>
         <p:spPr>
           <a:xfrm>
-            <a:off x="3291840" y="1920240"/>
-            <a:ext cx="2743200" cy="1554480"/>
+            <a:off x="457200" y="2697480"/>
+            <a:ext cx="11247120" cy="502920"/>
           </a:xfrm>
           <a:prstGeom prst="roundRect">
             <a:avLst>
@@ -12392,7 +13313,7 @@
             </a:avLst>
           </a:prstGeom>
           <a:solidFill>
-            <a:srgbClr val="F4F8FA"/>
+            <a:srgbClr val="FFFFFF"/>
           </a:solidFill>
           <a:ln>
             <a:noFill/>
@@ -12423,85 +13344,154 @@
       </p:sp>
       <p:sp>
         <p:nvSpPr>
-          <p:cNvPr id="8" name="TextBox 7"/>
-          <p:cNvSpPr txBox="1"/>
-          <p:nvPr/>
-        </p:nvSpPr>
-        <p:spPr>
-          <a:xfrm>
-            <a:off x="3291840" y="2057400"/>
-            <a:ext cx="2743200" cy="548640"/>
-          </a:xfrm>
-          <a:prstGeom prst="rect">
-            <a:avLst/>
-          </a:prstGeom>
-          <a:noFill/>
-        </p:spPr>
-        <p:txBody>
-          <a:bodyPr wrap="square" anchor="t" lIns="0" rIns="0" tIns="0" bIns="0">
+          <p:cNvPr id="11" name="TextBox 10"/>
+          <p:cNvSpPr txBox="1"/>
+          <p:nvPr/>
+        </p:nvSpPr>
+        <p:spPr>
+          <a:xfrm>
+            <a:off x="640080" y="2697480"/>
+            <a:ext cx="4114800" cy="502920"/>
+          </a:xfrm>
+          <a:prstGeom prst="rect">
+            <a:avLst/>
+          </a:prstGeom>
+          <a:noFill/>
+        </p:spPr>
+        <p:txBody>
+          <a:bodyPr wrap="square" anchor="ctr" lIns="0" rIns="0" tIns="0" bIns="0">
+            <a:spAutoFit/>
+          </a:bodyPr>
+          <a:lstStyle/>
+          <a:p>
+            <a:pPr algn="l"/>
+            <a:r>
+              <a:rPr sz="1200" b="0" i="0">
+                <a:solidFill>
+                  <a:srgbClr val="1F2A33"/>
+                </a:solidFill>
+                <a:latin typeface="Calibri"/>
+              </a:rPr>
+              <a:t>Chamilo self-hosted</a:t>
+            </a:r>
+          </a:p>
+        </p:txBody>
+      </p:sp>
+      <p:sp>
+        <p:nvSpPr>
+          <p:cNvPr id="12" name="TextBox 11"/>
+          <p:cNvSpPr txBox="1"/>
+          <p:nvPr/>
+        </p:nvSpPr>
+        <p:spPr>
+          <a:xfrm>
+            <a:off x="4754880" y="2697480"/>
+            <a:ext cx="2560320" cy="502920"/>
+          </a:xfrm>
+          <a:prstGeom prst="rect">
+            <a:avLst/>
+          </a:prstGeom>
+          <a:noFill/>
+        </p:spPr>
+        <p:txBody>
+          <a:bodyPr wrap="square" anchor="ctr" lIns="0" rIns="0" tIns="0" bIns="0">
             <a:spAutoFit/>
           </a:bodyPr>
           <a:lstStyle/>
           <a:p>
             <a:pPr algn="ctr"/>
             <a:r>
-              <a:rPr sz="3200" b="1" i="0">
-                <a:solidFill>
-                  <a:srgbClr val="1E5BAF"/>
-                </a:solidFill>
-                <a:latin typeface="Calibri"/>
-              </a:rPr>
-              <a:t>8-12h</a:t>
-            </a:r>
-          </a:p>
-        </p:txBody>
-      </p:sp>
-      <p:sp>
-        <p:nvSpPr>
-          <p:cNvPr id="9" name="TextBox 8"/>
-          <p:cNvSpPr txBox="1"/>
-          <p:nvPr/>
-        </p:nvSpPr>
-        <p:spPr>
-          <a:xfrm>
-            <a:off x="3291840" y="2743200"/>
-            <a:ext cx="2743200" cy="640080"/>
-          </a:xfrm>
-          <a:prstGeom prst="rect">
-            <a:avLst/>
-          </a:prstGeom>
-          <a:noFill/>
-        </p:spPr>
-        <p:txBody>
-          <a:bodyPr wrap="square" anchor="t" lIns="0" rIns="0" tIns="0" bIns="0">
+              <a:rPr sz="1200" b="0" i="0">
+                <a:solidFill>
+                  <a:srgbClr val="1F2A33"/>
+                </a:solidFill>
+                <a:latin typeface="Calibri"/>
+              </a:rPr>
+              <a:t>~$350 (valorizado)</a:t>
+            </a:r>
+          </a:p>
+        </p:txBody>
+      </p:sp>
+      <p:sp>
+        <p:nvSpPr>
+          <p:cNvPr id="13" name="TextBox 12"/>
+          <p:cNvSpPr txBox="1"/>
+          <p:nvPr/>
+        </p:nvSpPr>
+        <p:spPr>
+          <a:xfrm>
+            <a:off x="7315200" y="2697480"/>
+            <a:ext cx="2286000" cy="502920"/>
+          </a:xfrm>
+          <a:prstGeom prst="rect">
+            <a:avLst/>
+          </a:prstGeom>
+          <a:noFill/>
+        </p:spPr>
+        <p:txBody>
+          <a:bodyPr wrap="square" anchor="ctr" lIns="0" rIns="0" tIns="0" bIns="0">
             <a:spAutoFit/>
           </a:bodyPr>
           <a:lstStyle/>
           <a:p>
             <a:pPr algn="ctr"/>
             <a:r>
-              <a:rPr sz="1100" b="0" i="0">
+              <a:rPr sz="1200" b="0" i="0">
                 <a:solidFill>
                   <a:srgbClr val="1F2A33"/>
                 </a:solidFill>
                 <a:latin typeface="Calibri"/>
               </a:rPr>
-              <a:t>Que un docente ahorra
-por semana con IA</a:t>
-            </a:r>
-          </a:p>
-        </p:txBody>
-      </p:sp>
-      <p:sp>
-        <p:nvSpPr>
-          <p:cNvPr id="10" name="Rounded Rectangle 9"/>
+              <a:t>$0.12</a:t>
+            </a:r>
+          </a:p>
+        </p:txBody>
+      </p:sp>
+      <p:sp>
+        <p:nvSpPr>
+          <p:cNvPr id="14" name="TextBox 13"/>
+          <p:cNvSpPr txBox="1"/>
+          <p:nvPr/>
+        </p:nvSpPr>
+        <p:spPr>
+          <a:xfrm>
+            <a:off x="9601200" y="2697480"/>
+            <a:ext cx="2286000" cy="502920"/>
+          </a:xfrm>
+          <a:prstGeom prst="rect">
+            <a:avLst/>
+          </a:prstGeom>
+          <a:noFill/>
+        </p:spPr>
+        <p:txBody>
+          <a:bodyPr wrap="square" anchor="ctr" lIns="0" rIns="0" tIns="0" bIns="0">
+            <a:spAutoFit/>
+          </a:bodyPr>
+          <a:lstStyle/>
+          <a:p>
+            <a:pPr algn="l"/>
+            <a:r>
+              <a:rPr sz="1200" b="0" i="0">
+                <a:solidFill>
+                  <a:srgbClr val="1F2A33"/>
+                </a:solidFill>
+                <a:latin typeface="Calibri"/>
+              </a:rPr>
+              <a:t>Gratis + admin server + VPS</a:t>
+            </a:r>
+          </a:p>
+        </p:txBody>
+      </p:sp>
+      <p:sp>
+        <p:nvSpPr>
+          <p:cNvPr id="15" name="Rounded Rectangle 14"/>
           <p:cNvSpPr/>
           <p:nvPr/>
         </p:nvSpPr>
         <p:spPr>
           <a:xfrm>
-            <a:off x="6126480" y="1920240"/>
-            <a:ext cx="2743200" cy="1554480"/>
+            <a:off x="457200" y="3200400"/>
+            <a:ext cx="11247120" cy="502920"/>
           </a:xfrm>
           <a:prstGeom prst="roundRect">
             <a:avLst>
@@ -12509,7 +13499,7 @@
             </a:avLst>
           </a:prstGeom>
           <a:solidFill>
-            <a:srgbClr val="F4F8FA"/>
+            <a:srgbClr val="E8F6F9"/>
           </a:solidFill>
           <a:ln>
             <a:noFill/>
@@ -12540,85 +13530,154 @@
       </p:sp>
       <p:sp>
         <p:nvSpPr>
-          <p:cNvPr id="11" name="TextBox 10"/>
-          <p:cNvSpPr txBox="1"/>
-          <p:nvPr/>
-        </p:nvSpPr>
-        <p:spPr>
-          <a:xfrm>
-            <a:off x="6126480" y="2057400"/>
-            <a:ext cx="2743200" cy="548640"/>
-          </a:xfrm>
-          <a:prstGeom prst="rect">
-            <a:avLst/>
-          </a:prstGeom>
-          <a:noFill/>
-        </p:spPr>
-        <p:txBody>
-          <a:bodyPr wrap="square" anchor="t" lIns="0" rIns="0" tIns="0" bIns="0">
+          <p:cNvPr id="16" name="TextBox 15"/>
+          <p:cNvSpPr txBox="1"/>
+          <p:nvPr/>
+        </p:nvSpPr>
+        <p:spPr>
+          <a:xfrm>
+            <a:off x="640080" y="3200400"/>
+            <a:ext cx="4114800" cy="502920"/>
+          </a:xfrm>
+          <a:prstGeom prst="rect">
+            <a:avLst/>
+          </a:prstGeom>
+          <a:noFill/>
+        </p:spPr>
+        <p:txBody>
+          <a:bodyPr wrap="square" anchor="ctr" lIns="0" rIns="0" tIns="0" bIns="0">
+            <a:spAutoFit/>
+          </a:bodyPr>
+          <a:lstStyle/>
+          <a:p>
+            <a:pPr algn="l"/>
+            <a:r>
+              <a:rPr sz="1200" b="1" i="0">
+                <a:solidFill>
+                  <a:srgbClr val="0F3E4C"/>
+                </a:solidFill>
+                <a:latin typeface="Calibri"/>
+              </a:rPr>
+              <a:t>ExamLab Mediana</a:t>
+            </a:r>
+          </a:p>
+        </p:txBody>
+      </p:sp>
+      <p:sp>
+        <p:nvSpPr>
+          <p:cNvPr id="17" name="TextBox 16"/>
+          <p:cNvSpPr txBox="1"/>
+          <p:nvPr/>
+        </p:nvSpPr>
+        <p:spPr>
+          <a:xfrm>
+            <a:off x="4754880" y="3200400"/>
+            <a:ext cx="2560320" cy="502920"/>
+          </a:xfrm>
+          <a:prstGeom prst="rect">
+            <a:avLst/>
+          </a:prstGeom>
+          <a:noFill/>
+        </p:spPr>
+        <p:txBody>
+          <a:bodyPr wrap="square" anchor="ctr" lIns="0" rIns="0" tIns="0" bIns="0">
             <a:spAutoFit/>
           </a:bodyPr>
           <a:lstStyle/>
           <a:p>
             <a:pPr algn="ctr"/>
             <a:r>
-              <a:rPr sz="3200" b="1" i="0">
-                <a:solidFill>
-                  <a:srgbClr val="1E5BAF"/>
-                </a:solidFill>
-                <a:latin typeface="Calibri"/>
-              </a:rPr>
-              <a:t>$0</a:t>
-            </a:r>
-          </a:p>
-        </p:txBody>
-      </p:sp>
-      <p:sp>
-        <p:nvSpPr>
-          <p:cNvPr id="12" name="TextBox 11"/>
-          <p:cNvSpPr txBox="1"/>
-          <p:nvPr/>
-        </p:nvSpPr>
-        <p:spPr>
-          <a:xfrm>
-            <a:off x="6126480" y="2743200"/>
-            <a:ext cx="2743200" cy="640080"/>
-          </a:xfrm>
-          <a:prstGeom prst="rect">
-            <a:avLst/>
-          </a:prstGeom>
-          <a:noFill/>
-        </p:spPr>
-        <p:txBody>
-          <a:bodyPr wrap="square" anchor="t" lIns="0" rIns="0" tIns="0" bIns="0">
+              <a:rPr sz="1200" b="1" i="0">
+                <a:solidFill>
+                  <a:srgbClr val="0F3E4C"/>
+                </a:solidFill>
+                <a:latin typeface="Calibri"/>
+              </a:rPr>
+              <a:t>$349</a:t>
+            </a:r>
+          </a:p>
+        </p:txBody>
+      </p:sp>
+      <p:sp>
+        <p:nvSpPr>
+          <p:cNvPr id="18" name="TextBox 17"/>
+          <p:cNvSpPr txBox="1"/>
+          <p:nvPr/>
+        </p:nvSpPr>
+        <p:spPr>
+          <a:xfrm>
+            <a:off x="7315200" y="3200400"/>
+            <a:ext cx="2286000" cy="502920"/>
+          </a:xfrm>
+          <a:prstGeom prst="rect">
+            <a:avLst/>
+          </a:prstGeom>
+          <a:noFill/>
+        </p:spPr>
+        <p:txBody>
+          <a:bodyPr wrap="square" anchor="ctr" lIns="0" rIns="0" tIns="0" bIns="0">
             <a:spAutoFit/>
           </a:bodyPr>
           <a:lstStyle/>
           <a:p>
             <a:pPr algn="ctr"/>
             <a:r>
-              <a:rPr sz="1100" b="0" i="0">
-                <a:solidFill>
-                  <a:srgbClr val="1F2A33"/>
-                </a:solidFill>
-                <a:latin typeface="Calibri"/>
-              </a:rPr>
-              <a:t>Costo de IA en el plan
-con BYO API key</a:t>
-            </a:r>
-          </a:p>
-        </p:txBody>
-      </p:sp>
-      <p:sp>
-        <p:nvSpPr>
-          <p:cNvPr id="13" name="Rounded Rectangle 12"/>
+              <a:rPr sz="1200" b="1" i="0">
+                <a:solidFill>
+                  <a:srgbClr val="0F3E4C"/>
+                </a:solidFill>
+                <a:latin typeface="Calibri"/>
+              </a:rPr>
+              <a:t>$0.12</a:t>
+            </a:r>
+          </a:p>
+        </p:txBody>
+      </p:sp>
+      <p:sp>
+        <p:nvSpPr>
+          <p:cNvPr id="19" name="TextBox 18"/>
+          <p:cNvSpPr txBox="1"/>
+          <p:nvPr/>
+        </p:nvSpPr>
+        <p:spPr>
+          <a:xfrm>
+            <a:off x="9601200" y="3200400"/>
+            <a:ext cx="2286000" cy="502920"/>
+          </a:xfrm>
+          <a:prstGeom prst="rect">
+            <a:avLst/>
+          </a:prstGeom>
+          <a:noFill/>
+        </p:spPr>
+        <p:txBody>
+          <a:bodyPr wrap="square" anchor="ctr" lIns="0" rIns="0" tIns="0" bIns="0">
+            <a:spAutoFit/>
+          </a:bodyPr>
+          <a:lstStyle/>
+          <a:p>
+            <a:pPr algn="l"/>
+            <a:r>
+              <a:rPr sz="1200" b="1" i="0">
+                <a:solidFill>
+                  <a:srgbClr val="0F3E4C"/>
+                </a:solidFill>
+                <a:latin typeface="Calibri"/>
+              </a:rPr>
+              <a:t>IA + Kahoot + antifraude incluidos</a:t>
+            </a:r>
+          </a:p>
+        </p:txBody>
+      </p:sp>
+      <p:sp>
+        <p:nvSpPr>
+          <p:cNvPr id="20" name="Rounded Rectangle 19"/>
           <p:cNvSpPr/>
           <p:nvPr/>
         </p:nvSpPr>
         <p:spPr>
           <a:xfrm>
-            <a:off x="8961120" y="1920240"/>
-            <a:ext cx="2743200" cy="1554480"/>
+            <a:off x="457200" y="3703320"/>
+            <a:ext cx="11247120" cy="502920"/>
           </a:xfrm>
           <a:prstGeom prst="roundRect">
             <a:avLst>
@@ -12626,7 +13685,7 @@
             </a:avLst>
           </a:prstGeom>
           <a:solidFill>
-            <a:srgbClr val="F4F8FA"/>
+            <a:srgbClr val="FFFFFF"/>
           </a:solidFill>
           <a:ln>
             <a:noFill/>
@@ -12657,85 +13716,154 @@
       </p:sp>
       <p:sp>
         <p:nvSpPr>
-          <p:cNvPr id="14" name="TextBox 13"/>
-          <p:cNvSpPr txBox="1"/>
-          <p:nvPr/>
-        </p:nvSpPr>
-        <p:spPr>
-          <a:xfrm>
-            <a:off x="8961120" y="2057400"/>
-            <a:ext cx="2743200" cy="548640"/>
-          </a:xfrm>
-          <a:prstGeom prst="rect">
-            <a:avLst/>
-          </a:prstGeom>
-          <a:noFill/>
-        </p:spPr>
-        <p:txBody>
-          <a:bodyPr wrap="square" anchor="t" lIns="0" rIns="0" tIns="0" bIns="0">
+          <p:cNvPr id="21" name="TextBox 20"/>
+          <p:cNvSpPr txBox="1"/>
+          <p:nvPr/>
+        </p:nvSpPr>
+        <p:spPr>
+          <a:xfrm>
+            <a:off x="640080" y="3703320"/>
+            <a:ext cx="4114800" cy="502920"/>
+          </a:xfrm>
+          <a:prstGeom prst="rect">
+            <a:avLst/>
+          </a:prstGeom>
+          <a:noFill/>
+        </p:spPr>
+        <p:txBody>
+          <a:bodyPr wrap="square" anchor="ctr" lIns="0" rIns="0" tIns="0" bIns="0">
+            <a:spAutoFit/>
+          </a:bodyPr>
+          <a:lstStyle/>
+          <a:p>
+            <a:pPr algn="l"/>
+            <a:r>
+              <a:rPr sz="1200" b="0" i="0">
+                <a:solidFill>
+                  <a:srgbClr val="1F2A33"/>
+                </a:solidFill>
+                <a:latin typeface="Calibri"/>
+              </a:rPr>
+              <a:t>Moodle Cloud Standard (750)</a:t>
+            </a:r>
+          </a:p>
+        </p:txBody>
+      </p:sp>
+      <p:sp>
+        <p:nvSpPr>
+          <p:cNvPr id="22" name="TextBox 21"/>
+          <p:cNvSpPr txBox="1"/>
+          <p:nvPr/>
+        </p:nvSpPr>
+        <p:spPr>
+          <a:xfrm>
+            <a:off x="4754880" y="3703320"/>
+            <a:ext cx="2560320" cy="502920"/>
+          </a:xfrm>
+          <a:prstGeom prst="rect">
+            <a:avLst/>
+          </a:prstGeom>
+          <a:noFill/>
+        </p:spPr>
+        <p:txBody>
+          <a:bodyPr wrap="square" anchor="ctr" lIns="0" rIns="0" tIns="0" bIns="0">
             <a:spAutoFit/>
           </a:bodyPr>
           <a:lstStyle/>
           <a:p>
             <a:pPr algn="ctr"/>
             <a:r>
-              <a:rPr sz="3200" b="1" i="0">
-                <a:solidFill>
-                  <a:srgbClr val="1E5BAF"/>
-                </a:solidFill>
-                <a:latin typeface="Calibri"/>
-              </a:rPr>
-              <a:t>1 día</a:t>
-            </a:r>
-          </a:p>
-        </p:txBody>
-      </p:sp>
-      <p:sp>
-        <p:nvSpPr>
-          <p:cNvPr id="15" name="TextBox 14"/>
-          <p:cNvSpPr txBox="1"/>
-          <p:nvPr/>
-        </p:nvSpPr>
-        <p:spPr>
-          <a:xfrm>
-            <a:off x="8961120" y="2743200"/>
-            <a:ext cx="2743200" cy="640080"/>
-          </a:xfrm>
-          <a:prstGeom prst="rect">
-            <a:avLst/>
-          </a:prstGeom>
-          <a:noFill/>
-        </p:spPr>
-        <p:txBody>
-          <a:bodyPr wrap="square" anchor="t" lIns="0" rIns="0" tIns="0" bIns="0">
+              <a:rPr sz="1200" b="0" i="0">
+                <a:solidFill>
+                  <a:srgbClr val="1F2A33"/>
+                </a:solidFill>
+                <a:latin typeface="Calibri"/>
+              </a:rPr>
+              <a:t>$173</a:t>
+            </a:r>
+          </a:p>
+        </p:txBody>
+      </p:sp>
+      <p:sp>
+        <p:nvSpPr>
+          <p:cNvPr id="23" name="TextBox 22"/>
+          <p:cNvSpPr txBox="1"/>
+          <p:nvPr/>
+        </p:nvSpPr>
+        <p:spPr>
+          <a:xfrm>
+            <a:off x="7315200" y="3703320"/>
+            <a:ext cx="2286000" cy="502920"/>
+          </a:xfrm>
+          <a:prstGeom prst="rect">
+            <a:avLst/>
+          </a:prstGeom>
+          <a:noFill/>
+        </p:spPr>
+        <p:txBody>
+          <a:bodyPr wrap="square" anchor="ctr" lIns="0" rIns="0" tIns="0" bIns="0">
             <a:spAutoFit/>
           </a:bodyPr>
           <a:lstStyle/>
           <a:p>
             <a:pPr algn="ctr"/>
             <a:r>
-              <a:rPr sz="1100" b="0" i="0">
+              <a:rPr sz="1200" b="0" i="0">
                 <a:solidFill>
                   <a:srgbClr val="1F2A33"/>
                 </a:solidFill>
                 <a:latin typeface="Calibri"/>
               </a:rPr>
-              <a:t>Setup completo con
-asistencia guiada</a:t>
-            </a:r>
-          </a:p>
-        </p:txBody>
-      </p:sp>
-      <p:sp>
-        <p:nvSpPr>
-          <p:cNvPr id="16" name="Rounded Rectangle 15"/>
+              <a:t>$0.23</a:t>
+            </a:r>
+          </a:p>
+        </p:txBody>
+      </p:sp>
+      <p:sp>
+        <p:nvSpPr>
+          <p:cNvPr id="24" name="TextBox 23"/>
+          <p:cNvSpPr txBox="1"/>
+          <p:nvPr/>
+        </p:nvSpPr>
+        <p:spPr>
+          <a:xfrm>
+            <a:off x="9601200" y="3703320"/>
+            <a:ext cx="2286000" cy="502920"/>
+          </a:xfrm>
+          <a:prstGeom prst="rect">
+            <a:avLst/>
+          </a:prstGeom>
+          <a:noFill/>
+        </p:spPr>
+        <p:txBody>
+          <a:bodyPr wrap="square" anchor="ctr" lIns="0" rIns="0" tIns="0" bIns="0">
+            <a:spAutoFit/>
+          </a:bodyPr>
+          <a:lstStyle/>
+          <a:p>
+            <a:pPr algn="l"/>
+            <a:r>
+              <a:rPr sz="1200" b="0" i="0">
+                <a:solidFill>
+                  <a:srgbClr val="1F2A33"/>
+                </a:solidFill>
+                <a:latin typeface="Calibri"/>
+              </a:rPr>
+              <a:t>Sin IA nativa, plugin extra</a:t>
+            </a:r>
+          </a:p>
+        </p:txBody>
+      </p:sp>
+      <p:sp>
+        <p:nvSpPr>
+          <p:cNvPr id="25" name="Rounded Rectangle 24"/>
           <p:cNvSpPr/>
           <p:nvPr/>
         </p:nvSpPr>
         <p:spPr>
           <a:xfrm>
-            <a:off x="457200" y="3931920"/>
-            <a:ext cx="11247120" cy="2103120"/>
+            <a:off x="457200" y="4206240"/>
+            <a:ext cx="11247120" cy="502920"/>
           </a:xfrm>
           <a:prstGeom prst="roundRect">
             <a:avLst>
@@ -12743,12 +13871,10 @@
             </a:avLst>
           </a:prstGeom>
           <a:solidFill>
-            <a:srgbClr val="F9FAFB"/>
+            <a:srgbClr val="F4F8FA"/>
           </a:solidFill>
-          <a:ln w="19050">
-            <a:solidFill>
-              <a:srgbClr val="2EB8C7"/>
-            </a:solidFill>
+          <a:ln>
+            <a:noFill/>
           </a:ln>
           <a:effectLst/>
         </p:spPr>
@@ -12776,57 +13902,22 @@
       </p:sp>
       <p:sp>
         <p:nvSpPr>
-          <p:cNvPr id="17" name="TextBox 16"/>
-          <p:cNvSpPr txBox="1"/>
-          <p:nvPr/>
-        </p:nvSpPr>
-        <p:spPr>
-          <a:xfrm>
-            <a:off x="731520" y="4114800"/>
-            <a:ext cx="10789920" cy="365760"/>
-          </a:xfrm>
-          <a:prstGeom prst="rect">
-            <a:avLst/>
-          </a:prstGeom>
-          <a:noFill/>
-        </p:spPr>
-        <p:txBody>
-          <a:bodyPr wrap="square" anchor="t" lIns="0" rIns="0" tIns="0" bIns="0">
-            <a:spAutoFit/>
-          </a:bodyPr>
-          <a:lstStyle/>
-          <a:p>
-            <a:pPr algn="l"/>
-            <a:r>
-              <a:rPr sz="1500" b="1" i="0">
-                <a:solidFill>
-                  <a:srgbClr val="0F3E4C"/>
-                </a:solidFill>
-                <a:latin typeface="Calibri"/>
-              </a:rPr>
-              <a:t>Ejemplo: Universidad regional con 3.000 matrículas activas</a:t>
-            </a:r>
-          </a:p>
-        </p:txBody>
-      </p:sp>
-      <p:sp>
-        <p:nvSpPr>
-          <p:cNvPr id="18" name="TextBox 17"/>
-          <p:cNvSpPr txBox="1"/>
-          <p:nvPr/>
-        </p:nvSpPr>
-        <p:spPr>
-          <a:xfrm>
-            <a:off x="822960" y="4617720"/>
-            <a:ext cx="5486400" cy="274320"/>
-          </a:xfrm>
-          <a:prstGeom prst="rect">
-            <a:avLst/>
-          </a:prstGeom>
-          <a:noFill/>
-        </p:spPr>
-        <p:txBody>
-          <a:bodyPr wrap="square" anchor="t" lIns="0" rIns="0" tIns="0" bIns="0">
+          <p:cNvPr id="26" name="TextBox 25"/>
+          <p:cNvSpPr txBox="1"/>
+          <p:nvPr/>
+        </p:nvSpPr>
+        <p:spPr>
+          <a:xfrm>
+            <a:off x="640080" y="4206240"/>
+            <a:ext cx="4114800" cy="502920"/>
+          </a:xfrm>
+          <a:prstGeom prst="rect">
+            <a:avLst/>
+          </a:prstGeom>
+          <a:noFill/>
+        </p:spPr>
+        <p:txBody>
+          <a:bodyPr wrap="square" anchor="ctr" lIns="0" rIns="0" tIns="0" bIns="0">
             <a:spAutoFit/>
           </a:bodyPr>
           <a:lstStyle/>
@@ -12839,69 +13930,34 @@
                 </a:solidFill>
                 <a:latin typeface="Calibri"/>
               </a:rPr>
-              <a:t>Plan Mediana Auto (12 meses):</a:t>
-            </a:r>
-          </a:p>
-        </p:txBody>
-      </p:sp>
-      <p:sp>
-        <p:nvSpPr>
-          <p:cNvPr id="19" name="TextBox 18"/>
-          <p:cNvSpPr txBox="1"/>
-          <p:nvPr/>
-        </p:nvSpPr>
-        <p:spPr>
-          <a:xfrm>
-            <a:off x="6400800" y="4617720"/>
-            <a:ext cx="5029200" cy="274320"/>
-          </a:xfrm>
-          <a:prstGeom prst="rect">
-            <a:avLst/>
-          </a:prstGeom>
-          <a:noFill/>
-        </p:spPr>
-        <p:txBody>
-          <a:bodyPr wrap="square" anchor="t" lIns="0" rIns="0" tIns="0" bIns="0">
-            <a:spAutoFit/>
-          </a:bodyPr>
-          <a:lstStyle/>
-          <a:p>
-            <a:pPr algn="l"/>
-            <a:r>
-              <a:rPr sz="1200" b="1" i="0">
-                <a:solidFill>
-                  <a:srgbClr val="0F3E4C"/>
-                </a:solidFill>
-                <a:latin typeface="Calibri"/>
-              </a:rPr>
-              <a:t>$349 × 12 = $4.188/año</a:t>
-            </a:r>
-          </a:p>
-        </p:txBody>
-      </p:sp>
-      <p:sp>
-        <p:nvSpPr>
-          <p:cNvPr id="20" name="TextBox 19"/>
-          <p:cNvSpPr txBox="1"/>
-          <p:nvPr/>
-        </p:nvSpPr>
-        <p:spPr>
-          <a:xfrm>
-            <a:off x="822960" y="4937760"/>
-            <a:ext cx="5486400" cy="274320"/>
-          </a:xfrm>
-          <a:prstGeom prst="rect">
-            <a:avLst/>
-          </a:prstGeom>
-          <a:noFill/>
-        </p:spPr>
-        <p:txBody>
-          <a:bodyPr wrap="square" anchor="t" lIns="0" rIns="0" tIns="0" bIns="0">
-            <a:spAutoFit/>
-          </a:bodyPr>
-          <a:lstStyle/>
-          <a:p>
-            <a:pPr algn="l"/>
+              <a:t>Canvas Small (negociado)</a:t>
+            </a:r>
+          </a:p>
+        </p:txBody>
+      </p:sp>
+      <p:sp>
+        <p:nvSpPr>
+          <p:cNvPr id="27" name="TextBox 26"/>
+          <p:cNvSpPr txBox="1"/>
+          <p:nvPr/>
+        </p:nvSpPr>
+        <p:spPr>
+          <a:xfrm>
+            <a:off x="4754880" y="4206240"/>
+            <a:ext cx="2560320" cy="502920"/>
+          </a:xfrm>
+          <a:prstGeom prst="rect">
+            <a:avLst/>
+          </a:prstGeom>
+          <a:noFill/>
+        </p:spPr>
+        <p:txBody>
+          <a:bodyPr wrap="square" anchor="ctr" lIns="0" rIns="0" tIns="0" bIns="0">
+            <a:spAutoFit/>
+          </a:bodyPr>
+          <a:lstStyle/>
+          <a:p>
+            <a:pPr algn="ctr"/>
             <a:r>
               <a:rPr sz="1200" b="0" i="0">
                 <a:solidFill>
@@ -12909,69 +13965,34 @@
                 </a:solidFill>
                 <a:latin typeface="Calibri"/>
               </a:rPr>
-              <a:t>Comparable Canvas negociado:</a:t>
-            </a:r>
-          </a:p>
-        </p:txBody>
-      </p:sp>
-      <p:sp>
-        <p:nvSpPr>
-          <p:cNvPr id="21" name="TextBox 20"/>
-          <p:cNvSpPr txBox="1"/>
-          <p:nvPr/>
-        </p:nvSpPr>
-        <p:spPr>
-          <a:xfrm>
-            <a:off x="6400800" y="4937760"/>
-            <a:ext cx="5029200" cy="274320"/>
-          </a:xfrm>
-          <a:prstGeom prst="rect">
-            <a:avLst/>
-          </a:prstGeom>
-          <a:noFill/>
-        </p:spPr>
-        <p:txBody>
-          <a:bodyPr wrap="square" anchor="t" lIns="0" rIns="0" tIns="0" bIns="0">
-            <a:spAutoFit/>
-          </a:bodyPr>
-          <a:lstStyle/>
-          <a:p>
-            <a:pPr algn="l"/>
-            <a:r>
-              <a:rPr sz="1200" b="1" i="0">
-                <a:solidFill>
-                  <a:srgbClr val="0F3E4C"/>
-                </a:solidFill>
-                <a:latin typeface="Calibri"/>
-              </a:rPr>
-              <a:t>$24.000-$30.000/año</a:t>
-            </a:r>
-          </a:p>
-        </p:txBody>
-      </p:sp>
-      <p:sp>
-        <p:nvSpPr>
-          <p:cNvPr id="22" name="TextBox 21"/>
-          <p:cNvSpPr txBox="1"/>
-          <p:nvPr/>
-        </p:nvSpPr>
-        <p:spPr>
-          <a:xfrm>
-            <a:off x="822960" y="5257800"/>
-            <a:ext cx="5486400" cy="274320"/>
-          </a:xfrm>
-          <a:prstGeom prst="rect">
-            <a:avLst/>
-          </a:prstGeom>
-          <a:noFill/>
-        </p:spPr>
-        <p:txBody>
-          <a:bodyPr wrap="square" anchor="t" lIns="0" rIns="0" tIns="0" bIns="0">
-            <a:spAutoFit/>
-          </a:bodyPr>
-          <a:lstStyle/>
-          <a:p>
-            <a:pPr algn="l"/>
+              <a:t>$2.500</a:t>
+            </a:r>
+          </a:p>
+        </p:txBody>
+      </p:sp>
+      <p:sp>
+        <p:nvSpPr>
+          <p:cNvPr id="28" name="TextBox 27"/>
+          <p:cNvSpPr txBox="1"/>
+          <p:nvPr/>
+        </p:nvSpPr>
+        <p:spPr>
+          <a:xfrm>
+            <a:off x="7315200" y="4206240"/>
+            <a:ext cx="2286000" cy="502920"/>
+          </a:xfrm>
+          <a:prstGeom prst="rect">
+            <a:avLst/>
+          </a:prstGeom>
+          <a:noFill/>
+        </p:spPr>
+        <p:txBody>
+          <a:bodyPr wrap="square" anchor="ctr" lIns="0" rIns="0" tIns="0" bIns="0">
+            <a:spAutoFit/>
+          </a:bodyPr>
+          <a:lstStyle/>
+          <a:p>
+            <a:pPr algn="ctr"/>
             <a:r>
               <a:rPr sz="1200" b="0" i="0">
                 <a:solidFill>
@@ -12979,64 +14000,29 @@
                 </a:solidFill>
                 <a:latin typeface="Calibri"/>
               </a:rPr>
-              <a:t>Ahorro anual con ExamLab:</a:t>
-            </a:r>
-          </a:p>
-        </p:txBody>
-      </p:sp>
-      <p:sp>
-        <p:nvSpPr>
-          <p:cNvPr id="23" name="TextBox 22"/>
-          <p:cNvSpPr txBox="1"/>
-          <p:nvPr/>
-        </p:nvSpPr>
-        <p:spPr>
-          <a:xfrm>
-            <a:off x="6400800" y="5257800"/>
-            <a:ext cx="5029200" cy="274320"/>
-          </a:xfrm>
-          <a:prstGeom prst="rect">
-            <a:avLst/>
-          </a:prstGeom>
-          <a:noFill/>
-        </p:spPr>
-        <p:txBody>
-          <a:bodyPr wrap="square" anchor="t" lIns="0" rIns="0" tIns="0" bIns="0">
-            <a:spAutoFit/>
-          </a:bodyPr>
-          <a:lstStyle/>
-          <a:p>
-            <a:pPr algn="l"/>
-            <a:r>
-              <a:rPr sz="1200" b="1" i="0">
-                <a:solidFill>
-                  <a:srgbClr val="0F3E4C"/>
-                </a:solidFill>
-                <a:latin typeface="Calibri"/>
-              </a:rPr>
-              <a:t>~$20.000-$25.000 USD</a:t>
-            </a:r>
-          </a:p>
-        </p:txBody>
-      </p:sp>
-      <p:sp>
-        <p:nvSpPr>
-          <p:cNvPr id="24" name="TextBox 23"/>
-          <p:cNvSpPr txBox="1"/>
-          <p:nvPr/>
-        </p:nvSpPr>
-        <p:spPr>
-          <a:xfrm>
-            <a:off x="822960" y="5577840"/>
-            <a:ext cx="5486400" cy="274320"/>
-          </a:xfrm>
-          <a:prstGeom prst="rect">
-            <a:avLst/>
-          </a:prstGeom>
-          <a:noFill/>
-        </p:spPr>
-        <p:txBody>
-          <a:bodyPr wrap="square" anchor="t" lIns="0" rIns="0" tIns="0" bIns="0">
+              <a:t>$0.83</a:t>
+            </a:r>
+          </a:p>
+        </p:txBody>
+      </p:sp>
+      <p:sp>
+        <p:nvSpPr>
+          <p:cNvPr id="29" name="TextBox 28"/>
+          <p:cNvSpPr txBox="1"/>
+          <p:nvPr/>
+        </p:nvSpPr>
+        <p:spPr>
+          <a:xfrm>
+            <a:off x="9601200" y="4206240"/>
+            <a:ext cx="2286000" cy="502920"/>
+          </a:xfrm>
+          <a:prstGeom prst="rect">
+            <a:avLst/>
+          </a:prstGeom>
+          <a:noFill/>
+        </p:spPr>
+        <p:txBody>
+          <a:bodyPr wrap="square" anchor="ctr" lIns="0" rIns="0" tIns="0" bIns="0">
             <a:spAutoFit/>
           </a:bodyPr>
           <a:lstStyle/>
@@ -13049,49 +14035,235 @@
                 </a:solidFill>
                 <a:latin typeface="Calibri"/>
               </a:rPr>
-              <a:t>Setup + migración:</a:t>
-            </a:r>
-          </a:p>
-        </p:txBody>
-      </p:sp>
-      <p:sp>
-        <p:nvSpPr>
-          <p:cNvPr id="25" name="TextBox 24"/>
-          <p:cNvSpPr txBox="1"/>
-          <p:nvPr/>
-        </p:nvSpPr>
-        <p:spPr>
-          <a:xfrm>
-            <a:off x="6400800" y="5577840"/>
-            <a:ext cx="5029200" cy="274320"/>
-          </a:xfrm>
-          <a:prstGeom prst="rect">
-            <a:avLst/>
-          </a:prstGeom>
-          <a:noFill/>
-        </p:spPr>
-        <p:txBody>
-          <a:bodyPr wrap="square" anchor="t" lIns="0" rIns="0" tIns="0" bIns="0">
-            <a:spAutoFit/>
-          </a:bodyPr>
-          <a:lstStyle/>
-          <a:p>
-            <a:pPr algn="l"/>
-            <a:r>
-              <a:rPr sz="1200" b="1" i="0">
-                <a:solidFill>
-                  <a:srgbClr val="0F3E4C"/>
-                </a:solidFill>
-                <a:latin typeface="Calibri"/>
-              </a:rPr>
-              <a:t>Incluidos (Admin) vs 3-6 meses Canvas</a:t>
-            </a:r>
-          </a:p>
-        </p:txBody>
-      </p:sp>
-      <p:sp>
-        <p:nvSpPr>
-          <p:cNvPr id="26" name="TextBox 25"/>
+              <a:t>Contract 3 años típico</a:t>
+            </a:r>
+          </a:p>
+        </p:txBody>
+      </p:sp>
+      <p:sp>
+        <p:nvSpPr>
+          <p:cNvPr id="30" name="Rounded Rectangle 29"/>
+          <p:cNvSpPr/>
+          <p:nvPr/>
+        </p:nvSpPr>
+        <p:spPr>
+          <a:xfrm>
+            <a:off x="457200" y="4709159"/>
+            <a:ext cx="11247120" cy="502920"/>
+          </a:xfrm>
+          <a:prstGeom prst="roundRect">
+            <a:avLst>
+              <a:gd name="adj" fmla="val 5000"/>
+            </a:avLst>
+          </a:prstGeom>
+          <a:solidFill>
+            <a:srgbClr val="FFFFFF"/>
+          </a:solidFill>
+          <a:ln>
+            <a:noFill/>
+          </a:ln>
+          <a:effectLst/>
+        </p:spPr>
+        <p:style>
+          <a:lnRef idx="1">
+            <a:schemeClr val="accent1"/>
+          </a:lnRef>
+          <a:fillRef idx="3">
+            <a:schemeClr val="accent1"/>
+          </a:fillRef>
+          <a:effectRef idx="2">
+            <a:schemeClr val="accent1"/>
+          </a:effectRef>
+          <a:fontRef idx="minor">
+            <a:schemeClr val="lt1"/>
+          </a:fontRef>
+        </p:style>
+        <p:txBody>
+          <a:bodyPr rtlCol="0" anchor="ctr"/>
+          <a:lstStyle/>
+          <a:p>
+            <a:pPr algn="ctr"/>
+          </a:p>
+        </p:txBody>
+      </p:sp>
+      <p:sp>
+        <p:nvSpPr>
+          <p:cNvPr id="31" name="TextBox 30"/>
+          <p:cNvSpPr txBox="1"/>
+          <p:nvPr/>
+        </p:nvSpPr>
+        <p:spPr>
+          <a:xfrm>
+            <a:off x="640080" y="4709159"/>
+            <a:ext cx="4114800" cy="502920"/>
+          </a:xfrm>
+          <a:prstGeom prst="rect">
+            <a:avLst/>
+          </a:prstGeom>
+          <a:noFill/>
+        </p:spPr>
+        <p:txBody>
+          <a:bodyPr wrap="square" anchor="ctr" lIns="0" rIns="0" tIns="0" bIns="0">
+            <a:spAutoFit/>
+          </a:bodyPr>
+          <a:lstStyle/>
+          <a:p>
+            <a:pPr algn="l"/>
+            <a:r>
+              <a:rPr sz="1200" b="0" i="0">
+                <a:solidFill>
+                  <a:srgbClr val="1F2A33"/>
+                </a:solidFill>
+                <a:latin typeface="Calibri"/>
+              </a:rPr>
+              <a:t>Blackboard mid-market</a:t>
+            </a:r>
+          </a:p>
+        </p:txBody>
+      </p:sp>
+      <p:sp>
+        <p:nvSpPr>
+          <p:cNvPr id="32" name="TextBox 31"/>
+          <p:cNvSpPr txBox="1"/>
+          <p:nvPr/>
+        </p:nvSpPr>
+        <p:spPr>
+          <a:xfrm>
+            <a:off x="4754880" y="4709159"/>
+            <a:ext cx="2560320" cy="502920"/>
+          </a:xfrm>
+          <a:prstGeom prst="rect">
+            <a:avLst/>
+          </a:prstGeom>
+          <a:noFill/>
+        </p:spPr>
+        <p:txBody>
+          <a:bodyPr wrap="square" anchor="ctr" lIns="0" rIns="0" tIns="0" bIns="0">
+            <a:spAutoFit/>
+          </a:bodyPr>
+          <a:lstStyle/>
+          <a:p>
+            <a:pPr algn="ctr"/>
+            <a:r>
+              <a:rPr sz="1200" b="0" i="0">
+                <a:solidFill>
+                  <a:srgbClr val="1F2A33"/>
+                </a:solidFill>
+                <a:latin typeface="Calibri"/>
+              </a:rPr>
+              <a:t>$5.000+</a:t>
+            </a:r>
+          </a:p>
+        </p:txBody>
+      </p:sp>
+      <p:sp>
+        <p:nvSpPr>
+          <p:cNvPr id="33" name="TextBox 32"/>
+          <p:cNvSpPr txBox="1"/>
+          <p:nvPr/>
+        </p:nvSpPr>
+        <p:spPr>
+          <a:xfrm>
+            <a:off x="7315200" y="4709159"/>
+            <a:ext cx="2286000" cy="502920"/>
+          </a:xfrm>
+          <a:prstGeom prst="rect">
+            <a:avLst/>
+          </a:prstGeom>
+          <a:noFill/>
+        </p:spPr>
+        <p:txBody>
+          <a:bodyPr wrap="square" anchor="ctr" lIns="0" rIns="0" tIns="0" bIns="0">
+            <a:spAutoFit/>
+          </a:bodyPr>
+          <a:lstStyle/>
+          <a:p>
+            <a:pPr algn="ctr"/>
+            <a:r>
+              <a:rPr sz="1200" b="0" i="0">
+                <a:solidFill>
+                  <a:srgbClr val="1F2A33"/>
+                </a:solidFill>
+                <a:latin typeface="Calibri"/>
+              </a:rPr>
+              <a:t>$1.67+</a:t>
+            </a:r>
+          </a:p>
+        </p:txBody>
+      </p:sp>
+      <p:sp>
+        <p:nvSpPr>
+          <p:cNvPr id="34" name="TextBox 33"/>
+          <p:cNvSpPr txBox="1"/>
+          <p:nvPr/>
+        </p:nvSpPr>
+        <p:spPr>
+          <a:xfrm>
+            <a:off x="9601200" y="4709159"/>
+            <a:ext cx="2286000" cy="502920"/>
+          </a:xfrm>
+          <a:prstGeom prst="rect">
+            <a:avLst/>
+          </a:prstGeom>
+          <a:noFill/>
+        </p:spPr>
+        <p:txBody>
+          <a:bodyPr wrap="square" anchor="ctr" lIns="0" rIns="0" tIns="0" bIns="0">
+            <a:spAutoFit/>
+          </a:bodyPr>
+          <a:lstStyle/>
+          <a:p>
+            <a:pPr algn="l"/>
+            <a:r>
+              <a:rPr sz="1200" b="0" i="0">
+                <a:solidFill>
+                  <a:srgbClr val="1F2A33"/>
+                </a:solidFill>
+                <a:latin typeface="Calibri"/>
+              </a:rPr>
+              <a:t>Setup + capacitación aparte</a:t>
+            </a:r>
+          </a:p>
+        </p:txBody>
+      </p:sp>
+      <p:sp>
+        <p:nvSpPr>
+          <p:cNvPr id="35" name="TextBox 34"/>
+          <p:cNvSpPr txBox="1"/>
+          <p:nvPr/>
+        </p:nvSpPr>
+        <p:spPr>
+          <a:xfrm>
+            <a:off x="457200" y="5852160"/>
+            <a:ext cx="11247120" cy="365760"/>
+          </a:xfrm>
+          <a:prstGeom prst="rect">
+            <a:avLst/>
+          </a:prstGeom>
+          <a:noFill/>
+        </p:spPr>
+        <p:txBody>
+          <a:bodyPr wrap="square" anchor="t" lIns="0" rIns="0" tIns="0" bIns="0">
+            <a:spAutoFit/>
+          </a:bodyPr>
+          <a:lstStyle/>
+          <a:p>
+            <a:pPr algn="l"/>
+            <a:r>
+              <a:rPr sz="900" b="0" i="1">
+                <a:solidFill>
+                  <a:srgbClr val="647480"/>
+                </a:solidFill>
+                <a:latin typeface="Calibri"/>
+              </a:rPr>
+              <a:t>Fuentes: moodlecloud.com/standard-plans · vendr.com/marketplace/canvas · benchmarks públicos 2026-07</a:t>
+            </a:r>
+          </a:p>
+        </p:txBody>
+      </p:sp>
+      <p:sp>
+        <p:nvSpPr>
+          <p:cNvPr id="36" name="TextBox 35"/>
           <p:cNvSpPr txBox="1"/>
           <p:nvPr/>
         </p:nvSpPr>
@@ -13126,7 +14298,7 @@
       </p:sp>
       <p:sp>
         <p:nvSpPr>
-          <p:cNvPr id="27" name="TextBox 26"/>
+          <p:cNvPr id="37" name="TextBox 36"/>
           <p:cNvSpPr txBox="1"/>
           <p:nvPr/>
         </p:nvSpPr>
@@ -13154,7 +14326,7 @@
                 </a:solidFill>
                 <a:latin typeface="Calibri"/>
               </a:rPr>
-              <a:t>7</a:t>
+              <a:t>6</a:t>
             </a:r>
           </a:p>
         </p:txBody>

--- a/docs/demos/presentacion/ExamLab-Presentacion-Comercial-v3.pptx
+++ b/docs/demos/presentacion/ExamLab-Presentacion-Comercial-v3.pptx
@@ -3209,7 +3209,7 @@
                 </a:solidFill>
                 <a:latin typeface="Calibri"/>
               </a:rPr>
-              <a:t>La plataforma educativa con IA — planes v3 para tu institución</a:t>
+              <a:t>La plataforma educativa con IA — planes para tu institución</a:t>
             </a:r>
           </a:p>
         </p:txBody>
@@ -3314,7 +3314,7 @@
                 </a:solidFill>
                 <a:latin typeface="Calibri"/>
               </a:rPr>
-              <a:t>PROPUESTA COMERCIAL · v3 · Julio 2026</a:t>
+              <a:t>PROPUESTA COMERCIAL · Julio 2026</a:t>
             </a:r>
           </a:p>
         </p:txBody>
@@ -3479,7 +3479,7 @@
             <a:r>
               <a:rPr sz="3200" b="1" i="0">
                 <a:solidFill>
-                  <a:srgbClr val="1E5BAF"/>
+                  <a:srgbClr val="4F46E5"/>
                 </a:solidFill>
                 <a:latin typeface="Calibri"/>
               </a:rPr>
@@ -3596,7 +3596,7 @@
             <a:r>
               <a:rPr sz="3200" b="1" i="0">
                 <a:solidFill>
-                  <a:srgbClr val="1E5BAF"/>
+                  <a:srgbClr val="4F46E5"/>
                 </a:solidFill>
                 <a:latin typeface="Calibri"/>
               </a:rPr>
@@ -3713,7 +3713,7 @@
             <a:r>
               <a:rPr sz="3200" b="1" i="0">
                 <a:solidFill>
-                  <a:srgbClr val="1E5BAF"/>
+                  <a:srgbClr val="4F46E5"/>
                 </a:solidFill>
                 <a:latin typeface="Calibri"/>
               </a:rPr>
@@ -3830,7 +3830,7 @@
             <a:r>
               <a:rPr sz="3200" b="1" i="0">
                 <a:solidFill>
-                  <a:srgbClr val="1E5BAF"/>
+                  <a:srgbClr val="4F46E5"/>
                 </a:solidFill>
                 <a:latin typeface="Calibri"/>
               </a:rPr>
@@ -6705,7 +6705,7 @@
                 </a:solidFill>
                 <a:latin typeface="Calibri"/>
               </a:rPr>
-              <a:t>PLANES V3</a:t>
+              <a:t>PLANES</a:t>
             </a:r>
           </a:p>
         </p:txBody>
@@ -6788,8 +6788,8 @@
         </p:nvSpPr>
         <p:spPr>
           <a:xfrm>
-            <a:off x="457200" y="2468880"/>
-            <a:ext cx="3611880" cy="4206240"/>
+            <a:off x="457200" y="2331720"/>
+            <a:ext cx="3611880" cy="3794760"/>
           </a:xfrm>
           <a:prstGeom prst="roundRect">
             <a:avLst>
@@ -6836,7 +6836,7 @@
         </p:nvSpPr>
         <p:spPr>
           <a:xfrm>
-            <a:off x="457200" y="2788920"/>
+            <a:off x="457200" y="2606040"/>
             <a:ext cx="3611880" cy="457200"/>
           </a:xfrm>
           <a:prstGeom prst="rect">
@@ -6871,7 +6871,7 @@
         </p:nvSpPr>
         <p:spPr>
           <a:xfrm>
-            <a:off x="457200" y="3291840"/>
+            <a:off x="457200" y="3108960"/>
             <a:ext cx="3611880" cy="320040"/>
           </a:xfrm>
           <a:prstGeom prst="rect">
@@ -6906,7 +6906,7 @@
         </p:nvSpPr>
         <p:spPr>
           <a:xfrm>
-            <a:off x="457200" y="3840480"/>
+            <a:off x="457200" y="3474720"/>
             <a:ext cx="3611880" cy="731520"/>
           </a:xfrm>
           <a:prstGeom prst="rect">
@@ -6924,7 +6924,7 @@
             <a:r>
               <a:rPr sz="4400" b="1" i="0">
                 <a:solidFill>
-                  <a:srgbClr val="1E5BAF"/>
+                  <a:srgbClr val="4F46E5"/>
                 </a:solidFill>
                 <a:latin typeface="Calibri"/>
               </a:rPr>
@@ -6941,7 +6941,7 @@
         </p:nvSpPr>
         <p:spPr>
           <a:xfrm>
-            <a:off x="457200" y="4617720"/>
+            <a:off x="457200" y="4206239"/>
             <a:ext cx="3611880" cy="274320"/>
           </a:xfrm>
           <a:prstGeom prst="rect">
@@ -6976,7 +6976,7 @@
         </p:nvCxnSpPr>
         <p:spPr>
           <a:xfrm>
-            <a:off x="822960" y="4983480"/>
+            <a:off x="822960" y="4572000"/>
             <a:ext cx="2880360" cy="0"/>
           </a:xfrm>
           <a:prstGeom prst="line">
@@ -7011,7 +7011,7 @@
         </p:nvSpPr>
         <p:spPr>
           <a:xfrm>
-            <a:off x="457200" y="5120640"/>
+            <a:off x="457200" y="4663440"/>
             <a:ext cx="3611880" cy="274320"/>
           </a:xfrm>
           <a:prstGeom prst="rect">
@@ -7046,7 +7046,7 @@
         </p:nvSpPr>
         <p:spPr>
           <a:xfrm>
-            <a:off x="457200" y="5394960"/>
+            <a:off x="457200" y="4937760"/>
             <a:ext cx="3611880" cy="365760"/>
           </a:xfrm>
           <a:prstGeom prst="rect">
@@ -7081,7 +7081,7 @@
         </p:nvSpPr>
         <p:spPr>
           <a:xfrm>
-            <a:off x="640080" y="5943600"/>
+            <a:off x="640080" y="5394960"/>
             <a:ext cx="274320" cy="228600"/>
           </a:xfrm>
           <a:prstGeom prst="rect">
@@ -7116,7 +7116,7 @@
         </p:nvSpPr>
         <p:spPr>
           <a:xfrm>
-            <a:off x="914400" y="5943600"/>
+            <a:off x="914400" y="5394960"/>
             <a:ext cx="3154680" cy="228600"/>
           </a:xfrm>
           <a:prstGeom prst="rect">
@@ -7151,7 +7151,7 @@
         </p:nvSpPr>
         <p:spPr>
           <a:xfrm>
-            <a:off x="640080" y="6172200"/>
+            <a:off x="640080" y="5623560"/>
             <a:ext cx="274320" cy="228600"/>
           </a:xfrm>
           <a:prstGeom prst="rect">
@@ -7186,7 +7186,7 @@
         </p:nvSpPr>
         <p:spPr>
           <a:xfrm>
-            <a:off x="914400" y="6172200"/>
+            <a:off x="914400" y="5623560"/>
             <a:ext cx="3154680" cy="228600"/>
           </a:xfrm>
           <a:prstGeom prst="rect">
@@ -7221,7 +7221,7 @@
         </p:nvSpPr>
         <p:spPr>
           <a:xfrm>
-            <a:off x="640080" y="6400800"/>
+            <a:off x="640080" y="5852160"/>
             <a:ext cx="274320" cy="228600"/>
           </a:xfrm>
           <a:prstGeom prst="rect">
@@ -7256,7 +7256,7 @@
         </p:nvSpPr>
         <p:spPr>
           <a:xfrm>
-            <a:off x="914400" y="6400800"/>
+            <a:off x="914400" y="5852160"/>
             <a:ext cx="3154680" cy="228600"/>
           </a:xfrm>
           <a:prstGeom prst="rect">
@@ -7291,8 +7291,8 @@
         </p:nvSpPr>
         <p:spPr>
           <a:xfrm>
-            <a:off x="4297680" y="2468880"/>
-            <a:ext cx="3611880" cy="4206240"/>
+            <a:off x="4297680" y="2331720"/>
+            <a:ext cx="3611880" cy="3794760"/>
           </a:xfrm>
           <a:prstGeom prst="roundRect">
             <a:avLst>
@@ -7339,7 +7339,7 @@
         </p:nvSpPr>
         <p:spPr>
           <a:xfrm>
-            <a:off x="5417820" y="2286000"/>
+            <a:off x="5417820" y="2148840"/>
             <a:ext cx="1371600" cy="320040"/>
           </a:xfrm>
           <a:prstGeom prst="roundRect">
@@ -7385,7 +7385,7 @@
         </p:nvSpPr>
         <p:spPr>
           <a:xfrm>
-            <a:off x="5417820" y="2304288"/>
+            <a:off x="5417820" y="2167128"/>
             <a:ext cx="1371600" cy="274320"/>
           </a:xfrm>
           <a:prstGeom prst="rect">
@@ -7420,7 +7420,7 @@
         </p:nvSpPr>
         <p:spPr>
           <a:xfrm>
-            <a:off x="4297680" y="2788920"/>
+            <a:off x="4297680" y="2606040"/>
             <a:ext cx="3611880" cy="457200"/>
           </a:xfrm>
           <a:prstGeom prst="rect">
@@ -7455,7 +7455,7 @@
         </p:nvSpPr>
         <p:spPr>
           <a:xfrm>
-            <a:off x="4297680" y="3291840"/>
+            <a:off x="4297680" y="3108960"/>
             <a:ext cx="3611880" cy="320040"/>
           </a:xfrm>
           <a:prstGeom prst="rect">
@@ -7490,7 +7490,7 @@
         </p:nvSpPr>
         <p:spPr>
           <a:xfrm>
-            <a:off x="4297680" y="3840480"/>
+            <a:off x="4297680" y="3474720"/>
             <a:ext cx="3611880" cy="731520"/>
           </a:xfrm>
           <a:prstGeom prst="rect">
@@ -7508,7 +7508,7 @@
             <a:r>
               <a:rPr sz="4400" b="1" i="0">
                 <a:solidFill>
-                  <a:srgbClr val="1E5BAF"/>
+                  <a:srgbClr val="4F46E5"/>
                 </a:solidFill>
                 <a:latin typeface="Calibri"/>
               </a:rPr>
@@ -7525,7 +7525,7 @@
         </p:nvSpPr>
         <p:spPr>
           <a:xfrm>
-            <a:off x="4297680" y="4617720"/>
+            <a:off x="4297680" y="4206239"/>
             <a:ext cx="3611880" cy="274320"/>
           </a:xfrm>
           <a:prstGeom prst="rect">
@@ -7560,7 +7560,7 @@
         </p:nvCxnSpPr>
         <p:spPr>
           <a:xfrm>
-            <a:off x="4663440" y="4983480"/>
+            <a:off x="4663440" y="4572000"/>
             <a:ext cx="2880360" cy="0"/>
           </a:xfrm>
           <a:prstGeom prst="line">
@@ -7595,7 +7595,7 @@
         </p:nvSpPr>
         <p:spPr>
           <a:xfrm>
-            <a:off x="4297680" y="5120640"/>
+            <a:off x="4297680" y="4663440"/>
             <a:ext cx="3611880" cy="274320"/>
           </a:xfrm>
           <a:prstGeom prst="rect">
@@ -7630,7 +7630,7 @@
         </p:nvSpPr>
         <p:spPr>
           <a:xfrm>
-            <a:off x="4297680" y="5394960"/>
+            <a:off x="4297680" y="4937760"/>
             <a:ext cx="3611880" cy="365760"/>
           </a:xfrm>
           <a:prstGeom prst="rect">
@@ -7665,7 +7665,7 @@
         </p:nvSpPr>
         <p:spPr>
           <a:xfrm>
-            <a:off x="4480560" y="5943600"/>
+            <a:off x="4480560" y="5394960"/>
             <a:ext cx="274320" cy="228600"/>
           </a:xfrm>
           <a:prstGeom prst="rect">
@@ -7700,7 +7700,7 @@
         </p:nvSpPr>
         <p:spPr>
           <a:xfrm>
-            <a:off x="4754880" y="5943600"/>
+            <a:off x="4754880" y="5394960"/>
             <a:ext cx="3154680" cy="228600"/>
           </a:xfrm>
           <a:prstGeom prst="rect">
@@ -7735,7 +7735,7 @@
         </p:nvSpPr>
         <p:spPr>
           <a:xfrm>
-            <a:off x="4480560" y="6172200"/>
+            <a:off x="4480560" y="5623560"/>
             <a:ext cx="274320" cy="228600"/>
           </a:xfrm>
           <a:prstGeom prst="rect">
@@ -7770,7 +7770,7 @@
         </p:nvSpPr>
         <p:spPr>
           <a:xfrm>
-            <a:off x="4754880" y="6172200"/>
+            <a:off x="4754880" y="5623560"/>
             <a:ext cx="3154680" cy="228600"/>
           </a:xfrm>
           <a:prstGeom prst="rect">
@@ -7805,7 +7805,7 @@
         </p:nvSpPr>
         <p:spPr>
           <a:xfrm>
-            <a:off x="4480560" y="6400800"/>
+            <a:off x="4480560" y="5852160"/>
             <a:ext cx="274320" cy="228600"/>
           </a:xfrm>
           <a:prstGeom prst="rect">
@@ -7840,7 +7840,7 @@
         </p:nvSpPr>
         <p:spPr>
           <a:xfrm>
-            <a:off x="4754880" y="6400800"/>
+            <a:off x="4754880" y="5852160"/>
             <a:ext cx="3154680" cy="228600"/>
           </a:xfrm>
           <a:prstGeom prst="rect">
@@ -7875,8 +7875,8 @@
         </p:nvSpPr>
         <p:spPr>
           <a:xfrm>
-            <a:off x="8138160" y="2468880"/>
-            <a:ext cx="3611880" cy="4206240"/>
+            <a:off x="8138160" y="2331720"/>
+            <a:ext cx="3611880" cy="3794760"/>
           </a:xfrm>
           <a:prstGeom prst="roundRect">
             <a:avLst>
@@ -7923,7 +7923,7 @@
         </p:nvSpPr>
         <p:spPr>
           <a:xfrm>
-            <a:off x="8138160" y="2788920"/>
+            <a:off x="8138160" y="2606040"/>
             <a:ext cx="3611880" cy="457200"/>
           </a:xfrm>
           <a:prstGeom prst="rect">
@@ -7958,7 +7958,7 @@
         </p:nvSpPr>
         <p:spPr>
           <a:xfrm>
-            <a:off x="8138160" y="3291840"/>
+            <a:off x="8138160" y="3108960"/>
             <a:ext cx="3611880" cy="320040"/>
           </a:xfrm>
           <a:prstGeom prst="rect">
@@ -7993,7 +7993,7 @@
         </p:nvSpPr>
         <p:spPr>
           <a:xfrm>
-            <a:off x="8138160" y="3840480"/>
+            <a:off x="8138160" y="3474720"/>
             <a:ext cx="3611880" cy="731520"/>
           </a:xfrm>
           <a:prstGeom prst="rect">
@@ -8011,7 +8011,7 @@
             <a:r>
               <a:rPr sz="4400" b="1" i="0">
                 <a:solidFill>
-                  <a:srgbClr val="1E5BAF"/>
+                  <a:srgbClr val="4F46E5"/>
                 </a:solidFill>
                 <a:latin typeface="Calibri"/>
               </a:rPr>
@@ -8028,7 +8028,7 @@
         </p:nvSpPr>
         <p:spPr>
           <a:xfrm>
-            <a:off x="8138160" y="4617720"/>
+            <a:off x="8138160" y="4206239"/>
             <a:ext cx="3611880" cy="274320"/>
           </a:xfrm>
           <a:prstGeom prst="rect">
@@ -8063,7 +8063,7 @@
         </p:nvCxnSpPr>
         <p:spPr>
           <a:xfrm>
-            <a:off x="8503920" y="4983480"/>
+            <a:off x="8503920" y="4572000"/>
             <a:ext cx="2880360" cy="0"/>
           </a:xfrm>
           <a:prstGeom prst="line">
@@ -8098,7 +8098,7 @@
         </p:nvSpPr>
         <p:spPr>
           <a:xfrm>
-            <a:off x="8138160" y="5120640"/>
+            <a:off x="8138160" y="4663440"/>
             <a:ext cx="3611880" cy="274320"/>
           </a:xfrm>
           <a:prstGeom prst="rect">
@@ -8133,7 +8133,7 @@
         </p:nvSpPr>
         <p:spPr>
           <a:xfrm>
-            <a:off x="8138160" y="5394960"/>
+            <a:off x="8138160" y="4937760"/>
             <a:ext cx="3611880" cy="365760"/>
           </a:xfrm>
           <a:prstGeom prst="rect">
@@ -8168,7 +8168,7 @@
         </p:nvSpPr>
         <p:spPr>
           <a:xfrm>
-            <a:off x="8321040" y="5943600"/>
+            <a:off x="8321040" y="5394960"/>
             <a:ext cx="274320" cy="228600"/>
           </a:xfrm>
           <a:prstGeom prst="rect">
@@ -8203,7 +8203,7 @@
         </p:nvSpPr>
         <p:spPr>
           <a:xfrm>
-            <a:off x="8595360" y="5943600"/>
+            <a:off x="8595360" y="5394960"/>
             <a:ext cx="3154680" cy="228600"/>
           </a:xfrm>
           <a:prstGeom prst="rect">
@@ -8238,7 +8238,7 @@
         </p:nvSpPr>
         <p:spPr>
           <a:xfrm>
-            <a:off x="8321040" y="6172200"/>
+            <a:off x="8321040" y="5623560"/>
             <a:ext cx="274320" cy="228600"/>
           </a:xfrm>
           <a:prstGeom prst="rect">
@@ -8273,7 +8273,7 @@
         </p:nvSpPr>
         <p:spPr>
           <a:xfrm>
-            <a:off x="8595360" y="6172200"/>
+            <a:off x="8595360" y="5623560"/>
             <a:ext cx="3154680" cy="228600"/>
           </a:xfrm>
           <a:prstGeom prst="rect">
@@ -8308,7 +8308,7 @@
         </p:nvSpPr>
         <p:spPr>
           <a:xfrm>
-            <a:off x="8321040" y="6400800"/>
+            <a:off x="8321040" y="5852160"/>
             <a:ext cx="274320" cy="228600"/>
           </a:xfrm>
           <a:prstGeom prst="rect">
@@ -8343,7 +8343,7 @@
         </p:nvSpPr>
         <p:spPr>
           <a:xfrm>
-            <a:off x="8595360" y="6400800"/>
+            <a:off x="8595360" y="5852160"/>
             <a:ext cx="3154680" cy="228600"/>
           </a:xfrm>
           <a:prstGeom prst="rect">
@@ -8372,60 +8372,14 @@
       </p:sp>
       <p:sp>
         <p:nvSpPr>
-          <p:cNvPr id="49" name="Rounded Rectangle 48"/>
-          <p:cNvSpPr/>
-          <p:nvPr/>
-        </p:nvSpPr>
-        <p:spPr>
-          <a:xfrm>
-            <a:off x="457200" y="6720840"/>
-            <a:ext cx="0" cy="45720"/>
-          </a:xfrm>
-          <a:prstGeom prst="roundRect">
-            <a:avLst>
-              <a:gd name="adj" fmla="val 5000"/>
-            </a:avLst>
-          </a:prstGeom>
-          <a:solidFill>
-            <a:srgbClr val="147A8C"/>
-          </a:solidFill>
-          <a:ln>
-            <a:noFill/>
-          </a:ln>
-          <a:effectLst/>
-        </p:spPr>
-        <p:style>
-          <a:lnRef idx="1">
-            <a:schemeClr val="accent1"/>
-          </a:lnRef>
-          <a:fillRef idx="3">
-            <a:schemeClr val="accent1"/>
-          </a:fillRef>
-          <a:effectRef idx="2">
-            <a:schemeClr val="accent1"/>
-          </a:effectRef>
-          <a:fontRef idx="minor">
-            <a:schemeClr val="lt1"/>
-          </a:fontRef>
-        </p:style>
-        <p:txBody>
-          <a:bodyPr rtlCol="0" anchor="ctr"/>
-          <a:lstStyle/>
-          <a:p>
-            <a:pPr algn="ctr"/>
-          </a:p>
-        </p:txBody>
-      </p:sp>
-      <p:sp>
-        <p:nvSpPr>
-          <p:cNvPr id="50" name="TextBox 49"/>
-          <p:cNvSpPr txBox="1"/>
-          <p:nvPr/>
-        </p:nvSpPr>
-        <p:spPr>
-          <a:xfrm>
-            <a:off x="457200" y="6492240"/>
-            <a:ext cx="11247120" cy="274320"/>
+          <p:cNvPr id="49" name="TextBox 48"/>
+          <p:cNvSpPr txBox="1"/>
+          <p:nvPr/>
+        </p:nvSpPr>
+        <p:spPr>
+          <a:xfrm>
+            <a:off x="457200" y="6355080"/>
+            <a:ext cx="11247120" cy="320040"/>
           </a:xfrm>
           <a:prstGeom prst="rect">
             <a:avLst/>
@@ -8748,7 +8702,7 @@
           </a:solidFill>
           <a:ln w="19050">
             <a:solidFill>
-              <a:srgbClr val="1E5BAF"/>
+              <a:srgbClr val="4F46E5"/>
             </a:solidFill>
           </a:ln>
           <a:effectLst/>
@@ -8836,7 +8790,7 @@
             <a:r>
               <a:rPr sz="4000" b="1" i="0">
                 <a:solidFill>
-                  <a:srgbClr val="1E5BAF"/>
+                  <a:srgbClr val="4F46E5"/>
                 </a:solidFill>
                 <a:latin typeface="Calibri"/>
               </a:rPr>

--- a/docs/demos/presentacion/ExamLab-Presentacion-Comercial-v3.pptx
+++ b/docs/demos/presentacion/ExamLab-Presentacion-Comercial-v3.pptx
@@ -3115,7 +3115,7 @@
             </a:avLst>
           </a:prstGeom>
           <a:solidFill>
-            <a:srgbClr val="0F3E4C"/>
+            <a:srgbClr val="1E1B4B"/>
           </a:solidFill>
           <a:ln>
             <a:noFill/>
@@ -3205,7 +3205,7 @@
             <a:r>
               <a:rPr sz="1600" b="0" i="0">
                 <a:solidFill>
-                  <a:srgbClr val="C8E8EE"/>
+                  <a:srgbClr val="C7D2FE"/>
                 </a:solidFill>
                 <a:latin typeface="Calibri"/>
               </a:rPr>
@@ -3240,7 +3240,7 @@
             <a:r>
               <a:rPr sz="3200" b="1" i="0">
                 <a:solidFill>
-                  <a:srgbClr val="0F3E4C"/>
+                  <a:srgbClr val="1E1B4B"/>
                 </a:solidFill>
                 <a:latin typeface="Calibri"/>
               </a:rPr>
@@ -3275,11 +3275,11 @@
             <a:r>
               <a:rPr sz="1600" b="0" i="0">
                 <a:solidFill>
-                  <a:srgbClr val="647480"/>
-                </a:solidFill>
-                <a:latin typeface="Calibri"/>
-              </a:rPr>
-              <a:t>IA incluida (con tu API key) · Multi-tenant seguro · Setup en días, no meses</a:t>
+                  <a:srgbClr val="64748B"/>
+                </a:solidFill>
+                <a:latin typeface="Calibri"/>
+              </a:rPr>
+              <a:t>IA incluida (con tu API key) · Seguro y privado · Setup en días, no meses</a:t>
             </a:r>
           </a:p>
         </p:txBody>
@@ -3310,7 +3310,7 @@
             <a:r>
               <a:rPr sz="1100" b="1" i="0">
                 <a:solidFill>
-                  <a:srgbClr val="147A8C"/>
+                  <a:srgbClr val="4F46E5"/>
                 </a:solidFill>
                 <a:latin typeface="Calibri"/>
               </a:rPr>
@@ -3363,7 +3363,7 @@
             <a:r>
               <a:rPr sz="1100" b="1" i="0">
                 <a:solidFill>
-                  <a:srgbClr val="147A8C"/>
+                  <a:srgbClr val="4F46E5"/>
                 </a:solidFill>
                 <a:latin typeface="Calibri"/>
               </a:rPr>
@@ -3398,7 +3398,7 @@
             <a:r>
               <a:rPr sz="2800" b="1" i="0">
                 <a:solidFill>
-                  <a:srgbClr val="0F3E4C"/>
+                  <a:srgbClr val="1E1B4B"/>
                 </a:solidFill>
                 <a:latin typeface="Calibri"/>
               </a:rPr>
@@ -3424,7 +3424,7 @@
             </a:avLst>
           </a:prstGeom>
           <a:solidFill>
-            <a:srgbClr val="F4F8FA"/>
+            <a:srgbClr val="EEF2FF"/>
           </a:solidFill>
           <a:ln>
             <a:noFill/>
@@ -3514,7 +3514,7 @@
             <a:r>
               <a:rPr sz="1100" b="0" i="0">
                 <a:solidFill>
-                  <a:srgbClr val="1F2A33"/>
+                  <a:srgbClr val="1F2937"/>
                 </a:solidFill>
                 <a:latin typeface="Calibri"/>
               </a:rPr>
@@ -3541,7 +3541,7 @@
             </a:avLst>
           </a:prstGeom>
           <a:solidFill>
-            <a:srgbClr val="F4F8FA"/>
+            <a:srgbClr val="EEF2FF"/>
           </a:solidFill>
           <a:ln>
             <a:noFill/>
@@ -3631,7 +3631,7 @@
             <a:r>
               <a:rPr sz="1100" b="0" i="0">
                 <a:solidFill>
-                  <a:srgbClr val="1F2A33"/>
+                  <a:srgbClr val="1F2937"/>
                 </a:solidFill>
                 <a:latin typeface="Calibri"/>
               </a:rPr>
@@ -3658,7 +3658,7 @@
             </a:avLst>
           </a:prstGeom>
           <a:solidFill>
-            <a:srgbClr val="F4F8FA"/>
+            <a:srgbClr val="EEF2FF"/>
           </a:solidFill>
           <a:ln>
             <a:noFill/>
@@ -3748,7 +3748,7 @@
             <a:r>
               <a:rPr sz="1100" b="0" i="0">
                 <a:solidFill>
-                  <a:srgbClr val="1F2A33"/>
+                  <a:srgbClr val="1F2937"/>
                 </a:solidFill>
                 <a:latin typeface="Calibri"/>
               </a:rPr>
@@ -3775,7 +3775,7 @@
             </a:avLst>
           </a:prstGeom>
           <a:solidFill>
-            <a:srgbClr val="F4F8FA"/>
+            <a:srgbClr val="EEF2FF"/>
           </a:solidFill>
           <a:ln>
             <a:noFill/>
@@ -3865,7 +3865,7 @@
             <a:r>
               <a:rPr sz="1100" b="0" i="0">
                 <a:solidFill>
-                  <a:srgbClr val="1F2A33"/>
+                  <a:srgbClr val="1F2937"/>
                 </a:solidFill>
                 <a:latin typeface="Calibri"/>
               </a:rPr>
@@ -3896,7 +3896,7 @@
           </a:solidFill>
           <a:ln w="19050">
             <a:solidFill>
-              <a:srgbClr val="2EB8C7"/>
+              <a:srgbClr val="7C3AED"/>
             </a:solidFill>
           </a:ln>
           <a:effectLst/>
@@ -3949,7 +3949,7 @@
             <a:r>
               <a:rPr sz="1500" b="1" i="0">
                 <a:solidFill>
-                  <a:srgbClr val="0F3E4C"/>
+                  <a:srgbClr val="1E1B4B"/>
                 </a:solidFill>
                 <a:latin typeface="Calibri"/>
               </a:rPr>
@@ -3984,7 +3984,7 @@
             <a:r>
               <a:rPr sz="1200" b="0" i="0">
                 <a:solidFill>
-                  <a:srgbClr val="1F2A33"/>
+                  <a:srgbClr val="1F2937"/>
                 </a:solidFill>
                 <a:latin typeface="Calibri"/>
               </a:rPr>
@@ -4019,7 +4019,7 @@
             <a:r>
               <a:rPr sz="1200" b="1" i="0">
                 <a:solidFill>
-                  <a:srgbClr val="0F3E4C"/>
+                  <a:srgbClr val="1E1B4B"/>
                 </a:solidFill>
                 <a:latin typeface="Calibri"/>
               </a:rPr>
@@ -4054,7 +4054,7 @@
             <a:r>
               <a:rPr sz="1200" b="0" i="0">
                 <a:solidFill>
-                  <a:srgbClr val="1F2A33"/>
+                  <a:srgbClr val="1F2937"/>
                 </a:solidFill>
                 <a:latin typeface="Calibri"/>
               </a:rPr>
@@ -4089,7 +4089,7 @@
             <a:r>
               <a:rPr sz="1200" b="1" i="0">
                 <a:solidFill>
-                  <a:srgbClr val="0F3E4C"/>
+                  <a:srgbClr val="1E1B4B"/>
                 </a:solidFill>
                 <a:latin typeface="Calibri"/>
               </a:rPr>
@@ -4124,7 +4124,7 @@
             <a:r>
               <a:rPr sz="1200" b="0" i="0">
                 <a:solidFill>
-                  <a:srgbClr val="1F2A33"/>
+                  <a:srgbClr val="1F2937"/>
                 </a:solidFill>
                 <a:latin typeface="Calibri"/>
               </a:rPr>
@@ -4159,7 +4159,7 @@
             <a:r>
               <a:rPr sz="1200" b="1" i="0">
                 <a:solidFill>
-                  <a:srgbClr val="0F3E4C"/>
+                  <a:srgbClr val="1E1B4B"/>
                 </a:solidFill>
                 <a:latin typeface="Calibri"/>
               </a:rPr>
@@ -4194,7 +4194,7 @@
             <a:r>
               <a:rPr sz="1200" b="0" i="0">
                 <a:solidFill>
-                  <a:srgbClr val="1F2A33"/>
+                  <a:srgbClr val="1F2937"/>
                 </a:solidFill>
                 <a:latin typeface="Calibri"/>
               </a:rPr>
@@ -4229,7 +4229,7 @@
             <a:r>
               <a:rPr sz="1200" b="1" i="0">
                 <a:solidFill>
-                  <a:srgbClr val="0F3E4C"/>
+                  <a:srgbClr val="1E1B4B"/>
                 </a:solidFill>
                 <a:latin typeface="Calibri"/>
               </a:rPr>
@@ -4264,7 +4264,7 @@
             <a:r>
               <a:rPr sz="900" b="0" i="0">
                 <a:solidFill>
-                  <a:srgbClr val="647480"/>
+                  <a:srgbClr val="64748B"/>
                 </a:solidFill>
                 <a:latin typeface="Calibri"/>
               </a:rPr>
@@ -4299,7 +4299,7 @@
             <a:r>
               <a:rPr sz="900" b="0" i="0">
                 <a:solidFill>
-                  <a:srgbClr val="647480"/>
+                  <a:srgbClr val="64748B"/>
                 </a:solidFill>
                 <a:latin typeface="Calibri"/>
               </a:rPr>
@@ -4343,7 +4343,7 @@
             </a:avLst>
           </a:prstGeom>
           <a:solidFill>
-            <a:srgbClr val="0F3E4C"/>
+            <a:srgbClr val="1E1B4B"/>
           </a:solidFill>
           <a:ln>
             <a:noFill/>
@@ -4433,7 +4433,7 @@
             <a:r>
               <a:rPr sz="4000" b="1" i="0">
                 <a:solidFill>
-                  <a:srgbClr val="C8E8EE"/>
+                  <a:srgbClr val="C7D2FE"/>
                 </a:solidFill>
                 <a:latin typeface="Calibri"/>
               </a:rPr>
@@ -4468,7 +4468,7 @@
             <a:r>
               <a:rPr sz="1800" b="0" i="0">
                 <a:solidFill>
-                  <a:srgbClr val="1F2A33"/>
+                  <a:srgbClr val="1F2937"/>
                 </a:solidFill>
                 <a:latin typeface="Calibri"/>
               </a:rPr>
@@ -4503,7 +4503,7 @@
             <a:r>
               <a:rPr sz="1800" b="0" i="0">
                 <a:solidFill>
-                  <a:srgbClr val="2EB8C7"/>
+                  <a:srgbClr val="7C3AED"/>
                 </a:solidFill>
                 <a:latin typeface="Calibri"/>
               </a:rPr>
@@ -4538,7 +4538,7 @@
             <a:r>
               <a:rPr sz="1400" b="0" i="0">
                 <a:solidFill>
-                  <a:srgbClr val="1F2A33"/>
+                  <a:srgbClr val="1F2937"/>
                 </a:solidFill>
                 <a:latin typeface="Calibri"/>
               </a:rPr>
@@ -4573,7 +4573,7 @@
             <a:r>
               <a:rPr sz="1800" b="0" i="0">
                 <a:solidFill>
-                  <a:srgbClr val="2EB8C7"/>
+                  <a:srgbClr val="7C3AED"/>
                 </a:solidFill>
                 <a:latin typeface="Calibri"/>
               </a:rPr>
@@ -4608,11 +4608,11 @@
             <a:r>
               <a:rPr sz="1400" b="0" i="0">
                 <a:solidFill>
-                  <a:srgbClr val="1F2A33"/>
-                </a:solidFill>
-                <a:latin typeface="Calibri"/>
-              </a:rPr>
-              <a:t>Multi-tenant seguro con aislamiento por RLS</a:t>
+                  <a:srgbClr val="1F2937"/>
+                </a:solidFill>
+                <a:latin typeface="Calibri"/>
+              </a:rPr>
+              <a:t>Seguridad de nivel empresarial y datos privados por institución</a:t>
             </a:r>
           </a:p>
         </p:txBody>
@@ -4643,7 +4643,7 @@
             <a:r>
               <a:rPr sz="1800" b="0" i="0">
                 <a:solidFill>
-                  <a:srgbClr val="2EB8C7"/>
+                  <a:srgbClr val="7C3AED"/>
                 </a:solidFill>
                 <a:latin typeface="Calibri"/>
               </a:rPr>
@@ -4678,7 +4678,7 @@
             <a:r>
               <a:rPr sz="1400" b="0" i="0">
                 <a:solidFill>
-                  <a:srgbClr val="1F2A33"/>
+                  <a:srgbClr val="1F2937"/>
                 </a:solidFill>
                 <a:latin typeface="Calibri"/>
               </a:rPr>
@@ -4704,7 +4704,7 @@
             </a:avLst>
           </a:prstGeom>
           <a:solidFill>
-            <a:srgbClr val="147A8C"/>
+            <a:srgbClr val="4F46E5"/>
           </a:solidFill>
           <a:ln>
             <a:noFill/>
@@ -4794,7 +4794,7 @@
             <a:r>
               <a:rPr sz="900" b="0" i="0">
                 <a:solidFill>
-                  <a:srgbClr val="647480"/>
+                  <a:srgbClr val="64748B"/>
                 </a:solidFill>
                 <a:latin typeface="Calibri"/>
               </a:rPr>
@@ -4847,7 +4847,7 @@
             <a:r>
               <a:rPr sz="1100" b="1" i="0">
                 <a:solidFill>
-                  <a:srgbClr val="147A8C"/>
+                  <a:srgbClr val="4F46E5"/>
                 </a:solidFill>
                 <a:latin typeface="Calibri"/>
               </a:rPr>
@@ -4882,7 +4882,7 @@
             <a:r>
               <a:rPr sz="2800" b="1" i="0">
                 <a:solidFill>
-                  <a:srgbClr val="0F3E4C"/>
+                  <a:srgbClr val="1E1B4B"/>
                 </a:solidFill>
                 <a:latin typeface="Calibri"/>
               </a:rPr>
@@ -4908,7 +4908,7 @@
             </a:avLst>
           </a:prstGeom>
           <a:solidFill>
-            <a:srgbClr val="2EB8C7"/>
+            <a:srgbClr val="7C3AED"/>
           </a:solidFill>
           <a:ln>
             <a:noFill/>
@@ -4963,7 +4963,7 @@
             <a:r>
               <a:rPr sz="1500" b="0" i="0">
                 <a:solidFill>
-                  <a:srgbClr val="1F2A33"/>
+                  <a:srgbClr val="1F2937"/>
                 </a:solidFill>
                 <a:latin typeface="Calibri"/>
               </a:rPr>
@@ -4989,7 +4989,7 @@
             </a:avLst>
           </a:prstGeom>
           <a:solidFill>
-            <a:srgbClr val="2EB8C7"/>
+            <a:srgbClr val="7C3AED"/>
           </a:solidFill>
           <a:ln>
             <a:noFill/>
@@ -5044,7 +5044,7 @@
             <a:r>
               <a:rPr sz="1500" b="0" i="0">
                 <a:solidFill>
-                  <a:srgbClr val="1F2A33"/>
+                  <a:srgbClr val="1F2937"/>
                 </a:solidFill>
                 <a:latin typeface="Calibri"/>
               </a:rPr>
@@ -5070,7 +5070,7 @@
             </a:avLst>
           </a:prstGeom>
           <a:solidFill>
-            <a:srgbClr val="2EB8C7"/>
+            <a:srgbClr val="7C3AED"/>
           </a:solidFill>
           <a:ln>
             <a:noFill/>
@@ -5125,7 +5125,7 @@
             <a:r>
               <a:rPr sz="1500" b="0" i="0">
                 <a:solidFill>
-                  <a:srgbClr val="1F2A33"/>
+                  <a:srgbClr val="1F2937"/>
                 </a:solidFill>
                 <a:latin typeface="Calibri"/>
               </a:rPr>
@@ -5151,7 +5151,7 @@
             </a:avLst>
           </a:prstGeom>
           <a:solidFill>
-            <a:srgbClr val="2EB8C7"/>
+            <a:srgbClr val="7C3AED"/>
           </a:solidFill>
           <a:ln>
             <a:noFill/>
@@ -5206,7 +5206,7 @@
             <a:r>
               <a:rPr sz="1500" b="1" i="0">
                 <a:solidFill>
-                  <a:srgbClr val="0F3E4C"/>
+                  <a:srgbClr val="1E1B4B"/>
                 </a:solidFill>
                 <a:latin typeface="Calibri"/>
               </a:rPr>
@@ -5232,7 +5232,7 @@
             </a:avLst>
           </a:prstGeom>
           <a:solidFill>
-            <a:srgbClr val="2EB8C7"/>
+            <a:srgbClr val="7C3AED"/>
           </a:solidFill>
           <a:ln>
             <a:noFill/>
@@ -5287,7 +5287,7 @@
             <a:r>
               <a:rPr sz="1500" b="1" i="0">
                 <a:solidFill>
-                  <a:srgbClr val="0F3E4C"/>
+                  <a:srgbClr val="1E1B4B"/>
                 </a:solidFill>
                 <a:latin typeface="Calibri"/>
               </a:rPr>
@@ -5317,7 +5317,7 @@
           </a:solidFill>
           <a:ln w="19050">
             <a:solidFill>
-              <a:srgbClr val="2EB8C7"/>
+              <a:srgbClr val="7C3AED"/>
             </a:solidFill>
           </a:ln>
           <a:effectLst/>
@@ -5370,7 +5370,7 @@
             <a:r>
               <a:rPr sz="1400" b="1" i="0">
                 <a:solidFill>
-                  <a:srgbClr val="0F3E4C"/>
+                  <a:srgbClr val="1E1B4B"/>
                 </a:solidFill>
                 <a:latin typeface="Calibri"/>
               </a:rPr>
@@ -5405,7 +5405,7 @@
             <a:r>
               <a:rPr sz="900" b="0" i="0">
                 <a:solidFill>
-                  <a:srgbClr val="647480"/>
+                  <a:srgbClr val="64748B"/>
                 </a:solidFill>
                 <a:latin typeface="Calibri"/>
               </a:rPr>
@@ -5440,7 +5440,7 @@
             <a:r>
               <a:rPr sz="900" b="0" i="0">
                 <a:solidFill>
-                  <a:srgbClr val="647480"/>
+                  <a:srgbClr val="64748B"/>
                 </a:solidFill>
                 <a:latin typeface="Calibri"/>
               </a:rPr>
@@ -5493,7 +5493,7 @@
             <a:r>
               <a:rPr sz="1100" b="1" i="0">
                 <a:solidFill>
-                  <a:srgbClr val="147A8C"/>
+                  <a:srgbClr val="4F46E5"/>
                 </a:solidFill>
                 <a:latin typeface="Calibri"/>
               </a:rPr>
@@ -5528,7 +5528,7 @@
             <a:r>
               <a:rPr sz="2800" b="1" i="0">
                 <a:solidFill>
-                  <a:srgbClr val="0F3E4C"/>
+                  <a:srgbClr val="1E1B4B"/>
                 </a:solidFill>
                 <a:latin typeface="Calibri"/>
               </a:rPr>
@@ -5563,7 +5563,7 @@
             <a:r>
               <a:rPr sz="2200" b="0" i="0">
                 <a:solidFill>
-                  <a:srgbClr val="1F2A33"/>
+                  <a:srgbClr val="1F2937"/>
                 </a:solidFill>
                 <a:latin typeface="Calibri"/>
               </a:rPr>
@@ -5598,7 +5598,7 @@
             <a:r>
               <a:rPr sz="1400" b="1" i="0">
                 <a:solidFill>
-                  <a:srgbClr val="0F3E4C"/>
+                  <a:srgbClr val="1E1B4B"/>
                 </a:solidFill>
                 <a:latin typeface="Calibri"/>
               </a:rPr>
@@ -5633,7 +5633,7 @@
             <a:r>
               <a:rPr sz="1100" b="0" i="0">
                 <a:solidFill>
-                  <a:srgbClr val="647480"/>
+                  <a:srgbClr val="64748B"/>
                 </a:solidFill>
                 <a:latin typeface="Calibri"/>
               </a:rPr>
@@ -5668,7 +5668,7 @@
             <a:r>
               <a:rPr sz="2200" b="0" i="0">
                 <a:solidFill>
-                  <a:srgbClr val="1F2A33"/>
+                  <a:srgbClr val="1F2937"/>
                 </a:solidFill>
                 <a:latin typeface="Calibri"/>
               </a:rPr>
@@ -5703,7 +5703,7 @@
             <a:r>
               <a:rPr sz="1400" b="1" i="0">
                 <a:solidFill>
-                  <a:srgbClr val="0F3E4C"/>
+                  <a:srgbClr val="1E1B4B"/>
                 </a:solidFill>
                 <a:latin typeface="Calibri"/>
               </a:rPr>
@@ -5738,7 +5738,7 @@
             <a:r>
               <a:rPr sz="1100" b="0" i="0">
                 <a:solidFill>
-                  <a:srgbClr val="647480"/>
+                  <a:srgbClr val="64748B"/>
                 </a:solidFill>
                 <a:latin typeface="Calibri"/>
               </a:rPr>
@@ -5773,7 +5773,7 @@
             <a:r>
               <a:rPr sz="2200" b="0" i="0">
                 <a:solidFill>
-                  <a:srgbClr val="1F2A33"/>
+                  <a:srgbClr val="1F2937"/>
                 </a:solidFill>
                 <a:latin typeface="Calibri"/>
               </a:rPr>
@@ -5808,7 +5808,7 @@
             <a:r>
               <a:rPr sz="1400" b="1" i="0">
                 <a:solidFill>
-                  <a:srgbClr val="0F3E4C"/>
+                  <a:srgbClr val="1E1B4B"/>
                 </a:solidFill>
                 <a:latin typeface="Calibri"/>
               </a:rPr>
@@ -5843,7 +5843,7 @@
             <a:r>
               <a:rPr sz="1100" b="0" i="0">
                 <a:solidFill>
-                  <a:srgbClr val="647480"/>
+                  <a:srgbClr val="64748B"/>
                 </a:solidFill>
                 <a:latin typeface="Calibri"/>
               </a:rPr>
@@ -5878,7 +5878,7 @@
             <a:r>
               <a:rPr sz="2200" b="0" i="0">
                 <a:solidFill>
-                  <a:srgbClr val="1F2A33"/>
+                  <a:srgbClr val="1F2937"/>
                 </a:solidFill>
                 <a:latin typeface="Calibri"/>
               </a:rPr>
@@ -5913,7 +5913,7 @@
             <a:r>
               <a:rPr sz="1400" b="1" i="0">
                 <a:solidFill>
-                  <a:srgbClr val="0F3E4C"/>
+                  <a:srgbClr val="1E1B4B"/>
                 </a:solidFill>
                 <a:latin typeface="Calibri"/>
               </a:rPr>
@@ -5948,7 +5948,7 @@
             <a:r>
               <a:rPr sz="1100" b="0" i="0">
                 <a:solidFill>
-                  <a:srgbClr val="647480"/>
+                  <a:srgbClr val="64748B"/>
                 </a:solidFill>
                 <a:latin typeface="Calibri"/>
               </a:rPr>
@@ -5983,7 +5983,7 @@
             <a:r>
               <a:rPr sz="2200" b="0" i="0">
                 <a:solidFill>
-                  <a:srgbClr val="1F2A33"/>
+                  <a:srgbClr val="1F2937"/>
                 </a:solidFill>
                 <a:latin typeface="Calibri"/>
               </a:rPr>
@@ -6018,7 +6018,7 @@
             <a:r>
               <a:rPr sz="1400" b="1" i="0">
                 <a:solidFill>
-                  <a:srgbClr val="0F3E4C"/>
+                  <a:srgbClr val="1E1B4B"/>
                 </a:solidFill>
                 <a:latin typeface="Calibri"/>
               </a:rPr>
@@ -6053,7 +6053,7 @@
             <a:r>
               <a:rPr sz="1100" b="0" i="0">
                 <a:solidFill>
-                  <a:srgbClr val="647480"/>
+                  <a:srgbClr val="64748B"/>
                 </a:solidFill>
                 <a:latin typeface="Calibri"/>
               </a:rPr>
@@ -6088,7 +6088,7 @@
             <a:r>
               <a:rPr sz="2200" b="0" i="0">
                 <a:solidFill>
-                  <a:srgbClr val="1F2A33"/>
+                  <a:srgbClr val="1F2937"/>
                 </a:solidFill>
                 <a:latin typeface="Calibri"/>
               </a:rPr>
@@ -6123,7 +6123,7 @@
             <a:r>
               <a:rPr sz="1400" b="1" i="0">
                 <a:solidFill>
-                  <a:srgbClr val="0F3E4C"/>
+                  <a:srgbClr val="1E1B4B"/>
                 </a:solidFill>
                 <a:latin typeface="Calibri"/>
               </a:rPr>
@@ -6158,7 +6158,7 @@
             <a:r>
               <a:rPr sz="1100" b="0" i="0">
                 <a:solidFill>
-                  <a:srgbClr val="647480"/>
+                  <a:srgbClr val="64748B"/>
                 </a:solidFill>
                 <a:latin typeface="Calibri"/>
               </a:rPr>
@@ -6193,7 +6193,7 @@
             <a:r>
               <a:rPr sz="2200" b="0" i="0">
                 <a:solidFill>
-                  <a:srgbClr val="1F2A33"/>
+                  <a:srgbClr val="1F2937"/>
                 </a:solidFill>
                 <a:latin typeface="Calibri"/>
               </a:rPr>
@@ -6228,11 +6228,11 @@
             <a:r>
               <a:rPr sz="1400" b="1" i="0">
                 <a:solidFill>
-                  <a:srgbClr val="0F3E4C"/>
-                </a:solidFill>
-                <a:latin typeface="Calibri"/>
-              </a:rPr>
-              <a:t>Kahoot en vivo</a:t>
+                  <a:srgbClr val="1E1B4B"/>
+                </a:solidFill>
+                <a:latin typeface="Calibri"/>
+              </a:rPr>
+              <a:t>Reto en vivo</a:t>
             </a:r>
           </a:p>
         </p:txBody>
@@ -6263,7 +6263,7 @@
             <a:r>
               <a:rPr sz="1100" b="0" i="0">
                 <a:solidFill>
-                  <a:srgbClr val="647480"/>
+                  <a:srgbClr val="64748B"/>
                 </a:solidFill>
                 <a:latin typeface="Calibri"/>
               </a:rPr>
@@ -6298,7 +6298,7 @@
             <a:r>
               <a:rPr sz="2200" b="0" i="0">
                 <a:solidFill>
-                  <a:srgbClr val="1F2A33"/>
+                  <a:srgbClr val="1F2937"/>
                 </a:solidFill>
                 <a:latin typeface="Calibri"/>
               </a:rPr>
@@ -6333,7 +6333,7 @@
             <a:r>
               <a:rPr sz="1400" b="1" i="0">
                 <a:solidFill>
-                  <a:srgbClr val="0F3E4C"/>
+                  <a:srgbClr val="1E1B4B"/>
                 </a:solidFill>
                 <a:latin typeface="Calibri"/>
               </a:rPr>
@@ -6368,7 +6368,7 @@
             <a:r>
               <a:rPr sz="1100" b="0" i="0">
                 <a:solidFill>
-                  <a:srgbClr val="647480"/>
+                  <a:srgbClr val="64748B"/>
                 </a:solidFill>
                 <a:latin typeface="Calibri"/>
               </a:rPr>
@@ -6403,7 +6403,7 @@
             <a:r>
               <a:rPr sz="2200" b="0" i="0">
                 <a:solidFill>
-                  <a:srgbClr val="1F2A33"/>
+                  <a:srgbClr val="1F2937"/>
                 </a:solidFill>
                 <a:latin typeface="Calibri"/>
               </a:rPr>
@@ -6438,7 +6438,7 @@
             <a:r>
               <a:rPr sz="1400" b="1" i="0">
                 <a:solidFill>
-                  <a:srgbClr val="0F3E4C"/>
+                  <a:srgbClr val="1E1B4B"/>
                 </a:solidFill>
                 <a:latin typeface="Calibri"/>
               </a:rPr>
@@ -6473,7 +6473,7 @@
             <a:r>
               <a:rPr sz="1100" b="0" i="0">
                 <a:solidFill>
-                  <a:srgbClr val="647480"/>
+                  <a:srgbClr val="64748B"/>
                 </a:solidFill>
                 <a:latin typeface="Calibri"/>
               </a:rPr>
@@ -6508,7 +6508,7 @@
             <a:r>
               <a:rPr sz="2200" b="0" i="0">
                 <a:solidFill>
-                  <a:srgbClr val="1F2A33"/>
+                  <a:srgbClr val="1F2937"/>
                 </a:solidFill>
                 <a:latin typeface="Calibri"/>
               </a:rPr>
@@ -6543,7 +6543,7 @@
             <a:r>
               <a:rPr sz="1400" b="1" i="0">
                 <a:solidFill>
-                  <a:srgbClr val="0F3E4C"/>
+                  <a:srgbClr val="1E1B4B"/>
                 </a:solidFill>
                 <a:latin typeface="Calibri"/>
               </a:rPr>
@@ -6578,7 +6578,7 @@
             <a:r>
               <a:rPr sz="1100" b="0" i="0">
                 <a:solidFill>
-                  <a:srgbClr val="647480"/>
+                  <a:srgbClr val="64748B"/>
                 </a:solidFill>
                 <a:latin typeface="Calibri"/>
               </a:rPr>
@@ -6613,7 +6613,7 @@
             <a:r>
               <a:rPr sz="900" b="0" i="0">
                 <a:solidFill>
-                  <a:srgbClr val="647480"/>
+                  <a:srgbClr val="64748B"/>
                 </a:solidFill>
                 <a:latin typeface="Calibri"/>
               </a:rPr>
@@ -6648,7 +6648,7 @@
             <a:r>
               <a:rPr sz="900" b="0" i="0">
                 <a:solidFill>
-                  <a:srgbClr val="647480"/>
+                  <a:srgbClr val="64748B"/>
                 </a:solidFill>
                 <a:latin typeface="Calibri"/>
               </a:rPr>
@@ -6701,7 +6701,7 @@
             <a:r>
               <a:rPr sz="1100" b="1" i="0">
                 <a:solidFill>
-                  <a:srgbClr val="147A8C"/>
+                  <a:srgbClr val="4F46E5"/>
                 </a:solidFill>
                 <a:latin typeface="Calibri"/>
               </a:rPr>
@@ -6736,7 +6736,7 @@
             <a:r>
               <a:rPr sz="2800" b="1" i="0">
                 <a:solidFill>
-                  <a:srgbClr val="0F3E4C"/>
+                  <a:srgbClr val="1E1B4B"/>
                 </a:solidFill>
                 <a:latin typeface="Calibri"/>
               </a:rPr>
@@ -6771,7 +6771,7 @@
             <a:r>
               <a:rPr sz="1300" b="0" i="0">
                 <a:solidFill>
-                  <a:srgbClr val="647480"/>
+                  <a:srgbClr val="64748B"/>
                 </a:solidFill>
                 <a:latin typeface="Calibri"/>
               </a:rPr>
@@ -6854,7 +6854,7 @@
             <a:r>
               <a:rPr sz="2600" b="1" i="0">
                 <a:solidFill>
-                  <a:srgbClr val="0F3E4C"/>
+                  <a:srgbClr val="1E1B4B"/>
                 </a:solidFill>
                 <a:latin typeface="Calibri"/>
               </a:rPr>
@@ -6889,7 +6889,7 @@
             <a:r>
               <a:rPr sz="1200" b="0" i="0">
                 <a:solidFill>
-                  <a:srgbClr val="647480"/>
+                  <a:srgbClr val="64748B"/>
                 </a:solidFill>
                 <a:latin typeface="Calibri"/>
               </a:rPr>
@@ -6959,7 +6959,7 @@
             <a:r>
               <a:rPr sz="1200" b="0" i="0">
                 <a:solidFill>
-                  <a:srgbClr val="647480"/>
+                  <a:srgbClr val="64748B"/>
                 </a:solidFill>
                 <a:latin typeface="Calibri"/>
               </a:rPr>
@@ -7029,7 +7029,7 @@
             <a:r>
               <a:rPr sz="1000" b="0" i="0">
                 <a:solidFill>
-                  <a:srgbClr val="647480"/>
+                  <a:srgbClr val="64748B"/>
                 </a:solidFill>
                 <a:latin typeface="Calibri"/>
               </a:rPr>
@@ -7064,7 +7064,7 @@
             <a:r>
               <a:rPr sz="2000" b="1" i="0">
                 <a:solidFill>
-                  <a:srgbClr val="0F3E4C"/>
+                  <a:srgbClr val="1E1B4B"/>
                 </a:solidFill>
                 <a:latin typeface="Calibri"/>
               </a:rPr>
@@ -7099,7 +7099,7 @@
             <a:r>
               <a:rPr sz="1200" b="1" i="0">
                 <a:solidFill>
-                  <a:srgbClr val="1F8F4F"/>
+                  <a:srgbClr val="059669"/>
                 </a:solidFill>
                 <a:latin typeface="Calibri"/>
               </a:rPr>
@@ -7134,7 +7134,7 @@
             <a:r>
               <a:rPr sz="1000" b="0" i="0">
                 <a:solidFill>
-                  <a:srgbClr val="1F2A33"/>
+                  <a:srgbClr val="1F2937"/>
                 </a:solidFill>
                 <a:latin typeface="Calibri"/>
               </a:rPr>
@@ -7169,7 +7169,7 @@
             <a:r>
               <a:rPr sz="1200" b="1" i="0">
                 <a:solidFill>
-                  <a:srgbClr val="1F8F4F"/>
+                  <a:srgbClr val="059669"/>
                 </a:solidFill>
                 <a:latin typeface="Calibri"/>
               </a:rPr>
@@ -7204,7 +7204,7 @@
             <a:r>
               <a:rPr sz="1000" b="0" i="0">
                 <a:solidFill>
-                  <a:srgbClr val="1F2A33"/>
+                  <a:srgbClr val="1F2937"/>
                 </a:solidFill>
                 <a:latin typeface="Calibri"/>
               </a:rPr>
@@ -7239,7 +7239,7 @@
             <a:r>
               <a:rPr sz="1200" b="1" i="0">
                 <a:solidFill>
-                  <a:srgbClr val="1F8F4F"/>
+                  <a:srgbClr val="059669"/>
                 </a:solidFill>
                 <a:latin typeface="Calibri"/>
               </a:rPr>
@@ -7274,7 +7274,7 @@
             <a:r>
               <a:rPr sz="1000" b="0" i="0">
                 <a:solidFill>
-                  <a:srgbClr val="1F2A33"/>
+                  <a:srgbClr val="1F2937"/>
                 </a:solidFill>
                 <a:latin typeface="Calibri"/>
               </a:rPr>
@@ -7438,7 +7438,7 @@
             <a:r>
               <a:rPr sz="2600" b="1" i="0">
                 <a:solidFill>
-                  <a:srgbClr val="0F3E4C"/>
+                  <a:srgbClr val="1E1B4B"/>
                 </a:solidFill>
                 <a:latin typeface="Calibri"/>
               </a:rPr>
@@ -7473,7 +7473,7 @@
             <a:r>
               <a:rPr sz="1200" b="0" i="0">
                 <a:solidFill>
-                  <a:srgbClr val="647480"/>
+                  <a:srgbClr val="64748B"/>
                 </a:solidFill>
                 <a:latin typeface="Calibri"/>
               </a:rPr>
@@ -7543,7 +7543,7 @@
             <a:r>
               <a:rPr sz="1200" b="0" i="0">
                 <a:solidFill>
-                  <a:srgbClr val="647480"/>
+                  <a:srgbClr val="64748B"/>
                 </a:solidFill>
                 <a:latin typeface="Calibri"/>
               </a:rPr>
@@ -7613,7 +7613,7 @@
             <a:r>
               <a:rPr sz="1000" b="0" i="0">
                 <a:solidFill>
-                  <a:srgbClr val="647480"/>
+                  <a:srgbClr val="64748B"/>
                 </a:solidFill>
                 <a:latin typeface="Calibri"/>
               </a:rPr>
@@ -7648,7 +7648,7 @@
             <a:r>
               <a:rPr sz="2000" b="1" i="0">
                 <a:solidFill>
-                  <a:srgbClr val="0F3E4C"/>
+                  <a:srgbClr val="1E1B4B"/>
                 </a:solidFill>
                 <a:latin typeface="Calibri"/>
               </a:rPr>
@@ -7683,7 +7683,7 @@
             <a:r>
               <a:rPr sz="1200" b="1" i="0">
                 <a:solidFill>
-                  <a:srgbClr val="1F8F4F"/>
+                  <a:srgbClr val="059669"/>
                 </a:solidFill>
                 <a:latin typeface="Calibri"/>
               </a:rPr>
@@ -7718,7 +7718,7 @@
             <a:r>
               <a:rPr sz="1000" b="0" i="0">
                 <a:solidFill>
-                  <a:srgbClr val="1F2A33"/>
+                  <a:srgbClr val="1F2937"/>
                 </a:solidFill>
                 <a:latin typeface="Calibri"/>
               </a:rPr>
@@ -7753,7 +7753,7 @@
             <a:r>
               <a:rPr sz="1200" b="1" i="0">
                 <a:solidFill>
-                  <a:srgbClr val="1F8F4F"/>
+                  <a:srgbClr val="059669"/>
                 </a:solidFill>
                 <a:latin typeface="Calibri"/>
               </a:rPr>
@@ -7788,7 +7788,7 @@
             <a:r>
               <a:rPr sz="1000" b="0" i="0">
                 <a:solidFill>
-                  <a:srgbClr val="1F2A33"/>
+                  <a:srgbClr val="1F2937"/>
                 </a:solidFill>
                 <a:latin typeface="Calibri"/>
               </a:rPr>
@@ -7823,7 +7823,7 @@
             <a:r>
               <a:rPr sz="1200" b="1" i="0">
                 <a:solidFill>
-                  <a:srgbClr val="1F8F4F"/>
+                  <a:srgbClr val="059669"/>
                 </a:solidFill>
                 <a:latin typeface="Calibri"/>
               </a:rPr>
@@ -7858,7 +7858,7 @@
             <a:r>
               <a:rPr sz="1000" b="0" i="0">
                 <a:solidFill>
-                  <a:srgbClr val="1F2A33"/>
+                  <a:srgbClr val="1F2937"/>
                 </a:solidFill>
                 <a:latin typeface="Calibri"/>
               </a:rPr>
@@ -7941,7 +7941,7 @@
             <a:r>
               <a:rPr sz="2600" b="1" i="0">
                 <a:solidFill>
-                  <a:srgbClr val="0F3E4C"/>
+                  <a:srgbClr val="1E1B4B"/>
                 </a:solidFill>
                 <a:latin typeface="Calibri"/>
               </a:rPr>
@@ -7976,7 +7976,7 @@
             <a:r>
               <a:rPr sz="1200" b="0" i="0">
                 <a:solidFill>
-                  <a:srgbClr val="647480"/>
+                  <a:srgbClr val="64748B"/>
                 </a:solidFill>
                 <a:latin typeface="Calibri"/>
               </a:rPr>
@@ -8046,7 +8046,7 @@
             <a:r>
               <a:rPr sz="1200" b="0" i="0">
                 <a:solidFill>
-                  <a:srgbClr val="647480"/>
+                  <a:srgbClr val="64748B"/>
                 </a:solidFill>
                 <a:latin typeface="Calibri"/>
               </a:rPr>
@@ -8116,7 +8116,7 @@
             <a:r>
               <a:rPr sz="1000" b="0" i="0">
                 <a:solidFill>
-                  <a:srgbClr val="647480"/>
+                  <a:srgbClr val="64748B"/>
                 </a:solidFill>
                 <a:latin typeface="Calibri"/>
               </a:rPr>
@@ -8151,7 +8151,7 @@
             <a:r>
               <a:rPr sz="2000" b="1" i="0">
                 <a:solidFill>
-                  <a:srgbClr val="0F3E4C"/>
+                  <a:srgbClr val="1E1B4B"/>
                 </a:solidFill>
                 <a:latin typeface="Calibri"/>
               </a:rPr>
@@ -8186,7 +8186,7 @@
             <a:r>
               <a:rPr sz="1200" b="1" i="0">
                 <a:solidFill>
-                  <a:srgbClr val="1F8F4F"/>
+                  <a:srgbClr val="059669"/>
                 </a:solidFill>
                 <a:latin typeface="Calibri"/>
               </a:rPr>
@@ -8221,7 +8221,7 @@
             <a:r>
               <a:rPr sz="1000" b="0" i="0">
                 <a:solidFill>
-                  <a:srgbClr val="1F2A33"/>
+                  <a:srgbClr val="1F2937"/>
                 </a:solidFill>
                 <a:latin typeface="Calibri"/>
               </a:rPr>
@@ -8256,7 +8256,7 @@
             <a:r>
               <a:rPr sz="1200" b="1" i="0">
                 <a:solidFill>
-                  <a:srgbClr val="1F8F4F"/>
+                  <a:srgbClr val="059669"/>
                 </a:solidFill>
                 <a:latin typeface="Calibri"/>
               </a:rPr>
@@ -8291,7 +8291,7 @@
             <a:r>
               <a:rPr sz="1000" b="0" i="0">
                 <a:solidFill>
-                  <a:srgbClr val="1F2A33"/>
+                  <a:srgbClr val="1F2937"/>
                 </a:solidFill>
                 <a:latin typeface="Calibri"/>
               </a:rPr>
@@ -8326,7 +8326,7 @@
             <a:r>
               <a:rPr sz="1200" b="1" i="0">
                 <a:solidFill>
-                  <a:srgbClr val="1F8F4F"/>
+                  <a:srgbClr val="059669"/>
                 </a:solidFill>
                 <a:latin typeface="Calibri"/>
               </a:rPr>
@@ -8361,7 +8361,7 @@
             <a:r>
               <a:rPr sz="1000" b="0" i="0">
                 <a:solidFill>
-                  <a:srgbClr val="1F2A33"/>
+                  <a:srgbClr val="1F2937"/>
                 </a:solidFill>
                 <a:latin typeface="Calibri"/>
               </a:rPr>
@@ -8396,7 +8396,7 @@
             <a:r>
               <a:rPr sz="1000" b="0" i="1">
                 <a:solidFill>
-                  <a:srgbClr val="0F3E4C"/>
+                  <a:srgbClr val="1E1B4B"/>
                 </a:solidFill>
                 <a:latin typeface="Calibri"/>
               </a:rPr>
@@ -8449,7 +8449,7 @@
             <a:r>
               <a:rPr sz="1100" b="1" i="0">
                 <a:solidFill>
-                  <a:srgbClr val="147A8C"/>
+                  <a:srgbClr val="4F46E5"/>
                 </a:solidFill>
                 <a:latin typeface="Calibri"/>
               </a:rPr>
@@ -8484,7 +8484,7 @@
             <a:r>
               <a:rPr sz="2800" b="1" i="0">
                 <a:solidFill>
-                  <a:srgbClr val="0F3E4C"/>
+                  <a:srgbClr val="1E1B4B"/>
                 </a:solidFill>
                 <a:latin typeface="Calibri"/>
               </a:rPr>
@@ -8519,7 +8519,7 @@
             <a:r>
               <a:rPr sz="1300" b="0" i="0">
                 <a:solidFill>
-                  <a:srgbClr val="647480"/>
+                  <a:srgbClr val="64748B"/>
                 </a:solidFill>
                 <a:latin typeface="Calibri"/>
               </a:rPr>
@@ -8545,11 +8545,11 @@
             </a:avLst>
           </a:prstGeom>
           <a:solidFill>
-            <a:srgbClr val="F4F8FA"/>
+            <a:srgbClr val="EEF2FF"/>
           </a:solidFill>
           <a:ln w="19050">
             <a:solidFill>
-              <a:srgbClr val="147A8C"/>
+              <a:srgbClr val="4F46E5"/>
             </a:solidFill>
           </a:ln>
           <a:effectLst/>
@@ -8602,7 +8602,7 @@
             <a:r>
               <a:rPr sz="1500" b="1" i="0">
                 <a:solidFill>
-                  <a:srgbClr val="647480"/>
+                  <a:srgbClr val="64748B"/>
                 </a:solidFill>
                 <a:latin typeface="Calibri"/>
               </a:rPr>
@@ -8637,7 +8637,7 @@
             <a:r>
               <a:rPr sz="4000" b="1" i="0">
                 <a:solidFill>
-                  <a:srgbClr val="147A8C"/>
+                  <a:srgbClr val="4F46E5"/>
                 </a:solidFill>
                 <a:latin typeface="Calibri"/>
               </a:rPr>
@@ -8672,7 +8672,7 @@
             <a:r>
               <a:rPr sz="1100" b="0" i="0">
                 <a:solidFill>
-                  <a:srgbClr val="1F2A33"/>
+                  <a:srgbClr val="1F2937"/>
                 </a:solidFill>
                 <a:latin typeface="Calibri"/>
               </a:rPr>
@@ -8698,7 +8698,7 @@
             </a:avLst>
           </a:prstGeom>
           <a:solidFill>
-            <a:srgbClr val="F4F8FA"/>
+            <a:srgbClr val="EEF2FF"/>
           </a:solidFill>
           <a:ln w="19050">
             <a:solidFill>
@@ -8755,7 +8755,7 @@
             <a:r>
               <a:rPr sz="1500" b="1" i="0">
                 <a:solidFill>
-                  <a:srgbClr val="647480"/>
+                  <a:srgbClr val="64748B"/>
                 </a:solidFill>
                 <a:latin typeface="Calibri"/>
               </a:rPr>
@@ -8825,7 +8825,7 @@
             <a:r>
               <a:rPr sz="1100" b="0" i="0">
                 <a:solidFill>
-                  <a:srgbClr val="1F2A33"/>
+                  <a:srgbClr val="1F2937"/>
                 </a:solidFill>
                 <a:latin typeface="Calibri"/>
               </a:rPr>
@@ -8851,11 +8851,11 @@
             </a:avLst>
           </a:prstGeom>
           <a:solidFill>
-            <a:srgbClr val="F4F8FA"/>
+            <a:srgbClr val="EEF2FF"/>
           </a:solidFill>
           <a:ln w="19050">
             <a:solidFill>
-              <a:srgbClr val="0F3E4C"/>
+              <a:srgbClr val="1E1B4B"/>
             </a:solidFill>
           </a:ln>
           <a:effectLst/>
@@ -8908,7 +8908,7 @@
             <a:r>
               <a:rPr sz="1500" b="1" i="0">
                 <a:solidFill>
-                  <a:srgbClr val="647480"/>
+                  <a:srgbClr val="64748B"/>
                 </a:solidFill>
                 <a:latin typeface="Calibri"/>
               </a:rPr>
@@ -8943,7 +8943,7 @@
             <a:r>
               <a:rPr sz="4000" b="1" i="0">
                 <a:solidFill>
-                  <a:srgbClr val="0F3E4C"/>
+                  <a:srgbClr val="1E1B4B"/>
                 </a:solidFill>
                 <a:latin typeface="Calibri"/>
               </a:rPr>
@@ -8978,7 +8978,7 @@
             <a:r>
               <a:rPr sz="1100" b="0" i="0">
                 <a:solidFill>
-                  <a:srgbClr val="1F2A33"/>
+                  <a:srgbClr val="1F2937"/>
                 </a:solidFill>
                 <a:latin typeface="Calibri"/>
               </a:rPr>
@@ -9008,7 +9008,7 @@
           </a:solidFill>
           <a:ln w="19050">
             <a:solidFill>
-              <a:srgbClr val="2EB8C7"/>
+              <a:srgbClr val="7C3AED"/>
             </a:solidFill>
           </a:ln>
           <a:effectLst/>
@@ -9061,7 +9061,7 @@
             <a:r>
               <a:rPr sz="1500" b="1" i="0">
                 <a:solidFill>
-                  <a:srgbClr val="0F3E4C"/>
+                  <a:srgbClr val="1E1B4B"/>
                 </a:solidFill>
                 <a:latin typeface="Calibri"/>
               </a:rPr>
@@ -9096,7 +9096,7 @@
             <a:r>
               <a:rPr sz="1100" b="0" i="0">
                 <a:solidFill>
-                  <a:srgbClr val="1F2A33"/>
+                  <a:srgbClr val="1F2937"/>
                 </a:solidFill>
                 <a:latin typeface="Calibri"/>
               </a:rPr>
@@ -9131,7 +9131,7 @@
             <a:r>
               <a:rPr sz="900" b="0" i="0">
                 <a:solidFill>
-                  <a:srgbClr val="647480"/>
+                  <a:srgbClr val="64748B"/>
                 </a:solidFill>
                 <a:latin typeface="Calibri"/>
               </a:rPr>
@@ -9166,7 +9166,7 @@
             <a:r>
               <a:rPr sz="900" b="0" i="0">
                 <a:solidFill>
-                  <a:srgbClr val="647480"/>
+                  <a:srgbClr val="64748B"/>
                 </a:solidFill>
                 <a:latin typeface="Calibri"/>
               </a:rPr>
@@ -9219,7 +9219,7 @@
             <a:r>
               <a:rPr sz="1100" b="1" i="0">
                 <a:solidFill>
-                  <a:srgbClr val="147A8C"/>
+                  <a:srgbClr val="4F46E5"/>
                 </a:solidFill>
                 <a:latin typeface="Calibri"/>
               </a:rPr>
@@ -9254,7 +9254,7 @@
             <a:r>
               <a:rPr sz="2800" b="1" i="0">
                 <a:solidFill>
-                  <a:srgbClr val="0F3E4C"/>
+                  <a:srgbClr val="1E1B4B"/>
                 </a:solidFill>
                 <a:latin typeface="Calibri"/>
               </a:rPr>
@@ -9289,7 +9289,7 @@
             <a:r>
               <a:rPr sz="1300" b="0" i="0">
                 <a:solidFill>
-                  <a:srgbClr val="647480"/>
+                  <a:srgbClr val="64748B"/>
                 </a:solidFill>
                 <a:latin typeface="Calibri"/>
               </a:rPr>
@@ -9324,7 +9324,7 @@
             <a:r>
               <a:rPr sz="1400" b="1" i="0">
                 <a:solidFill>
-                  <a:srgbClr val="1F8F4F"/>
+                  <a:srgbClr val="059669"/>
                 </a:solidFill>
                 <a:latin typeface="Calibri"/>
               </a:rPr>
@@ -9359,7 +9359,7 @@
             <a:r>
               <a:rPr sz="1100" b="0" i="0">
                 <a:solidFill>
-                  <a:srgbClr val="1F2A33"/>
+                  <a:srgbClr val="1F2937"/>
                 </a:solidFill>
                 <a:latin typeface="Calibri"/>
               </a:rPr>
@@ -9394,7 +9394,7 @@
             <a:r>
               <a:rPr sz="1400" b="1" i="0">
                 <a:solidFill>
-                  <a:srgbClr val="1F8F4F"/>
+                  <a:srgbClr val="059669"/>
                 </a:solidFill>
                 <a:latin typeface="Calibri"/>
               </a:rPr>
@@ -9429,7 +9429,7 @@
             <a:r>
               <a:rPr sz="1100" b="0" i="0">
                 <a:solidFill>
-                  <a:srgbClr val="1F2A33"/>
+                  <a:srgbClr val="1F2937"/>
                 </a:solidFill>
                 <a:latin typeface="Calibri"/>
               </a:rPr>
@@ -9464,7 +9464,7 @@
             <a:r>
               <a:rPr sz="1400" b="1" i="0">
                 <a:solidFill>
-                  <a:srgbClr val="1F8F4F"/>
+                  <a:srgbClr val="059669"/>
                 </a:solidFill>
                 <a:latin typeface="Calibri"/>
               </a:rPr>
@@ -9499,7 +9499,7 @@
             <a:r>
               <a:rPr sz="1100" b="0" i="0">
                 <a:solidFill>
-                  <a:srgbClr val="1F2A33"/>
+                  <a:srgbClr val="1F2937"/>
                 </a:solidFill>
                 <a:latin typeface="Calibri"/>
               </a:rPr>
@@ -9534,7 +9534,7 @@
             <a:r>
               <a:rPr sz="1400" b="1" i="0">
                 <a:solidFill>
-                  <a:srgbClr val="1F8F4F"/>
+                  <a:srgbClr val="059669"/>
                 </a:solidFill>
                 <a:latin typeface="Calibri"/>
               </a:rPr>
@@ -9569,7 +9569,7 @@
             <a:r>
               <a:rPr sz="1100" b="0" i="0">
                 <a:solidFill>
-                  <a:srgbClr val="1F2A33"/>
+                  <a:srgbClr val="1F2937"/>
                 </a:solidFill>
                 <a:latin typeface="Calibri"/>
               </a:rPr>
@@ -9604,7 +9604,7 @@
             <a:r>
               <a:rPr sz="1400" b="1" i="0">
                 <a:solidFill>
-                  <a:srgbClr val="1F8F4F"/>
+                  <a:srgbClr val="059669"/>
                 </a:solidFill>
                 <a:latin typeface="Calibri"/>
               </a:rPr>
@@ -9639,7 +9639,7 @@
             <a:r>
               <a:rPr sz="1100" b="0" i="0">
                 <a:solidFill>
-                  <a:srgbClr val="1F2A33"/>
+                  <a:srgbClr val="1F2937"/>
                 </a:solidFill>
                 <a:latin typeface="Calibri"/>
               </a:rPr>
@@ -9674,7 +9674,7 @@
             <a:r>
               <a:rPr sz="1400" b="1" i="0">
                 <a:solidFill>
-                  <a:srgbClr val="1F8F4F"/>
+                  <a:srgbClr val="059669"/>
                 </a:solidFill>
                 <a:latin typeface="Calibri"/>
               </a:rPr>
@@ -9709,7 +9709,7 @@
             <a:r>
               <a:rPr sz="1100" b="0" i="0">
                 <a:solidFill>
-                  <a:srgbClr val="1F2A33"/>
+                  <a:srgbClr val="1F2937"/>
                 </a:solidFill>
                 <a:latin typeface="Calibri"/>
               </a:rPr>
@@ -9744,7 +9744,7 @@
             <a:r>
               <a:rPr sz="1400" b="1" i="0">
                 <a:solidFill>
-                  <a:srgbClr val="1F8F4F"/>
+                  <a:srgbClr val="059669"/>
                 </a:solidFill>
                 <a:latin typeface="Calibri"/>
               </a:rPr>
@@ -9779,7 +9779,7 @@
             <a:r>
               <a:rPr sz="1100" b="0" i="0">
                 <a:solidFill>
-                  <a:srgbClr val="1F2A33"/>
+                  <a:srgbClr val="1F2937"/>
                 </a:solidFill>
                 <a:latin typeface="Calibri"/>
               </a:rPr>
@@ -9814,7 +9814,7 @@
             <a:r>
               <a:rPr sz="1400" b="1" i="0">
                 <a:solidFill>
-                  <a:srgbClr val="1F8F4F"/>
+                  <a:srgbClr val="059669"/>
                 </a:solidFill>
                 <a:latin typeface="Calibri"/>
               </a:rPr>
@@ -9849,7 +9849,7 @@
             <a:r>
               <a:rPr sz="1100" b="0" i="0">
                 <a:solidFill>
-                  <a:srgbClr val="1F2A33"/>
+                  <a:srgbClr val="1F2937"/>
                 </a:solidFill>
                 <a:latin typeface="Calibri"/>
               </a:rPr>
@@ -9884,7 +9884,7 @@
             <a:r>
               <a:rPr sz="1400" b="1" i="0">
                 <a:solidFill>
-                  <a:srgbClr val="1F8F4F"/>
+                  <a:srgbClr val="059669"/>
                 </a:solidFill>
                 <a:latin typeface="Calibri"/>
               </a:rPr>
@@ -9919,7 +9919,7 @@
             <a:r>
               <a:rPr sz="1100" b="0" i="0">
                 <a:solidFill>
-                  <a:srgbClr val="1F2A33"/>
+                  <a:srgbClr val="1F2937"/>
                 </a:solidFill>
                 <a:latin typeface="Calibri"/>
               </a:rPr>
@@ -9954,7 +9954,7 @@
             <a:r>
               <a:rPr sz="1400" b="1" i="0">
                 <a:solidFill>
-                  <a:srgbClr val="1F8F4F"/>
+                  <a:srgbClr val="059669"/>
                 </a:solidFill>
                 <a:latin typeface="Calibri"/>
               </a:rPr>
@@ -9989,7 +9989,7 @@
             <a:r>
               <a:rPr sz="1100" b="0" i="0">
                 <a:solidFill>
-                  <a:srgbClr val="1F2A33"/>
+                  <a:srgbClr val="1F2937"/>
                 </a:solidFill>
                 <a:latin typeface="Calibri"/>
               </a:rPr>
@@ -10024,7 +10024,7 @@
             <a:r>
               <a:rPr sz="1400" b="1" i="0">
                 <a:solidFill>
-                  <a:srgbClr val="1F8F4F"/>
+                  <a:srgbClr val="059669"/>
                 </a:solidFill>
                 <a:latin typeface="Calibri"/>
               </a:rPr>
@@ -10059,7 +10059,7 @@
             <a:r>
               <a:rPr sz="1100" b="0" i="0">
                 <a:solidFill>
-                  <a:srgbClr val="1F2A33"/>
+                  <a:srgbClr val="1F2937"/>
                 </a:solidFill>
                 <a:latin typeface="Calibri"/>
               </a:rPr>
@@ -10094,7 +10094,7 @@
             <a:r>
               <a:rPr sz="1400" b="1" i="0">
                 <a:solidFill>
-                  <a:srgbClr val="1F8F4F"/>
+                  <a:srgbClr val="059669"/>
                 </a:solidFill>
                 <a:latin typeface="Calibri"/>
               </a:rPr>
@@ -10129,11 +10129,11 @@
             <a:r>
               <a:rPr sz="1100" b="0" i="0">
                 <a:solidFill>
-                  <a:srgbClr val="1F2A33"/>
-                </a:solidFill>
-                <a:latin typeface="Calibri"/>
-              </a:rPr>
-              <a:t>Encuestas + Kahoot en vivo con PIN</a:t>
+                  <a:srgbClr val="1F2937"/>
+                </a:solidFill>
+                <a:latin typeface="Calibri"/>
+              </a:rPr>
+              <a:t>Encuestas + Reto en vivo con PIN</a:t>
             </a:r>
           </a:p>
         </p:txBody>
@@ -10164,7 +10164,7 @@
             <a:r>
               <a:rPr sz="1400" b="1" i="0">
                 <a:solidFill>
-                  <a:srgbClr val="1F8F4F"/>
+                  <a:srgbClr val="059669"/>
                 </a:solidFill>
                 <a:latin typeface="Calibri"/>
               </a:rPr>
@@ -10199,7 +10199,7 @@
             <a:r>
               <a:rPr sz="1100" b="0" i="0">
                 <a:solidFill>
-                  <a:srgbClr val="1F2A33"/>
+                  <a:srgbClr val="1F2937"/>
                 </a:solidFill>
                 <a:latin typeface="Calibri"/>
               </a:rPr>
@@ -10234,7 +10234,7 @@
             <a:r>
               <a:rPr sz="1400" b="1" i="0">
                 <a:solidFill>
-                  <a:srgbClr val="1F8F4F"/>
+                  <a:srgbClr val="059669"/>
                 </a:solidFill>
                 <a:latin typeface="Calibri"/>
               </a:rPr>
@@ -10269,7 +10269,7 @@
             <a:r>
               <a:rPr sz="1100" b="0" i="0">
                 <a:solidFill>
-                  <a:srgbClr val="1F2A33"/>
+                  <a:srgbClr val="1F2937"/>
                 </a:solidFill>
                 <a:latin typeface="Calibri"/>
               </a:rPr>
@@ -10304,7 +10304,7 @@
             <a:r>
               <a:rPr sz="1400" b="1" i="0">
                 <a:solidFill>
-                  <a:srgbClr val="1F8F4F"/>
+                  <a:srgbClr val="059669"/>
                 </a:solidFill>
                 <a:latin typeface="Calibri"/>
               </a:rPr>
@@ -10339,7 +10339,7 @@
             <a:r>
               <a:rPr sz="1100" b="0" i="0">
                 <a:solidFill>
-                  <a:srgbClr val="1F2A33"/>
+                  <a:srgbClr val="1F2937"/>
                 </a:solidFill>
                 <a:latin typeface="Calibri"/>
               </a:rPr>
@@ -10374,7 +10374,7 @@
             <a:r>
               <a:rPr sz="1400" b="1" i="0">
                 <a:solidFill>
-                  <a:srgbClr val="1F8F4F"/>
+                  <a:srgbClr val="059669"/>
                 </a:solidFill>
                 <a:latin typeface="Calibri"/>
               </a:rPr>
@@ -10409,7 +10409,7 @@
             <a:r>
               <a:rPr sz="1100" b="0" i="0">
                 <a:solidFill>
-                  <a:srgbClr val="1F2A33"/>
+                  <a:srgbClr val="1F2937"/>
                 </a:solidFill>
                 <a:latin typeface="Calibri"/>
               </a:rPr>
@@ -10439,7 +10439,7 @@
           </a:solidFill>
           <a:ln w="19050">
             <a:solidFill>
-              <a:srgbClr val="2EB8C7"/>
+              <a:srgbClr val="7C3AED"/>
             </a:solidFill>
           </a:ln>
           <a:effectLst/>
@@ -10492,7 +10492,7 @@
             <a:r>
               <a:rPr sz="1300" b="1" i="0">
                 <a:solidFill>
-                  <a:srgbClr val="0F3E4C"/>
+                  <a:srgbClr val="1E1B4B"/>
                 </a:solidFill>
                 <a:latin typeface="Calibri"/>
               </a:rPr>
@@ -10527,7 +10527,7 @@
             <a:r>
               <a:rPr sz="1100" b="0" i="0">
                 <a:solidFill>
-                  <a:srgbClr val="1F2A33"/>
+                  <a:srgbClr val="1F2937"/>
                 </a:solidFill>
                 <a:latin typeface="Calibri"/>
               </a:rPr>
@@ -10562,7 +10562,7 @@
             <a:r>
               <a:rPr sz="900" b="0" i="0">
                 <a:solidFill>
-                  <a:srgbClr val="647480"/>
+                  <a:srgbClr val="64748B"/>
                 </a:solidFill>
                 <a:latin typeface="Calibri"/>
               </a:rPr>
@@ -10597,7 +10597,7 @@
             <a:r>
               <a:rPr sz="900" b="0" i="0">
                 <a:solidFill>
-                  <a:srgbClr val="647480"/>
+                  <a:srgbClr val="64748B"/>
                 </a:solidFill>
                 <a:latin typeface="Calibri"/>
               </a:rPr>
@@ -10650,7 +10650,7 @@
             <a:r>
               <a:rPr sz="1100" b="1" i="0">
                 <a:solidFill>
-                  <a:srgbClr val="147A8C"/>
+                  <a:srgbClr val="4F46E5"/>
                 </a:solidFill>
                 <a:latin typeface="Calibri"/>
               </a:rPr>
@@ -10685,7 +10685,7 @@
             <a:r>
               <a:rPr sz="2800" b="1" i="0">
                 <a:solidFill>
-                  <a:srgbClr val="0F3E4C"/>
+                  <a:srgbClr val="1E1B4B"/>
                 </a:solidFill>
                 <a:latin typeface="Calibri"/>
               </a:rPr>
@@ -10720,7 +10720,7 @@
             <a:r>
               <a:rPr sz="1400" b="1" i="0">
                 <a:solidFill>
-                  <a:srgbClr val="0F3E4C"/>
+                  <a:srgbClr val="1E1B4B"/>
                 </a:solidFill>
                 <a:latin typeface="Calibri"/>
               </a:rPr>
@@ -10750,7 +10750,7 @@
           </a:solidFill>
           <a:ln w="25400">
             <a:solidFill>
-              <a:srgbClr val="147A8C"/>
+              <a:srgbClr val="4F46E5"/>
             </a:solidFill>
           </a:ln>
           <a:effectLst/>
@@ -10803,7 +10803,7 @@
             <a:r>
               <a:rPr sz="1800" b="1" i="0">
                 <a:solidFill>
-                  <a:srgbClr val="0F3E4C"/>
+                  <a:srgbClr val="1E1B4B"/>
                 </a:solidFill>
                 <a:latin typeface="Calibri"/>
               </a:rPr>
@@ -10838,7 +10838,7 @@
             <a:r>
               <a:rPr sz="1300" b="0" i="0">
                 <a:solidFill>
-                  <a:srgbClr val="1F2A33"/>
+                  <a:srgbClr val="1F2937"/>
                 </a:solidFill>
                 <a:latin typeface="Calibri"/>
               </a:rPr>
@@ -10873,7 +10873,7 @@
             <a:r>
               <a:rPr sz="1200" b="1" i="0">
                 <a:solidFill>
-                  <a:srgbClr val="1F8F4F"/>
+                  <a:srgbClr val="059669"/>
                 </a:solidFill>
                 <a:latin typeface="Calibri"/>
               </a:rPr>
@@ -10908,7 +10908,7 @@
             <a:r>
               <a:rPr sz="1100" b="0" i="0">
                 <a:solidFill>
-                  <a:srgbClr val="1F2A33"/>
+                  <a:srgbClr val="1F2937"/>
                 </a:solidFill>
                 <a:latin typeface="Calibri"/>
               </a:rPr>
@@ -10943,7 +10943,7 @@
             <a:r>
               <a:rPr sz="1200" b="1" i="0">
                 <a:solidFill>
-                  <a:srgbClr val="1F8F4F"/>
+                  <a:srgbClr val="059669"/>
                 </a:solidFill>
                 <a:latin typeface="Calibri"/>
               </a:rPr>
@@ -10978,7 +10978,7 @@
             <a:r>
               <a:rPr sz="1100" b="0" i="0">
                 <a:solidFill>
-                  <a:srgbClr val="1F2A33"/>
+                  <a:srgbClr val="1F2937"/>
                 </a:solidFill>
                 <a:latin typeface="Calibri"/>
               </a:rPr>
@@ -11013,7 +11013,7 @@
             <a:r>
               <a:rPr sz="1200" b="1" i="0">
                 <a:solidFill>
-                  <a:srgbClr val="1F8F4F"/>
+                  <a:srgbClr val="059669"/>
                 </a:solidFill>
                 <a:latin typeface="Calibri"/>
               </a:rPr>
@@ -11048,7 +11048,7 @@
             <a:r>
               <a:rPr sz="1100" b="0" i="0">
                 <a:solidFill>
-                  <a:srgbClr val="1F2A33"/>
+                  <a:srgbClr val="1F2937"/>
                 </a:solidFill>
                 <a:latin typeface="Calibri"/>
               </a:rPr>
@@ -11083,7 +11083,7 @@
             <a:r>
               <a:rPr sz="1200" b="1" i="0">
                 <a:solidFill>
-                  <a:srgbClr val="1F8F4F"/>
+                  <a:srgbClr val="059669"/>
                 </a:solidFill>
                 <a:latin typeface="Calibri"/>
               </a:rPr>
@@ -11118,7 +11118,7 @@
             <a:r>
               <a:rPr sz="1100" b="0" i="0">
                 <a:solidFill>
-                  <a:srgbClr val="1F2A33"/>
+                  <a:srgbClr val="1F2937"/>
                 </a:solidFill>
                 <a:latin typeface="Calibri"/>
               </a:rPr>
@@ -11153,7 +11153,7 @@
             <a:r>
               <a:rPr sz="1200" b="1" i="0">
                 <a:solidFill>
-                  <a:srgbClr val="1F8F4F"/>
+                  <a:srgbClr val="059669"/>
                 </a:solidFill>
                 <a:latin typeface="Calibri"/>
               </a:rPr>
@@ -11188,7 +11188,7 @@
             <a:r>
               <a:rPr sz="1100" b="0" i="0">
                 <a:solidFill>
-                  <a:srgbClr val="1F2A33"/>
+                  <a:srgbClr val="1F2937"/>
                 </a:solidFill>
                 <a:latin typeface="Calibri"/>
               </a:rPr>
@@ -11271,7 +11271,7 @@
             <a:r>
               <a:rPr sz="1800" b="1" i="0">
                 <a:solidFill>
-                  <a:srgbClr val="0F3E4C"/>
+                  <a:srgbClr val="1E1B4B"/>
                 </a:solidFill>
                 <a:latin typeface="Calibri"/>
               </a:rPr>
@@ -11306,7 +11306,7 @@
             <a:r>
               <a:rPr sz="1300" b="0" i="0">
                 <a:solidFill>
-                  <a:srgbClr val="1F2A33"/>
+                  <a:srgbClr val="1F2937"/>
                 </a:solidFill>
                 <a:latin typeface="Calibri"/>
               </a:rPr>
@@ -11341,7 +11341,7 @@
             <a:r>
               <a:rPr sz="1200" b="1" i="0">
                 <a:solidFill>
-                  <a:srgbClr val="1F8F4F"/>
+                  <a:srgbClr val="059669"/>
                 </a:solidFill>
                 <a:latin typeface="Calibri"/>
               </a:rPr>
@@ -11376,7 +11376,7 @@
             <a:r>
               <a:rPr sz="1100" b="0" i="0">
                 <a:solidFill>
-                  <a:srgbClr val="1F2A33"/>
+                  <a:srgbClr val="1F2937"/>
                 </a:solidFill>
                 <a:latin typeface="Calibri"/>
               </a:rPr>
@@ -11411,7 +11411,7 @@
             <a:r>
               <a:rPr sz="1200" b="1" i="0">
                 <a:solidFill>
-                  <a:srgbClr val="1F8F4F"/>
+                  <a:srgbClr val="059669"/>
                 </a:solidFill>
                 <a:latin typeface="Calibri"/>
               </a:rPr>
@@ -11446,7 +11446,7 @@
             <a:r>
               <a:rPr sz="1100" b="0" i="0">
                 <a:solidFill>
-                  <a:srgbClr val="1F2A33"/>
+                  <a:srgbClr val="1F2937"/>
                 </a:solidFill>
                 <a:latin typeface="Calibri"/>
               </a:rPr>
@@ -11481,7 +11481,7 @@
             <a:r>
               <a:rPr sz="1200" b="1" i="0">
                 <a:solidFill>
-                  <a:srgbClr val="1F8F4F"/>
+                  <a:srgbClr val="059669"/>
                 </a:solidFill>
                 <a:latin typeface="Calibri"/>
               </a:rPr>
@@ -11516,11 +11516,11 @@
             <a:r>
               <a:rPr sz="1100" b="0" i="0">
                 <a:solidFill>
-                  <a:srgbClr val="1F2A33"/>
-                </a:solidFill>
-                <a:latin typeface="Calibri"/>
-              </a:rPr>
-              <a:t>Tope de consumo configurable por tenant</a:t>
+                  <a:srgbClr val="1F2937"/>
+                </a:solidFill>
+                <a:latin typeface="Calibri"/>
+              </a:rPr>
+              <a:t>Tope de consumo configurable por institución</a:t>
             </a:r>
           </a:p>
         </p:txBody>
@@ -11551,7 +11551,7 @@
             <a:r>
               <a:rPr sz="1200" b="1" i="0">
                 <a:solidFill>
-                  <a:srgbClr val="1F8F4F"/>
+                  <a:srgbClr val="059669"/>
                 </a:solidFill>
                 <a:latin typeface="Calibri"/>
               </a:rPr>
@@ -11586,7 +11586,7 @@
             <a:r>
               <a:rPr sz="1100" b="0" i="0">
                 <a:solidFill>
-                  <a:srgbClr val="1F2A33"/>
+                  <a:srgbClr val="1F2937"/>
                 </a:solidFill>
                 <a:latin typeface="Calibri"/>
               </a:rPr>
@@ -11621,7 +11621,7 @@
             <a:r>
               <a:rPr sz="1200" b="1" i="0">
                 <a:solidFill>
-                  <a:srgbClr val="1F8F4F"/>
+                  <a:srgbClr val="059669"/>
                 </a:solidFill>
                 <a:latin typeface="Calibri"/>
               </a:rPr>
@@ -11656,7 +11656,7 @@
             <a:r>
               <a:rPr sz="1100" b="0" i="0">
                 <a:solidFill>
-                  <a:srgbClr val="1F2A33"/>
+                  <a:srgbClr val="1F2937"/>
                 </a:solidFill>
                 <a:latin typeface="Calibri"/>
               </a:rPr>
@@ -11691,7 +11691,7 @@
             <a:r>
               <a:rPr sz="1100" b="0" i="1">
                 <a:solidFill>
-                  <a:srgbClr val="647480"/>
+                  <a:srgbClr val="64748B"/>
                 </a:solidFill>
                 <a:latin typeface="Calibri"/>
               </a:rPr>
@@ -11726,7 +11726,7 @@
             <a:r>
               <a:rPr sz="900" b="0" i="0">
                 <a:solidFill>
-                  <a:srgbClr val="647480"/>
+                  <a:srgbClr val="64748B"/>
                 </a:solidFill>
                 <a:latin typeface="Calibri"/>
               </a:rPr>
@@ -11761,7 +11761,7 @@
             <a:r>
               <a:rPr sz="900" b="0" i="0">
                 <a:solidFill>
-                  <a:srgbClr val="647480"/>
+                  <a:srgbClr val="64748B"/>
                 </a:solidFill>
                 <a:latin typeface="Calibri"/>
               </a:rPr>
@@ -11814,7 +11814,7 @@
             <a:r>
               <a:rPr sz="1100" b="1" i="0">
                 <a:solidFill>
-                  <a:srgbClr val="147A8C"/>
+                  <a:srgbClr val="4F46E5"/>
                 </a:solidFill>
                 <a:latin typeface="Calibri"/>
               </a:rPr>
@@ -11849,7 +11849,7 @@
             <a:r>
               <a:rPr sz="2800" b="1" i="0">
                 <a:solidFill>
-                  <a:srgbClr val="0F3E4C"/>
+                  <a:srgbClr val="1E1B4B"/>
                 </a:solidFill>
                 <a:latin typeface="Calibri"/>
               </a:rPr>
@@ -11884,7 +11884,7 @@
             <a:r>
               <a:rPr sz="1300" b="0" i="0">
                 <a:solidFill>
-                  <a:srgbClr val="647480"/>
+                  <a:srgbClr val="64748B"/>
                 </a:solidFill>
                 <a:latin typeface="Calibri"/>
               </a:rPr>
@@ -11914,7 +11914,7 @@
           </a:solidFill>
           <a:ln w="25400">
             <a:solidFill>
-              <a:srgbClr val="147A8C"/>
+              <a:srgbClr val="4F46E5"/>
             </a:solidFill>
           </a:ln>
           <a:effectLst/>
@@ -11967,7 +11967,7 @@
             <a:r>
               <a:rPr sz="1400" b="1" i="0">
                 <a:solidFill>
-                  <a:srgbClr val="0F3E4C"/>
+                  <a:srgbClr val="1E1B4B"/>
                 </a:solidFill>
                 <a:latin typeface="Calibri"/>
               </a:rPr>
@@ -12002,7 +12002,7 @@
             <a:r>
               <a:rPr sz="9000" b="1" i="0">
                 <a:solidFill>
-                  <a:srgbClr val="147A8C"/>
+                  <a:srgbClr val="4F46E5"/>
                 </a:solidFill>
                 <a:latin typeface="Calibri"/>
               </a:rPr>
@@ -12037,7 +12037,7 @@
             <a:r>
               <a:rPr sz="1100" b="0" i="0">
                 <a:solidFill>
-                  <a:srgbClr val="1F2A33"/>
+                  <a:srgbClr val="1F2937"/>
                 </a:solidFill>
                 <a:latin typeface="Calibri"/>
               </a:rPr>
@@ -12072,7 +12072,7 @@
             <a:r>
               <a:rPr sz="1300" b="1" i="0">
                 <a:solidFill>
-                  <a:srgbClr val="0F3E4C"/>
+                  <a:srgbClr val="1E1B4B"/>
                 </a:solidFill>
                 <a:latin typeface="Calibri"/>
               </a:rPr>
@@ -12098,7 +12098,7 @@
             </a:avLst>
           </a:prstGeom>
           <a:solidFill>
-            <a:srgbClr val="147A8C"/>
+            <a:srgbClr val="4F46E5"/>
           </a:solidFill>
           <a:ln>
             <a:noFill/>
@@ -12249,7 +12249,7 @@
             </a:avLst>
           </a:prstGeom>
           <a:solidFill>
-            <a:srgbClr val="F4F8FA"/>
+            <a:srgbClr val="EEF2FF"/>
           </a:solidFill>
           <a:ln>
             <a:noFill/>
@@ -12304,7 +12304,7 @@
             <a:r>
               <a:rPr sz="1200" b="0" i="0">
                 <a:solidFill>
-                  <a:srgbClr val="1F2A33"/>
+                  <a:srgbClr val="1F2937"/>
                 </a:solidFill>
                 <a:latin typeface="Calibri"/>
               </a:rPr>
@@ -12339,7 +12339,7 @@
             <a:r>
               <a:rPr sz="1200" b="1" i="0">
                 <a:solidFill>
-                  <a:srgbClr val="0F3E4C"/>
+                  <a:srgbClr val="1E1B4B"/>
                 </a:solidFill>
                 <a:latin typeface="Calibri"/>
               </a:rPr>
@@ -12374,7 +12374,7 @@
             <a:r>
               <a:rPr sz="1200" b="0" i="0">
                 <a:solidFill>
-                  <a:srgbClr val="647480"/>
+                  <a:srgbClr val="64748B"/>
                 </a:solidFill>
                 <a:latin typeface="Calibri"/>
               </a:rPr>
@@ -12400,7 +12400,7 @@
             </a:avLst>
           </a:prstGeom>
           <a:solidFill>
-            <a:srgbClr val="F4F8FA"/>
+            <a:srgbClr val="EEF2FF"/>
           </a:solidFill>
           <a:ln>
             <a:noFill/>
@@ -12455,7 +12455,7 @@
             <a:r>
               <a:rPr sz="1200" b="0" i="0">
                 <a:solidFill>
-                  <a:srgbClr val="1F2A33"/>
+                  <a:srgbClr val="1F2937"/>
                 </a:solidFill>
                 <a:latin typeface="Calibri"/>
               </a:rPr>
@@ -12490,7 +12490,7 @@
             <a:r>
               <a:rPr sz="1200" b="1" i="0">
                 <a:solidFill>
-                  <a:srgbClr val="0F3E4C"/>
+                  <a:srgbClr val="1E1B4B"/>
                 </a:solidFill>
                 <a:latin typeface="Calibri"/>
               </a:rPr>
@@ -12525,7 +12525,7 @@
             <a:r>
               <a:rPr sz="1200" b="0" i="0">
                 <a:solidFill>
-                  <a:srgbClr val="647480"/>
+                  <a:srgbClr val="64748B"/>
                 </a:solidFill>
                 <a:latin typeface="Calibri"/>
               </a:rPr>
@@ -12551,7 +12551,7 @@
             </a:avLst>
           </a:prstGeom>
           <a:solidFill>
-            <a:srgbClr val="F4F8FA"/>
+            <a:srgbClr val="EEF2FF"/>
           </a:solidFill>
           <a:ln>
             <a:noFill/>
@@ -12606,7 +12606,7 @@
             <a:r>
               <a:rPr sz="1200" b="0" i="0">
                 <a:solidFill>
-                  <a:srgbClr val="1F2A33"/>
+                  <a:srgbClr val="1F2937"/>
                 </a:solidFill>
                 <a:latin typeface="Calibri"/>
               </a:rPr>
@@ -12641,7 +12641,7 @@
             <a:r>
               <a:rPr sz="1200" b="1" i="0">
                 <a:solidFill>
-                  <a:srgbClr val="0F3E4C"/>
+                  <a:srgbClr val="1E1B4B"/>
                 </a:solidFill>
                 <a:latin typeface="Calibri"/>
               </a:rPr>
@@ -12676,7 +12676,7 @@
             <a:r>
               <a:rPr sz="1200" b="0" i="0">
                 <a:solidFill>
-                  <a:srgbClr val="647480"/>
+                  <a:srgbClr val="64748B"/>
                 </a:solidFill>
                 <a:latin typeface="Calibri"/>
               </a:rPr>
@@ -12702,7 +12702,7 @@
             </a:avLst>
           </a:prstGeom>
           <a:solidFill>
-            <a:srgbClr val="F4F8FA"/>
+            <a:srgbClr val="EEF2FF"/>
           </a:solidFill>
           <a:ln>
             <a:noFill/>
@@ -12757,7 +12757,7 @@
             <a:r>
               <a:rPr sz="1200" b="0" i="0">
                 <a:solidFill>
-                  <a:srgbClr val="1F2A33"/>
+                  <a:srgbClr val="1F2937"/>
                 </a:solidFill>
                 <a:latin typeface="Calibri"/>
               </a:rPr>
@@ -12792,7 +12792,7 @@
             <a:r>
               <a:rPr sz="1200" b="1" i="0">
                 <a:solidFill>
-                  <a:srgbClr val="0F3E4C"/>
+                  <a:srgbClr val="1E1B4B"/>
                 </a:solidFill>
                 <a:latin typeface="Calibri"/>
               </a:rPr>
@@ -12827,7 +12827,7 @@
             <a:r>
               <a:rPr sz="1200" b="0" i="0">
                 <a:solidFill>
-                  <a:srgbClr val="647480"/>
+                  <a:srgbClr val="64748B"/>
                 </a:solidFill>
                 <a:latin typeface="Calibri"/>
               </a:rPr>
@@ -12862,7 +12862,7 @@
             <a:r>
               <a:rPr sz="1000" b="0" i="1">
                 <a:solidFill>
-                  <a:srgbClr val="647480"/>
+                  <a:srgbClr val="64748B"/>
                 </a:solidFill>
                 <a:latin typeface="Calibri"/>
               </a:rPr>
@@ -12897,7 +12897,7 @@
             <a:r>
               <a:rPr sz="900" b="0" i="0">
                 <a:solidFill>
-                  <a:srgbClr val="647480"/>
+                  <a:srgbClr val="64748B"/>
                 </a:solidFill>
                 <a:latin typeface="Calibri"/>
               </a:rPr>
@@ -12932,7 +12932,7 @@
             <a:r>
               <a:rPr sz="900" b="0" i="0">
                 <a:solidFill>
-                  <a:srgbClr val="647480"/>
+                  <a:srgbClr val="64748B"/>
                 </a:solidFill>
                 <a:latin typeface="Calibri"/>
               </a:rPr>
@@ -12985,7 +12985,7 @@
             <a:r>
               <a:rPr sz="1100" b="1" i="0">
                 <a:solidFill>
-                  <a:srgbClr val="147A8C"/>
+                  <a:srgbClr val="4F46E5"/>
                 </a:solidFill>
                 <a:latin typeface="Calibri"/>
               </a:rPr>
@@ -13020,7 +13020,7 @@
             <a:r>
               <a:rPr sz="2800" b="1" i="0">
                 <a:solidFill>
-                  <a:srgbClr val="0F3E4C"/>
+                  <a:srgbClr val="1E1B4B"/>
                 </a:solidFill>
                 <a:latin typeface="Calibri"/>
               </a:rPr>
@@ -13055,7 +13055,7 @@
             <a:r>
               <a:rPr sz="1300" b="0" i="0">
                 <a:solidFill>
-                  <a:srgbClr val="647480"/>
+                  <a:srgbClr val="64748B"/>
                 </a:solidFill>
                 <a:latin typeface="Calibri"/>
               </a:rPr>
@@ -13081,7 +13081,7 @@
             </a:avLst>
           </a:prstGeom>
           <a:solidFill>
-            <a:srgbClr val="0F3E4C"/>
+            <a:srgbClr val="1E1B4B"/>
           </a:solidFill>
           <a:ln>
             <a:noFill/>
@@ -13322,7 +13322,7 @@
             <a:r>
               <a:rPr sz="1200" b="0" i="0">
                 <a:solidFill>
-                  <a:srgbClr val="1F2A33"/>
+                  <a:srgbClr val="1F2937"/>
                 </a:solidFill>
                 <a:latin typeface="Calibri"/>
               </a:rPr>
@@ -13357,7 +13357,7 @@
             <a:r>
               <a:rPr sz="1200" b="0" i="0">
                 <a:solidFill>
-                  <a:srgbClr val="1F2A33"/>
+                  <a:srgbClr val="1F2937"/>
                 </a:solidFill>
                 <a:latin typeface="Calibri"/>
               </a:rPr>
@@ -13392,7 +13392,7 @@
             <a:r>
               <a:rPr sz="1200" b="0" i="0">
                 <a:solidFill>
-                  <a:srgbClr val="1F2A33"/>
+                  <a:srgbClr val="1F2937"/>
                 </a:solidFill>
                 <a:latin typeface="Calibri"/>
               </a:rPr>
@@ -13427,7 +13427,7 @@
             <a:r>
               <a:rPr sz="1200" b="0" i="0">
                 <a:solidFill>
-                  <a:srgbClr val="1F2A33"/>
+                  <a:srgbClr val="1F2937"/>
                 </a:solidFill>
                 <a:latin typeface="Calibri"/>
               </a:rPr>
@@ -13508,7 +13508,7 @@
             <a:r>
               <a:rPr sz="1200" b="1" i="0">
                 <a:solidFill>
-                  <a:srgbClr val="0F3E4C"/>
+                  <a:srgbClr val="1E1B4B"/>
                 </a:solidFill>
                 <a:latin typeface="Calibri"/>
               </a:rPr>
@@ -13543,7 +13543,7 @@
             <a:r>
               <a:rPr sz="1200" b="1" i="0">
                 <a:solidFill>
-                  <a:srgbClr val="0F3E4C"/>
+                  <a:srgbClr val="1E1B4B"/>
                 </a:solidFill>
                 <a:latin typeface="Calibri"/>
               </a:rPr>
@@ -13578,7 +13578,7 @@
             <a:r>
               <a:rPr sz="1200" b="1" i="0">
                 <a:solidFill>
-                  <a:srgbClr val="0F3E4C"/>
+                  <a:srgbClr val="1E1B4B"/>
                 </a:solidFill>
                 <a:latin typeface="Calibri"/>
               </a:rPr>
@@ -13613,11 +13613,11 @@
             <a:r>
               <a:rPr sz="1200" b="1" i="0">
                 <a:solidFill>
-                  <a:srgbClr val="0F3E4C"/>
-                </a:solidFill>
-                <a:latin typeface="Calibri"/>
-              </a:rPr>
-              <a:t>IA + Kahoot + antifraude incluidos</a:t>
+                  <a:srgbClr val="1E1B4B"/>
+                </a:solidFill>
+                <a:latin typeface="Calibri"/>
+              </a:rPr>
+              <a:t>IA + Reto en vivo + antifraude incluidos</a:t>
             </a:r>
           </a:p>
         </p:txBody>
@@ -13694,7 +13694,7 @@
             <a:r>
               <a:rPr sz="1200" b="0" i="0">
                 <a:solidFill>
-                  <a:srgbClr val="1F2A33"/>
+                  <a:srgbClr val="1F2937"/>
                 </a:solidFill>
                 <a:latin typeface="Calibri"/>
               </a:rPr>
@@ -13729,7 +13729,7 @@
             <a:r>
               <a:rPr sz="1200" b="0" i="0">
                 <a:solidFill>
-                  <a:srgbClr val="1F2A33"/>
+                  <a:srgbClr val="1F2937"/>
                 </a:solidFill>
                 <a:latin typeface="Calibri"/>
               </a:rPr>
@@ -13764,7 +13764,7 @@
             <a:r>
               <a:rPr sz="1200" b="0" i="0">
                 <a:solidFill>
-                  <a:srgbClr val="1F2A33"/>
+                  <a:srgbClr val="1F2937"/>
                 </a:solidFill>
                 <a:latin typeface="Calibri"/>
               </a:rPr>
@@ -13799,7 +13799,7 @@
             <a:r>
               <a:rPr sz="1200" b="0" i="0">
                 <a:solidFill>
-                  <a:srgbClr val="1F2A33"/>
+                  <a:srgbClr val="1F2937"/>
                 </a:solidFill>
                 <a:latin typeface="Calibri"/>
               </a:rPr>
@@ -13825,7 +13825,7 @@
             </a:avLst>
           </a:prstGeom>
           <a:solidFill>
-            <a:srgbClr val="F4F8FA"/>
+            <a:srgbClr val="EEF2FF"/>
           </a:solidFill>
           <a:ln>
             <a:noFill/>
@@ -13880,7 +13880,7 @@
             <a:r>
               <a:rPr sz="1200" b="0" i="0">
                 <a:solidFill>
-                  <a:srgbClr val="1F2A33"/>
+                  <a:srgbClr val="1F2937"/>
                 </a:solidFill>
                 <a:latin typeface="Calibri"/>
               </a:rPr>
@@ -13915,7 +13915,7 @@
             <a:r>
               <a:rPr sz="1200" b="0" i="0">
                 <a:solidFill>
-                  <a:srgbClr val="1F2A33"/>
+                  <a:srgbClr val="1F2937"/>
                 </a:solidFill>
                 <a:latin typeface="Calibri"/>
               </a:rPr>
@@ -13950,7 +13950,7 @@
             <a:r>
               <a:rPr sz="1200" b="0" i="0">
                 <a:solidFill>
-                  <a:srgbClr val="1F2A33"/>
+                  <a:srgbClr val="1F2937"/>
                 </a:solidFill>
                 <a:latin typeface="Calibri"/>
               </a:rPr>
@@ -13985,7 +13985,7 @@
             <a:r>
               <a:rPr sz="1200" b="0" i="0">
                 <a:solidFill>
-                  <a:srgbClr val="1F2A33"/>
+                  <a:srgbClr val="1F2937"/>
                 </a:solidFill>
                 <a:latin typeface="Calibri"/>
               </a:rPr>
@@ -14066,7 +14066,7 @@
             <a:r>
               <a:rPr sz="1200" b="0" i="0">
                 <a:solidFill>
-                  <a:srgbClr val="1F2A33"/>
+                  <a:srgbClr val="1F2937"/>
                 </a:solidFill>
                 <a:latin typeface="Calibri"/>
               </a:rPr>
@@ -14101,7 +14101,7 @@
             <a:r>
               <a:rPr sz="1200" b="0" i="0">
                 <a:solidFill>
-                  <a:srgbClr val="1F2A33"/>
+                  <a:srgbClr val="1F2937"/>
                 </a:solidFill>
                 <a:latin typeface="Calibri"/>
               </a:rPr>
@@ -14136,7 +14136,7 @@
             <a:r>
               <a:rPr sz="1200" b="0" i="0">
                 <a:solidFill>
-                  <a:srgbClr val="1F2A33"/>
+                  <a:srgbClr val="1F2937"/>
                 </a:solidFill>
                 <a:latin typeface="Calibri"/>
               </a:rPr>
@@ -14171,7 +14171,7 @@
             <a:r>
               <a:rPr sz="1200" b="0" i="0">
                 <a:solidFill>
-                  <a:srgbClr val="1F2A33"/>
+                  <a:srgbClr val="1F2937"/>
                 </a:solidFill>
                 <a:latin typeface="Calibri"/>
               </a:rPr>
@@ -14206,7 +14206,7 @@
             <a:r>
               <a:rPr sz="900" b="0" i="1">
                 <a:solidFill>
-                  <a:srgbClr val="647480"/>
+                  <a:srgbClr val="64748B"/>
                 </a:solidFill>
                 <a:latin typeface="Calibri"/>
               </a:rPr>
@@ -14241,7 +14241,7 @@
             <a:r>
               <a:rPr sz="900" b="0" i="0">
                 <a:solidFill>
-                  <a:srgbClr val="647480"/>
+                  <a:srgbClr val="64748B"/>
                 </a:solidFill>
                 <a:latin typeface="Calibri"/>
               </a:rPr>
@@ -14276,7 +14276,7 @@
             <a:r>
               <a:rPr sz="900" b="0" i="0">
                 <a:solidFill>
-                  <a:srgbClr val="647480"/>
+                  <a:srgbClr val="64748B"/>
                 </a:solidFill>
                 <a:latin typeface="Calibri"/>
               </a:rPr>

--- a/docs/demos/presentacion/ExamLab-Presentacion-Comercial-v3.pptx
+++ b/docs/demos/presentacion/ExamLab-Presentacion-Comercial-v3.pptx
@@ -3424,7 +3424,7 @@
             </a:avLst>
           </a:prstGeom>
           <a:solidFill>
-            <a:srgbClr val="EEF2FF"/>
+            <a:srgbClr val="F5F3FF"/>
           </a:solidFill>
           <a:ln>
             <a:noFill/>
@@ -3514,7 +3514,7 @@
             <a:r>
               <a:rPr sz="1100" b="0" i="0">
                 <a:solidFill>
-                  <a:srgbClr val="1F2937"/>
+                  <a:srgbClr val="334155"/>
                 </a:solidFill>
                 <a:latin typeface="Calibri"/>
               </a:rPr>
@@ -3541,7 +3541,7 @@
             </a:avLst>
           </a:prstGeom>
           <a:solidFill>
-            <a:srgbClr val="EEF2FF"/>
+            <a:srgbClr val="F5F3FF"/>
           </a:solidFill>
           <a:ln>
             <a:noFill/>
@@ -3631,7 +3631,7 @@
             <a:r>
               <a:rPr sz="1100" b="0" i="0">
                 <a:solidFill>
-                  <a:srgbClr val="1F2937"/>
+                  <a:srgbClr val="334155"/>
                 </a:solidFill>
                 <a:latin typeface="Calibri"/>
               </a:rPr>
@@ -3658,7 +3658,7 @@
             </a:avLst>
           </a:prstGeom>
           <a:solidFill>
-            <a:srgbClr val="EEF2FF"/>
+            <a:srgbClr val="F5F3FF"/>
           </a:solidFill>
           <a:ln>
             <a:noFill/>
@@ -3748,7 +3748,7 @@
             <a:r>
               <a:rPr sz="1100" b="0" i="0">
                 <a:solidFill>
-                  <a:srgbClr val="1F2937"/>
+                  <a:srgbClr val="334155"/>
                 </a:solidFill>
                 <a:latin typeface="Calibri"/>
               </a:rPr>
@@ -3775,7 +3775,7 @@
             </a:avLst>
           </a:prstGeom>
           <a:solidFill>
-            <a:srgbClr val="EEF2FF"/>
+            <a:srgbClr val="F5F3FF"/>
           </a:solidFill>
           <a:ln>
             <a:noFill/>
@@ -3865,7 +3865,7 @@
             <a:r>
               <a:rPr sz="1100" b="0" i="0">
                 <a:solidFill>
-                  <a:srgbClr val="1F2937"/>
+                  <a:srgbClr val="334155"/>
                 </a:solidFill>
                 <a:latin typeface="Calibri"/>
               </a:rPr>
@@ -3984,7 +3984,7 @@
             <a:r>
               <a:rPr sz="1200" b="0" i="0">
                 <a:solidFill>
-                  <a:srgbClr val="1F2937"/>
+                  <a:srgbClr val="334155"/>
                 </a:solidFill>
                 <a:latin typeface="Calibri"/>
               </a:rPr>
@@ -4054,7 +4054,7 @@
             <a:r>
               <a:rPr sz="1200" b="0" i="0">
                 <a:solidFill>
-                  <a:srgbClr val="1F2937"/>
+                  <a:srgbClr val="334155"/>
                 </a:solidFill>
                 <a:latin typeface="Calibri"/>
               </a:rPr>
@@ -4124,7 +4124,7 @@
             <a:r>
               <a:rPr sz="1200" b="0" i="0">
                 <a:solidFill>
-                  <a:srgbClr val="1F2937"/>
+                  <a:srgbClr val="334155"/>
                 </a:solidFill>
                 <a:latin typeface="Calibri"/>
               </a:rPr>
@@ -4194,7 +4194,7 @@
             <a:r>
               <a:rPr sz="1200" b="0" i="0">
                 <a:solidFill>
-                  <a:srgbClr val="1F2937"/>
+                  <a:srgbClr val="334155"/>
                 </a:solidFill>
                 <a:latin typeface="Calibri"/>
               </a:rPr>
@@ -4468,7 +4468,7 @@
             <a:r>
               <a:rPr sz="1800" b="0" i="0">
                 <a:solidFill>
-                  <a:srgbClr val="1F2937"/>
+                  <a:srgbClr val="334155"/>
                 </a:solidFill>
                 <a:latin typeface="Calibri"/>
               </a:rPr>
@@ -4538,7 +4538,7 @@
             <a:r>
               <a:rPr sz="1400" b="0" i="0">
                 <a:solidFill>
-                  <a:srgbClr val="1F2937"/>
+                  <a:srgbClr val="334155"/>
                 </a:solidFill>
                 <a:latin typeface="Calibri"/>
               </a:rPr>
@@ -4608,7 +4608,7 @@
             <a:r>
               <a:rPr sz="1400" b="0" i="0">
                 <a:solidFill>
-                  <a:srgbClr val="1F2937"/>
+                  <a:srgbClr val="334155"/>
                 </a:solidFill>
                 <a:latin typeface="Calibri"/>
               </a:rPr>
@@ -4678,7 +4678,7 @@
             <a:r>
               <a:rPr sz="1400" b="0" i="0">
                 <a:solidFill>
-                  <a:srgbClr val="1F2937"/>
+                  <a:srgbClr val="334155"/>
                 </a:solidFill>
                 <a:latin typeface="Calibri"/>
               </a:rPr>
@@ -4963,7 +4963,7 @@
             <a:r>
               <a:rPr sz="1500" b="0" i="0">
                 <a:solidFill>
-                  <a:srgbClr val="1F2937"/>
+                  <a:srgbClr val="334155"/>
                 </a:solidFill>
                 <a:latin typeface="Calibri"/>
               </a:rPr>
@@ -5044,7 +5044,7 @@
             <a:r>
               <a:rPr sz="1500" b="0" i="0">
                 <a:solidFill>
-                  <a:srgbClr val="1F2937"/>
+                  <a:srgbClr val="334155"/>
                 </a:solidFill>
                 <a:latin typeface="Calibri"/>
               </a:rPr>
@@ -5125,7 +5125,7 @@
             <a:r>
               <a:rPr sz="1500" b="0" i="0">
                 <a:solidFill>
-                  <a:srgbClr val="1F2937"/>
+                  <a:srgbClr val="334155"/>
                 </a:solidFill>
                 <a:latin typeface="Calibri"/>
               </a:rPr>
@@ -5313,7 +5313,7 @@
             </a:avLst>
           </a:prstGeom>
           <a:solidFill>
-            <a:srgbClr val="E8F6F9"/>
+            <a:srgbClr val="E0E7FF"/>
           </a:solidFill>
           <a:ln w="19050">
             <a:solidFill>
@@ -5563,7 +5563,7 @@
             <a:r>
               <a:rPr sz="2200" b="0" i="0">
                 <a:solidFill>
-                  <a:srgbClr val="1F2937"/>
+                  <a:srgbClr val="334155"/>
                 </a:solidFill>
                 <a:latin typeface="Calibri"/>
               </a:rPr>
@@ -5668,7 +5668,7 @@
             <a:r>
               <a:rPr sz="2200" b="0" i="0">
                 <a:solidFill>
-                  <a:srgbClr val="1F2937"/>
+                  <a:srgbClr val="334155"/>
                 </a:solidFill>
                 <a:latin typeface="Calibri"/>
               </a:rPr>
@@ -5773,7 +5773,7 @@
             <a:r>
               <a:rPr sz="2200" b="0" i="0">
                 <a:solidFill>
-                  <a:srgbClr val="1F2937"/>
+                  <a:srgbClr val="334155"/>
                 </a:solidFill>
                 <a:latin typeface="Calibri"/>
               </a:rPr>
@@ -5878,7 +5878,7 @@
             <a:r>
               <a:rPr sz="2200" b="0" i="0">
                 <a:solidFill>
-                  <a:srgbClr val="1F2937"/>
+                  <a:srgbClr val="334155"/>
                 </a:solidFill>
                 <a:latin typeface="Calibri"/>
               </a:rPr>
@@ -5983,7 +5983,7 @@
             <a:r>
               <a:rPr sz="2200" b="0" i="0">
                 <a:solidFill>
-                  <a:srgbClr val="1F2937"/>
+                  <a:srgbClr val="334155"/>
                 </a:solidFill>
                 <a:latin typeface="Calibri"/>
               </a:rPr>
@@ -6088,7 +6088,7 @@
             <a:r>
               <a:rPr sz="2200" b="0" i="0">
                 <a:solidFill>
-                  <a:srgbClr val="1F2937"/>
+                  <a:srgbClr val="334155"/>
                 </a:solidFill>
                 <a:latin typeface="Calibri"/>
               </a:rPr>
@@ -6193,7 +6193,7 @@
             <a:r>
               <a:rPr sz="2200" b="0" i="0">
                 <a:solidFill>
-                  <a:srgbClr val="1F2937"/>
+                  <a:srgbClr val="334155"/>
                 </a:solidFill>
                 <a:latin typeface="Calibri"/>
               </a:rPr>
@@ -6298,7 +6298,7 @@
             <a:r>
               <a:rPr sz="2200" b="0" i="0">
                 <a:solidFill>
-                  <a:srgbClr val="1F2937"/>
+                  <a:srgbClr val="334155"/>
                 </a:solidFill>
                 <a:latin typeface="Calibri"/>
               </a:rPr>
@@ -6403,7 +6403,7 @@
             <a:r>
               <a:rPr sz="2200" b="0" i="0">
                 <a:solidFill>
-                  <a:srgbClr val="1F2937"/>
+                  <a:srgbClr val="334155"/>
                 </a:solidFill>
                 <a:latin typeface="Calibri"/>
               </a:rPr>
@@ -6508,7 +6508,7 @@
             <a:r>
               <a:rPr sz="2200" b="0" i="0">
                 <a:solidFill>
-                  <a:srgbClr val="1F2937"/>
+                  <a:srgbClr val="334155"/>
                 </a:solidFill>
                 <a:latin typeface="Calibri"/>
               </a:rPr>
@@ -6801,7 +6801,7 @@
           </a:solidFill>
           <a:ln w="12700">
             <a:solidFill>
-              <a:srgbClr val="D0D9E1"/>
+              <a:srgbClr val="E2E8F0"/>
             </a:solidFill>
           </a:ln>
           <a:effectLst/>
@@ -6984,7 +6984,7 @@
           </a:prstGeom>
           <a:ln>
             <a:solidFill>
-              <a:srgbClr val="E0E6EC"/>
+              <a:srgbClr val="E2E8F0"/>
             </a:solidFill>
           </a:ln>
         </p:spPr>
@@ -7134,7 +7134,7 @@
             <a:r>
               <a:rPr sz="1000" b="0" i="0">
                 <a:solidFill>
-                  <a:srgbClr val="1F2937"/>
+                  <a:srgbClr val="334155"/>
                 </a:solidFill>
                 <a:latin typeface="Calibri"/>
               </a:rPr>
@@ -7204,7 +7204,7 @@
             <a:r>
               <a:rPr sz="1000" b="0" i="0">
                 <a:solidFill>
-                  <a:srgbClr val="1F2937"/>
+                  <a:srgbClr val="334155"/>
                 </a:solidFill>
                 <a:latin typeface="Calibri"/>
               </a:rPr>
@@ -7274,7 +7274,7 @@
             <a:r>
               <a:rPr sz="1000" b="0" i="0">
                 <a:solidFill>
-                  <a:srgbClr val="1F2937"/>
+                  <a:srgbClr val="334155"/>
                 </a:solidFill>
                 <a:latin typeface="Calibri"/>
               </a:rPr>
@@ -7568,7 +7568,7 @@
           </a:prstGeom>
           <a:ln>
             <a:solidFill>
-              <a:srgbClr val="E0E6EC"/>
+              <a:srgbClr val="E2E8F0"/>
             </a:solidFill>
           </a:ln>
         </p:spPr>
@@ -7718,7 +7718,7 @@
             <a:r>
               <a:rPr sz="1000" b="0" i="0">
                 <a:solidFill>
-                  <a:srgbClr val="1F2937"/>
+                  <a:srgbClr val="334155"/>
                 </a:solidFill>
                 <a:latin typeface="Calibri"/>
               </a:rPr>
@@ -7788,7 +7788,7 @@
             <a:r>
               <a:rPr sz="1000" b="0" i="0">
                 <a:solidFill>
-                  <a:srgbClr val="1F2937"/>
+                  <a:srgbClr val="334155"/>
                 </a:solidFill>
                 <a:latin typeface="Calibri"/>
               </a:rPr>
@@ -7858,7 +7858,7 @@
             <a:r>
               <a:rPr sz="1000" b="0" i="0">
                 <a:solidFill>
-                  <a:srgbClr val="1F2937"/>
+                  <a:srgbClr val="334155"/>
                 </a:solidFill>
                 <a:latin typeface="Calibri"/>
               </a:rPr>
@@ -7888,7 +7888,7 @@
           </a:solidFill>
           <a:ln w="12700">
             <a:solidFill>
-              <a:srgbClr val="D0D9E1"/>
+              <a:srgbClr val="E2E8F0"/>
             </a:solidFill>
           </a:ln>
           <a:effectLst/>
@@ -8071,7 +8071,7 @@
           </a:prstGeom>
           <a:ln>
             <a:solidFill>
-              <a:srgbClr val="E0E6EC"/>
+              <a:srgbClr val="E2E8F0"/>
             </a:solidFill>
           </a:ln>
         </p:spPr>
@@ -8221,7 +8221,7 @@
             <a:r>
               <a:rPr sz="1000" b="0" i="0">
                 <a:solidFill>
-                  <a:srgbClr val="1F2937"/>
+                  <a:srgbClr val="334155"/>
                 </a:solidFill>
                 <a:latin typeface="Calibri"/>
               </a:rPr>
@@ -8291,7 +8291,7 @@
             <a:r>
               <a:rPr sz="1000" b="0" i="0">
                 <a:solidFill>
-                  <a:srgbClr val="1F2937"/>
+                  <a:srgbClr val="334155"/>
                 </a:solidFill>
                 <a:latin typeface="Calibri"/>
               </a:rPr>
@@ -8361,7 +8361,7 @@
             <a:r>
               <a:rPr sz="1000" b="0" i="0">
                 <a:solidFill>
-                  <a:srgbClr val="1F2937"/>
+                  <a:srgbClr val="334155"/>
                 </a:solidFill>
                 <a:latin typeface="Calibri"/>
               </a:rPr>
@@ -8545,7 +8545,7 @@
             </a:avLst>
           </a:prstGeom>
           <a:solidFill>
-            <a:srgbClr val="EEF2FF"/>
+            <a:srgbClr val="F5F3FF"/>
           </a:solidFill>
           <a:ln w="19050">
             <a:solidFill>
@@ -8672,7 +8672,7 @@
             <a:r>
               <a:rPr sz="1100" b="0" i="0">
                 <a:solidFill>
-                  <a:srgbClr val="1F2937"/>
+                  <a:srgbClr val="334155"/>
                 </a:solidFill>
                 <a:latin typeface="Calibri"/>
               </a:rPr>
@@ -8698,7 +8698,7 @@
             </a:avLst>
           </a:prstGeom>
           <a:solidFill>
-            <a:srgbClr val="EEF2FF"/>
+            <a:srgbClr val="F5F3FF"/>
           </a:solidFill>
           <a:ln w="19050">
             <a:solidFill>
@@ -8825,7 +8825,7 @@
             <a:r>
               <a:rPr sz="1100" b="0" i="0">
                 <a:solidFill>
-                  <a:srgbClr val="1F2937"/>
+                  <a:srgbClr val="334155"/>
                 </a:solidFill>
                 <a:latin typeface="Calibri"/>
               </a:rPr>
@@ -8851,7 +8851,7 @@
             </a:avLst>
           </a:prstGeom>
           <a:solidFill>
-            <a:srgbClr val="EEF2FF"/>
+            <a:srgbClr val="F5F3FF"/>
           </a:solidFill>
           <a:ln w="19050">
             <a:solidFill>
@@ -8978,7 +8978,7 @@
             <a:r>
               <a:rPr sz="1100" b="0" i="0">
                 <a:solidFill>
-                  <a:srgbClr val="1F2937"/>
+                  <a:srgbClr val="334155"/>
                 </a:solidFill>
                 <a:latin typeface="Calibri"/>
               </a:rPr>
@@ -9004,7 +9004,7 @@
             </a:avLst>
           </a:prstGeom>
           <a:solidFill>
-            <a:srgbClr val="E8F6F9"/>
+            <a:srgbClr val="E0E7FF"/>
           </a:solidFill>
           <a:ln w="19050">
             <a:solidFill>
@@ -9096,7 +9096,7 @@
             <a:r>
               <a:rPr sz="1100" b="0" i="0">
                 <a:solidFill>
-                  <a:srgbClr val="1F2937"/>
+                  <a:srgbClr val="334155"/>
                 </a:solidFill>
                 <a:latin typeface="Calibri"/>
               </a:rPr>
@@ -9359,7 +9359,7 @@
             <a:r>
               <a:rPr sz="1100" b="0" i="0">
                 <a:solidFill>
-                  <a:srgbClr val="1F2937"/>
+                  <a:srgbClr val="334155"/>
                 </a:solidFill>
                 <a:latin typeface="Calibri"/>
               </a:rPr>
@@ -9429,7 +9429,7 @@
             <a:r>
               <a:rPr sz="1100" b="0" i="0">
                 <a:solidFill>
-                  <a:srgbClr val="1F2937"/>
+                  <a:srgbClr val="334155"/>
                 </a:solidFill>
                 <a:latin typeface="Calibri"/>
               </a:rPr>
@@ -9499,7 +9499,7 @@
             <a:r>
               <a:rPr sz="1100" b="0" i="0">
                 <a:solidFill>
-                  <a:srgbClr val="1F2937"/>
+                  <a:srgbClr val="334155"/>
                 </a:solidFill>
                 <a:latin typeface="Calibri"/>
               </a:rPr>
@@ -9569,7 +9569,7 @@
             <a:r>
               <a:rPr sz="1100" b="0" i="0">
                 <a:solidFill>
-                  <a:srgbClr val="1F2937"/>
+                  <a:srgbClr val="334155"/>
                 </a:solidFill>
                 <a:latin typeface="Calibri"/>
               </a:rPr>
@@ -9639,7 +9639,7 @@
             <a:r>
               <a:rPr sz="1100" b="0" i="0">
                 <a:solidFill>
-                  <a:srgbClr val="1F2937"/>
+                  <a:srgbClr val="334155"/>
                 </a:solidFill>
                 <a:latin typeface="Calibri"/>
               </a:rPr>
@@ -9709,7 +9709,7 @@
             <a:r>
               <a:rPr sz="1100" b="0" i="0">
                 <a:solidFill>
-                  <a:srgbClr val="1F2937"/>
+                  <a:srgbClr val="334155"/>
                 </a:solidFill>
                 <a:latin typeface="Calibri"/>
               </a:rPr>
@@ -9779,7 +9779,7 @@
             <a:r>
               <a:rPr sz="1100" b="0" i="0">
                 <a:solidFill>
-                  <a:srgbClr val="1F2937"/>
+                  <a:srgbClr val="334155"/>
                 </a:solidFill>
                 <a:latin typeface="Calibri"/>
               </a:rPr>
@@ -9849,7 +9849,7 @@
             <a:r>
               <a:rPr sz="1100" b="0" i="0">
                 <a:solidFill>
-                  <a:srgbClr val="1F2937"/>
+                  <a:srgbClr val="334155"/>
                 </a:solidFill>
                 <a:latin typeface="Calibri"/>
               </a:rPr>
@@ -9919,7 +9919,7 @@
             <a:r>
               <a:rPr sz="1100" b="0" i="0">
                 <a:solidFill>
-                  <a:srgbClr val="1F2937"/>
+                  <a:srgbClr val="334155"/>
                 </a:solidFill>
                 <a:latin typeface="Calibri"/>
               </a:rPr>
@@ -9989,7 +9989,7 @@
             <a:r>
               <a:rPr sz="1100" b="0" i="0">
                 <a:solidFill>
-                  <a:srgbClr val="1F2937"/>
+                  <a:srgbClr val="334155"/>
                 </a:solidFill>
                 <a:latin typeface="Calibri"/>
               </a:rPr>
@@ -10059,7 +10059,7 @@
             <a:r>
               <a:rPr sz="1100" b="0" i="0">
                 <a:solidFill>
-                  <a:srgbClr val="1F2937"/>
+                  <a:srgbClr val="334155"/>
                 </a:solidFill>
                 <a:latin typeface="Calibri"/>
               </a:rPr>
@@ -10129,7 +10129,7 @@
             <a:r>
               <a:rPr sz="1100" b="0" i="0">
                 <a:solidFill>
-                  <a:srgbClr val="1F2937"/>
+                  <a:srgbClr val="334155"/>
                 </a:solidFill>
                 <a:latin typeface="Calibri"/>
               </a:rPr>
@@ -10199,7 +10199,7 @@
             <a:r>
               <a:rPr sz="1100" b="0" i="0">
                 <a:solidFill>
-                  <a:srgbClr val="1F2937"/>
+                  <a:srgbClr val="334155"/>
                 </a:solidFill>
                 <a:latin typeface="Calibri"/>
               </a:rPr>
@@ -10269,7 +10269,7 @@
             <a:r>
               <a:rPr sz="1100" b="0" i="0">
                 <a:solidFill>
-                  <a:srgbClr val="1F2937"/>
+                  <a:srgbClr val="334155"/>
                 </a:solidFill>
                 <a:latin typeface="Calibri"/>
               </a:rPr>
@@ -10339,7 +10339,7 @@
             <a:r>
               <a:rPr sz="1100" b="0" i="0">
                 <a:solidFill>
-                  <a:srgbClr val="1F2937"/>
+                  <a:srgbClr val="334155"/>
                 </a:solidFill>
                 <a:latin typeface="Calibri"/>
               </a:rPr>
@@ -10409,7 +10409,7 @@
             <a:r>
               <a:rPr sz="1100" b="0" i="0">
                 <a:solidFill>
-                  <a:srgbClr val="1F2937"/>
+                  <a:srgbClr val="334155"/>
                 </a:solidFill>
                 <a:latin typeface="Calibri"/>
               </a:rPr>
@@ -10435,7 +10435,7 @@
             </a:avLst>
           </a:prstGeom>
           <a:solidFill>
-            <a:srgbClr val="E8F6F9"/>
+            <a:srgbClr val="E0E7FF"/>
           </a:solidFill>
           <a:ln w="19050">
             <a:solidFill>
@@ -10527,7 +10527,7 @@
             <a:r>
               <a:rPr sz="1100" b="0" i="0">
                 <a:solidFill>
-                  <a:srgbClr val="1F2937"/>
+                  <a:srgbClr val="334155"/>
                 </a:solidFill>
                 <a:latin typeface="Calibri"/>
               </a:rPr>
@@ -10746,7 +10746,7 @@
             </a:avLst>
           </a:prstGeom>
           <a:solidFill>
-            <a:srgbClr val="F0F9FB"/>
+            <a:srgbClr val="F5F3FF"/>
           </a:solidFill>
           <a:ln w="25400">
             <a:solidFill>
@@ -10838,7 +10838,7 @@
             <a:r>
               <a:rPr sz="1300" b="0" i="0">
                 <a:solidFill>
-                  <a:srgbClr val="1F2937"/>
+                  <a:srgbClr val="334155"/>
                 </a:solidFill>
                 <a:latin typeface="Calibri"/>
               </a:rPr>
@@ -10908,7 +10908,7 @@
             <a:r>
               <a:rPr sz="1100" b="0" i="0">
                 <a:solidFill>
-                  <a:srgbClr val="1F2937"/>
+                  <a:srgbClr val="334155"/>
                 </a:solidFill>
                 <a:latin typeface="Calibri"/>
               </a:rPr>
@@ -10978,7 +10978,7 @@
             <a:r>
               <a:rPr sz="1100" b="0" i="0">
                 <a:solidFill>
-                  <a:srgbClr val="1F2937"/>
+                  <a:srgbClr val="334155"/>
                 </a:solidFill>
                 <a:latin typeface="Calibri"/>
               </a:rPr>
@@ -11048,7 +11048,7 @@
             <a:r>
               <a:rPr sz="1100" b="0" i="0">
                 <a:solidFill>
-                  <a:srgbClr val="1F2937"/>
+                  <a:srgbClr val="334155"/>
                 </a:solidFill>
                 <a:latin typeface="Calibri"/>
               </a:rPr>
@@ -11118,7 +11118,7 @@
             <a:r>
               <a:rPr sz="1100" b="0" i="0">
                 <a:solidFill>
-                  <a:srgbClr val="1F2937"/>
+                  <a:srgbClr val="334155"/>
                 </a:solidFill>
                 <a:latin typeface="Calibri"/>
               </a:rPr>
@@ -11188,7 +11188,7 @@
             <a:r>
               <a:rPr sz="1100" b="0" i="0">
                 <a:solidFill>
-                  <a:srgbClr val="1F2937"/>
+                  <a:srgbClr val="334155"/>
                 </a:solidFill>
                 <a:latin typeface="Calibri"/>
               </a:rPr>
@@ -11218,7 +11218,7 @@
           </a:solidFill>
           <a:ln w="12700">
             <a:solidFill>
-              <a:srgbClr val="D0D9E1"/>
+              <a:srgbClr val="E2E8F0"/>
             </a:solidFill>
           </a:ln>
           <a:effectLst/>
@@ -11306,7 +11306,7 @@
             <a:r>
               <a:rPr sz="1300" b="0" i="0">
                 <a:solidFill>
-                  <a:srgbClr val="1F2937"/>
+                  <a:srgbClr val="334155"/>
                 </a:solidFill>
                 <a:latin typeface="Calibri"/>
               </a:rPr>
@@ -11376,7 +11376,7 @@
             <a:r>
               <a:rPr sz="1100" b="0" i="0">
                 <a:solidFill>
-                  <a:srgbClr val="1F2937"/>
+                  <a:srgbClr val="334155"/>
                 </a:solidFill>
                 <a:latin typeface="Calibri"/>
               </a:rPr>
@@ -11446,7 +11446,7 @@
             <a:r>
               <a:rPr sz="1100" b="0" i="0">
                 <a:solidFill>
-                  <a:srgbClr val="1F2937"/>
+                  <a:srgbClr val="334155"/>
                 </a:solidFill>
                 <a:latin typeface="Calibri"/>
               </a:rPr>
@@ -11516,7 +11516,7 @@
             <a:r>
               <a:rPr sz="1100" b="0" i="0">
                 <a:solidFill>
-                  <a:srgbClr val="1F2937"/>
+                  <a:srgbClr val="334155"/>
                 </a:solidFill>
                 <a:latin typeface="Calibri"/>
               </a:rPr>
@@ -11586,7 +11586,7 @@
             <a:r>
               <a:rPr sz="1100" b="0" i="0">
                 <a:solidFill>
-                  <a:srgbClr val="1F2937"/>
+                  <a:srgbClr val="334155"/>
                 </a:solidFill>
                 <a:latin typeface="Calibri"/>
               </a:rPr>
@@ -11656,7 +11656,7 @@
             <a:r>
               <a:rPr sz="1100" b="0" i="0">
                 <a:solidFill>
-                  <a:srgbClr val="1F2937"/>
+                  <a:srgbClr val="334155"/>
                 </a:solidFill>
                 <a:latin typeface="Calibri"/>
               </a:rPr>
@@ -11910,7 +11910,7 @@
             </a:avLst>
           </a:prstGeom>
           <a:solidFill>
-            <a:srgbClr val="F0F9FB"/>
+            <a:srgbClr val="F5F3FF"/>
           </a:solidFill>
           <a:ln w="25400">
             <a:solidFill>
@@ -12037,7 +12037,7 @@
             <a:r>
               <a:rPr sz="1100" b="0" i="0">
                 <a:solidFill>
-                  <a:srgbClr val="1F2937"/>
+                  <a:srgbClr val="334155"/>
                 </a:solidFill>
                 <a:latin typeface="Calibri"/>
               </a:rPr>
@@ -12249,7 +12249,7 @@
             </a:avLst>
           </a:prstGeom>
           <a:solidFill>
-            <a:srgbClr val="EEF2FF"/>
+            <a:srgbClr val="F5F3FF"/>
           </a:solidFill>
           <a:ln>
             <a:noFill/>
@@ -12304,7 +12304,7 @@
             <a:r>
               <a:rPr sz="1200" b="0" i="0">
                 <a:solidFill>
-                  <a:srgbClr val="1F2937"/>
+                  <a:srgbClr val="334155"/>
                 </a:solidFill>
                 <a:latin typeface="Calibri"/>
               </a:rPr>
@@ -12400,7 +12400,7 @@
             </a:avLst>
           </a:prstGeom>
           <a:solidFill>
-            <a:srgbClr val="EEF2FF"/>
+            <a:srgbClr val="F5F3FF"/>
           </a:solidFill>
           <a:ln>
             <a:noFill/>
@@ -12455,7 +12455,7 @@
             <a:r>
               <a:rPr sz="1200" b="0" i="0">
                 <a:solidFill>
-                  <a:srgbClr val="1F2937"/>
+                  <a:srgbClr val="334155"/>
                 </a:solidFill>
                 <a:latin typeface="Calibri"/>
               </a:rPr>
@@ -12551,7 +12551,7 @@
             </a:avLst>
           </a:prstGeom>
           <a:solidFill>
-            <a:srgbClr val="EEF2FF"/>
+            <a:srgbClr val="F5F3FF"/>
           </a:solidFill>
           <a:ln>
             <a:noFill/>
@@ -12606,7 +12606,7 @@
             <a:r>
               <a:rPr sz="1200" b="0" i="0">
                 <a:solidFill>
-                  <a:srgbClr val="1F2937"/>
+                  <a:srgbClr val="334155"/>
                 </a:solidFill>
                 <a:latin typeface="Calibri"/>
               </a:rPr>
@@ -12702,7 +12702,7 @@
             </a:avLst>
           </a:prstGeom>
           <a:solidFill>
-            <a:srgbClr val="EEF2FF"/>
+            <a:srgbClr val="F5F3FF"/>
           </a:solidFill>
           <a:ln>
             <a:noFill/>
@@ -12757,7 +12757,7 @@
             <a:r>
               <a:rPr sz="1200" b="0" i="0">
                 <a:solidFill>
-                  <a:srgbClr val="1F2937"/>
+                  <a:srgbClr val="334155"/>
                 </a:solidFill>
                 <a:latin typeface="Calibri"/>
               </a:rPr>
@@ -13322,7 +13322,7 @@
             <a:r>
               <a:rPr sz="1200" b="0" i="0">
                 <a:solidFill>
-                  <a:srgbClr val="1F2937"/>
+                  <a:srgbClr val="334155"/>
                 </a:solidFill>
                 <a:latin typeface="Calibri"/>
               </a:rPr>
@@ -13357,7 +13357,7 @@
             <a:r>
               <a:rPr sz="1200" b="0" i="0">
                 <a:solidFill>
-                  <a:srgbClr val="1F2937"/>
+                  <a:srgbClr val="334155"/>
                 </a:solidFill>
                 <a:latin typeface="Calibri"/>
               </a:rPr>
@@ -13392,7 +13392,7 @@
             <a:r>
               <a:rPr sz="1200" b="0" i="0">
                 <a:solidFill>
-                  <a:srgbClr val="1F2937"/>
+                  <a:srgbClr val="334155"/>
                 </a:solidFill>
                 <a:latin typeface="Calibri"/>
               </a:rPr>
@@ -13427,7 +13427,7 @@
             <a:r>
               <a:rPr sz="1200" b="0" i="0">
                 <a:solidFill>
-                  <a:srgbClr val="1F2937"/>
+                  <a:srgbClr val="334155"/>
                 </a:solidFill>
                 <a:latin typeface="Calibri"/>
               </a:rPr>
@@ -13453,7 +13453,7 @@
             </a:avLst>
           </a:prstGeom>
           <a:solidFill>
-            <a:srgbClr val="E8F6F9"/>
+            <a:srgbClr val="E0E7FF"/>
           </a:solidFill>
           <a:ln>
             <a:noFill/>
@@ -13694,7 +13694,7 @@
             <a:r>
               <a:rPr sz="1200" b="0" i="0">
                 <a:solidFill>
-                  <a:srgbClr val="1F2937"/>
+                  <a:srgbClr val="334155"/>
                 </a:solidFill>
                 <a:latin typeface="Calibri"/>
               </a:rPr>
@@ -13729,7 +13729,7 @@
             <a:r>
               <a:rPr sz="1200" b="0" i="0">
                 <a:solidFill>
-                  <a:srgbClr val="1F2937"/>
+                  <a:srgbClr val="334155"/>
                 </a:solidFill>
                 <a:latin typeface="Calibri"/>
               </a:rPr>
@@ -13764,7 +13764,7 @@
             <a:r>
               <a:rPr sz="1200" b="0" i="0">
                 <a:solidFill>
-                  <a:srgbClr val="1F2937"/>
+                  <a:srgbClr val="334155"/>
                 </a:solidFill>
                 <a:latin typeface="Calibri"/>
               </a:rPr>
@@ -13799,7 +13799,7 @@
             <a:r>
               <a:rPr sz="1200" b="0" i="0">
                 <a:solidFill>
-                  <a:srgbClr val="1F2937"/>
+                  <a:srgbClr val="334155"/>
                 </a:solidFill>
                 <a:latin typeface="Calibri"/>
               </a:rPr>
@@ -13825,7 +13825,7 @@
             </a:avLst>
           </a:prstGeom>
           <a:solidFill>
-            <a:srgbClr val="EEF2FF"/>
+            <a:srgbClr val="F5F3FF"/>
           </a:solidFill>
           <a:ln>
             <a:noFill/>
@@ -13880,7 +13880,7 @@
             <a:r>
               <a:rPr sz="1200" b="0" i="0">
                 <a:solidFill>
-                  <a:srgbClr val="1F2937"/>
+                  <a:srgbClr val="334155"/>
                 </a:solidFill>
                 <a:latin typeface="Calibri"/>
               </a:rPr>
@@ -13915,7 +13915,7 @@
             <a:r>
               <a:rPr sz="1200" b="0" i="0">
                 <a:solidFill>
-                  <a:srgbClr val="1F2937"/>
+                  <a:srgbClr val="334155"/>
                 </a:solidFill>
                 <a:latin typeface="Calibri"/>
               </a:rPr>
@@ -13950,7 +13950,7 @@
             <a:r>
               <a:rPr sz="1200" b="0" i="0">
                 <a:solidFill>
-                  <a:srgbClr val="1F2937"/>
+                  <a:srgbClr val="334155"/>
                 </a:solidFill>
                 <a:latin typeface="Calibri"/>
               </a:rPr>
@@ -13985,7 +13985,7 @@
             <a:r>
               <a:rPr sz="1200" b="0" i="0">
                 <a:solidFill>
-                  <a:srgbClr val="1F2937"/>
+                  <a:srgbClr val="334155"/>
                 </a:solidFill>
                 <a:latin typeface="Calibri"/>
               </a:rPr>
@@ -14066,7 +14066,7 @@
             <a:r>
               <a:rPr sz="1200" b="0" i="0">
                 <a:solidFill>
-                  <a:srgbClr val="1F2937"/>
+                  <a:srgbClr val="334155"/>
                 </a:solidFill>
                 <a:latin typeface="Calibri"/>
               </a:rPr>
@@ -14101,7 +14101,7 @@
             <a:r>
               <a:rPr sz="1200" b="0" i="0">
                 <a:solidFill>
-                  <a:srgbClr val="1F2937"/>
+                  <a:srgbClr val="334155"/>
                 </a:solidFill>
                 <a:latin typeface="Calibri"/>
               </a:rPr>
@@ -14136,7 +14136,7 @@
             <a:r>
               <a:rPr sz="1200" b="0" i="0">
                 <a:solidFill>
-                  <a:srgbClr val="1F2937"/>
+                  <a:srgbClr val="334155"/>
                 </a:solidFill>
                 <a:latin typeface="Calibri"/>
               </a:rPr>
@@ -14171,7 +14171,7 @@
             <a:r>
               <a:rPr sz="1200" b="0" i="0">
                 <a:solidFill>
-                  <a:srgbClr val="1F2937"/>
+                  <a:srgbClr val="334155"/>
                 </a:solidFill>
                 <a:latin typeface="Calibri"/>
               </a:rPr>
